--- a/Mid Sem PPT.pptx
+++ b/Mid Sem PPT.pptx
@@ -9,44 +9,36 @@
     <p:sldId id="283" r:id="rId3"/>
     <p:sldId id="285" r:id="rId4"/>
     <p:sldId id="286" r:id="rId5"/>
-    <p:sldId id="284" r:id="rId6"/>
-    <p:sldId id="293" r:id="rId7"/>
-    <p:sldId id="287" r:id="rId8"/>
-    <p:sldId id="288" r:id="rId9"/>
-    <p:sldId id="289" r:id="rId10"/>
-    <p:sldId id="290" r:id="rId11"/>
-    <p:sldId id="291" r:id="rId12"/>
-    <p:sldId id="292" r:id="rId13"/>
+    <p:sldId id="288" r:id="rId6"/>
+    <p:sldId id="289" r:id="rId7"/>
+    <p:sldId id="290" r:id="rId8"/>
+    <p:sldId id="291" r:id="rId9"/>
+    <p:sldId id="292" r:id="rId10"/>
   </p:sldIdLst>
   <p:sldSz cx="18288000" cy="10287000"/>
   <p:notesSz cx="6858000" cy="9144000"/>
   <p:embeddedFontLst>
     <p:embeddedFont>
-      <p:font typeface="Akzidenz-Grotesk Heavy" panose="020B0604020202020204" charset="0"/>
-      <p:regular r:id="rId14"/>
-    </p:embeddedFont>
-    <p:embeddedFont>
-      <p:font typeface="Canva Sans Bold" panose="020B0604020202020204" charset="0"/>
-      <p:regular r:id="rId15"/>
-    </p:embeddedFont>
-    <p:embeddedFont>
       <p:font typeface="Lato" panose="020F0502020204030203" pitchFamily="34" charset="0"/>
-      <p:regular r:id="rId16"/>
-      <p:bold r:id="rId17"/>
-      <p:italic r:id="rId18"/>
-      <p:boldItalic r:id="rId19"/>
+      <p:regular r:id="rId11"/>
+      <p:bold r:id="rId12"/>
     </p:embeddedFont>
     <p:embeddedFont>
       <p:font typeface="Lato Bold" panose="020F0502020204030203" charset="0"/>
-      <p:regular r:id="rId20"/>
+      <p:regular r:id="rId13"/>
+    </p:embeddedFont>
+    <p:embeddedFont>
+      <p:font typeface="Open Sans" panose="020B0606030504020204" pitchFamily="34" charset="0"/>
+      <p:regular r:id="rId14"/>
+      <p:bold r:id="rId15"/>
     </p:embeddedFont>
     <p:embeddedFont>
       <p:font typeface="Open Sans Extra Bold" panose="020B0604020202020204" charset="0"/>
-      <p:regular r:id="rId21"/>
+      <p:regular r:id="rId16"/>
     </p:embeddedFont>
     <p:embeddedFont>
       <p:font typeface="Open Sauce" panose="020B0604020202020204" charset="0"/>
-      <p:regular r:id="rId22"/>
+      <p:regular r:id="rId17"/>
     </p:embeddedFont>
   </p:embeddedFontLst>
   <p:defaultTextStyle>
@@ -343,7 +335,7 @@
             <a:fld id="{1D8BD707-D9CF-40AE-B4C6-C98DA3205C09}" type="datetimeFigureOut">
               <a:rPr lang="en-US" smtClean="0"/>
               <a:pPr/>
-              <a:t>9/23/2026</a:t>
+              <a:t>10/30/2026</a:t>
             </a:fld>
             <a:endParaRPr lang="en-US"/>
           </a:p>
@@ -508,7 +500,7 @@
             <a:fld id="{1D8BD707-D9CF-40AE-B4C6-C98DA3205C09}" type="datetimeFigureOut">
               <a:rPr lang="en-US" smtClean="0"/>
               <a:pPr/>
-              <a:t>9/23/2026</a:t>
+              <a:t>10/30/2026</a:t>
             </a:fld>
             <a:endParaRPr lang="en-US"/>
           </a:p>
@@ -683,7 +675,7 @@
             <a:fld id="{1D8BD707-D9CF-40AE-B4C6-C98DA3205C09}" type="datetimeFigureOut">
               <a:rPr lang="en-US" smtClean="0"/>
               <a:pPr/>
-              <a:t>9/23/2026</a:t>
+              <a:t>10/30/2026</a:t>
             </a:fld>
             <a:endParaRPr lang="en-US"/>
           </a:p>
@@ -848,7 +840,7 @@
             <a:fld id="{1D8BD707-D9CF-40AE-B4C6-C98DA3205C09}" type="datetimeFigureOut">
               <a:rPr lang="en-US" smtClean="0"/>
               <a:pPr/>
-              <a:t>9/23/2026</a:t>
+              <a:t>10/30/2026</a:t>
             </a:fld>
             <a:endParaRPr lang="en-US"/>
           </a:p>
@@ -1090,7 +1082,7 @@
             <a:fld id="{1D8BD707-D9CF-40AE-B4C6-C98DA3205C09}" type="datetimeFigureOut">
               <a:rPr lang="en-US" smtClean="0"/>
               <a:pPr/>
-              <a:t>9/23/2026</a:t>
+              <a:t>10/30/2026</a:t>
             </a:fld>
             <a:endParaRPr lang="en-US"/>
           </a:p>
@@ -1372,7 +1364,7 @@
             <a:fld id="{1D8BD707-D9CF-40AE-B4C6-C98DA3205C09}" type="datetimeFigureOut">
               <a:rPr lang="en-US" smtClean="0"/>
               <a:pPr/>
-              <a:t>9/23/2026</a:t>
+              <a:t>10/30/2026</a:t>
             </a:fld>
             <a:endParaRPr lang="en-US"/>
           </a:p>
@@ -1788,7 +1780,7 @@
             <a:fld id="{1D8BD707-D9CF-40AE-B4C6-C98DA3205C09}" type="datetimeFigureOut">
               <a:rPr lang="en-US" smtClean="0"/>
               <a:pPr/>
-              <a:t>9/23/2026</a:t>
+              <a:t>10/30/2026</a:t>
             </a:fld>
             <a:endParaRPr lang="en-US"/>
           </a:p>
@@ -1902,7 +1894,7 @@
             <a:fld id="{1D8BD707-D9CF-40AE-B4C6-C98DA3205C09}" type="datetimeFigureOut">
               <a:rPr lang="en-US" smtClean="0"/>
               <a:pPr/>
-              <a:t>9/23/2026</a:t>
+              <a:t>10/30/2026</a:t>
             </a:fld>
             <a:endParaRPr lang="en-US"/>
           </a:p>
@@ -1994,7 +1986,7 @@
             <a:fld id="{1D8BD707-D9CF-40AE-B4C6-C98DA3205C09}" type="datetimeFigureOut">
               <a:rPr lang="en-US" smtClean="0"/>
               <a:pPr/>
-              <a:t>9/23/2026</a:t>
+              <a:t>10/30/2026</a:t>
             </a:fld>
             <a:endParaRPr lang="en-US"/>
           </a:p>
@@ -2266,7 +2258,7 @@
             <a:fld id="{1D8BD707-D9CF-40AE-B4C6-C98DA3205C09}" type="datetimeFigureOut">
               <a:rPr lang="en-US" smtClean="0"/>
               <a:pPr/>
-              <a:t>9/23/2026</a:t>
+              <a:t>10/30/2026</a:t>
             </a:fld>
             <a:endParaRPr lang="en-US"/>
           </a:p>
@@ -2515,7 +2507,7 @@
             <a:fld id="{1D8BD707-D9CF-40AE-B4C6-C98DA3205C09}" type="datetimeFigureOut">
               <a:rPr lang="en-US" smtClean="0"/>
               <a:pPr/>
-              <a:t>9/23/2026</a:t>
+              <a:t>10/30/2026</a:t>
             </a:fld>
             <a:endParaRPr lang="en-US"/>
           </a:p>
@@ -2723,7 +2715,7 @@
             <a:fld id="{1D8BD707-D9CF-40AE-B4C6-C98DA3205C09}" type="datetimeFigureOut">
               <a:rPr lang="en-US" smtClean="0"/>
               <a:pPr/>
-              <a:t>9/23/2026</a:t>
+              <a:t>10/30/2026</a:t>
             </a:fld>
             <a:endParaRPr lang="en-US"/>
           </a:p>
@@ -3241,62 +3233,27 @@
       </p:sp>
       <p:sp>
         <p:nvSpPr>
-          <p:cNvPr id="17" name="TextBox 17"/>
+          <p:cNvPr id="18" name="TextBox 18"/>
           <p:cNvSpPr txBox="1"/>
           <p:nvPr/>
         </p:nvSpPr>
         <p:spPr>
           <a:xfrm>
-            <a:off x="1547646" y="239709"/>
-            <a:ext cx="16033195" cy="454868"/>
+            <a:off x="1447800" y="1126873"/>
+            <a:ext cx="14249400" cy="984885"/>
           </a:xfrm>
           <a:prstGeom prst="rect">
             <a:avLst/>
           </a:prstGeom>
         </p:spPr>
         <p:txBody>
-          <a:bodyPr lIns="0" tIns="0" rIns="0" bIns="0" rtlCol="0" anchor="t">
-            <a:spAutoFit/>
-          </a:bodyPr>
-          <a:lstStyle/>
-          <a:p>
-            <a:pPr>
-              <a:defRPr b="1" sz="2200">
-                <a:solidFill>
-                  <a:srgbClr val="2563EB"/>
-                </a:solidFill>
-                <a:latin typeface="Open Sans"/>
-              </a:defRPr>
-            </a:pPr>
-            <a:r>
-              <a:t>COURSE PROJECT (CP) MID SEMESTER ASSESSMENT SEM-1 2026-27</a:t>
-            </a:r>
-          </a:p>
-        </p:txBody>
-      </p:sp>
-      <p:sp>
-        <p:nvSpPr>
-          <p:cNvPr id="18" name="TextBox 18"/>
-          <p:cNvSpPr txBox="1"/>
-          <p:nvPr/>
-        </p:nvSpPr>
-        <p:spPr>
-          <a:xfrm>
-            <a:off x="3753840" y="1275561"/>
-            <a:ext cx="11581157" cy="461665"/>
-          </a:xfrm>
-          <a:prstGeom prst="rect">
-            <a:avLst/>
-          </a:prstGeom>
-        </p:spPr>
-        <p:txBody>
           <a:bodyPr wrap="square" lIns="0" tIns="0" rIns="0" bIns="0" rtlCol="0" anchor="t">
             <a:spAutoFit/>
           </a:bodyPr>
           <a:lstStyle/>
           <a:p>
             <a:pPr>
-              <a:defRPr b="1" sz="2200">
+              <a:defRPr sz="2200" b="1">
                 <a:solidFill>
                   <a:srgbClr val="0F172A"/>
                 </a:solidFill>
@@ -3304,7 +3261,28 @@
               </a:defRPr>
             </a:pPr>
             <a:r>
-              <a:t>CP Project Title :- OScope: Operating Systems Simulation &amp; Experimentation Laboratory</a:t>
+              <a:rPr sz="3200" dirty="0">
+                <a:latin typeface="Lato Bold" panose="020B0604020202020204" charset="0"/>
+                <a:ea typeface="Lato Bold" panose="020B0604020202020204" charset="0"/>
+                <a:cs typeface="Lato Bold" panose="020B0604020202020204" charset="0"/>
+              </a:rPr>
+              <a:t>Project Title :- </a:t>
+            </a:r>
+            <a:r>
+              <a:rPr sz="3200" dirty="0" err="1">
+                <a:latin typeface="Lato Bold" panose="020B0604020202020204" charset="0"/>
+                <a:ea typeface="Lato Bold" panose="020B0604020202020204" charset="0"/>
+                <a:cs typeface="Lato Bold" panose="020B0604020202020204" charset="0"/>
+              </a:rPr>
+              <a:t>OScope</a:t>
+            </a:r>
+            <a:r>
+              <a:rPr sz="3200" dirty="0">
+                <a:latin typeface="Lato Bold" panose="020B0604020202020204" charset="0"/>
+                <a:ea typeface="Lato Bold" panose="020B0604020202020204" charset="0"/>
+                <a:cs typeface="Lato Bold" panose="020B0604020202020204" charset="0"/>
+              </a:rPr>
+              <a:t>: Operating Systems Simulation &amp; Experimentation Laboratory</a:t>
             </a:r>
           </a:p>
         </p:txBody>
@@ -3358,45 +3336,13 @@
       </p:sp>
       <p:sp>
         <p:nvSpPr>
-          <p:cNvPr id="20" name="TextBox 20"/>
-          <p:cNvSpPr txBox="1"/>
-          <p:nvPr/>
-        </p:nvSpPr>
-        <p:spPr>
-          <a:xfrm>
-            <a:off x="5678043" y="2965673"/>
-            <a:ext cx="3886200" cy="491353"/>
-          </a:xfrm>
-          <a:prstGeom prst="rect">
-            <a:avLst/>
-          </a:prstGeom>
-        </p:spPr>
-        <p:txBody>
-          <a:bodyPr lIns="0" tIns="0" rIns="0" bIns="0" rtlCol="0" anchor="t">
-            <a:spAutoFit/>
-          </a:bodyPr>
-          <a:lstStyle/>
-          <a:p>
-            <a:pPr>
-              <a:defRPr sz="1800">
-                <a:latin typeface="Open Sans"/>
-              </a:defRPr>
-            </a:pPr>
-            <a:r>
-              <a:t>CP_GROUP:- E-05</a:t>
-            </a:r>
-          </a:p>
-        </p:txBody>
-      </p:sp>
-      <p:sp>
-        <p:nvSpPr>
           <p:cNvPr id="21" name="TextBox 21"/>
           <p:cNvSpPr txBox="1"/>
           <p:nvPr/>
         </p:nvSpPr>
         <p:spPr>
           <a:xfrm>
-            <a:off x="10367226" y="2965672"/>
+            <a:off x="13106400" y="2876759"/>
             <a:ext cx="3024210" cy="491353"/>
           </a:xfrm>
           <a:prstGeom prst="rect">
@@ -3427,7 +3373,7 @@
               <a:rPr lang="en-US" sz="3200" dirty="0">
                 <a:latin typeface="Lato"/>
               </a:rPr>
-              <a:t> Thursday</a:t>
+              <a:t> Friday</a:t>
             </a:r>
             <a:endParaRPr lang="en-US" sz="3200" dirty="0">
               <a:solidFill>
@@ -3449,8 +3395,8 @@
         </p:nvSpPr>
         <p:spPr>
           <a:xfrm>
-            <a:off x="13836019" y="2965671"/>
-            <a:ext cx="3483293" cy="491353"/>
+            <a:off x="8727975" y="2928535"/>
+            <a:ext cx="3483293" cy="492443"/>
           </a:xfrm>
           <a:prstGeom prst="rect">
             <a:avLst/>
@@ -3468,6 +3414,11 @@
               </a:defRPr>
             </a:pPr>
             <a:r>
+              <a:rPr sz="3200" dirty="0">
+                <a:latin typeface="Lato" panose="020F0502020204030203" pitchFamily="34" charset="0"/>
+                <a:ea typeface="Lato" panose="020F0502020204030203" pitchFamily="34" charset="0"/>
+                <a:cs typeface="Lato" panose="020F0502020204030203" pitchFamily="34" charset="0"/>
+              </a:rPr>
               <a:t>Date : 30/10/2026</a:t>
             </a:r>
           </a:p>
@@ -3507,7 +3458,9 @@
             </a:pPr>
             <a:r>
               <a:rPr sz="3200" b="1" dirty="0">
-                <a:latin typeface="Lato Bold"/>
+                <a:latin typeface="Lato" panose="020F0502020204030203" pitchFamily="34" charset="0"/>
+                <a:ea typeface="Lato" panose="020F0502020204030203" pitchFamily="34" charset="0"/>
+                <a:cs typeface="Lato" panose="020F0502020204030203" pitchFamily="34" charset="0"/>
               </a:rPr>
               <a:t>Presented by :-</a:t>
             </a:r>
@@ -3520,19 +3473,25 @@
             </a:pPr>
             <a:r>
               <a:rPr sz="3200" dirty="0">
-                <a:latin typeface="Lato Bold"/>
+                <a:latin typeface="Lato" panose="020F0502020204030203" pitchFamily="34" charset="0"/>
+                <a:ea typeface="Lato" panose="020F0502020204030203" pitchFamily="34" charset="0"/>
+                <a:cs typeface="Lato" panose="020F0502020204030203" pitchFamily="34" charset="0"/>
               </a:rPr>
               <a:t>Aditya Rana  </a:t>
             </a:r>
             <a:r>
               <a:rPr lang="en-US" sz="3200" dirty="0">
-                <a:latin typeface="Lato Bold"/>
+                <a:latin typeface="Lato" panose="020F0502020204030203" pitchFamily="34" charset="0"/>
+                <a:ea typeface="Lato" panose="020F0502020204030203" pitchFamily="34" charset="0"/>
+                <a:cs typeface="Lato" panose="020F0502020204030203" pitchFamily="34" charset="0"/>
               </a:rPr>
               <a:t>  </a:t>
             </a:r>
             <a:r>
               <a:rPr sz="3200" dirty="0">
-                <a:latin typeface="Lato Bold"/>
+                <a:latin typeface="Lato" panose="020F0502020204030203" pitchFamily="34" charset="0"/>
+                <a:ea typeface="Lato" panose="020F0502020204030203" pitchFamily="34" charset="0"/>
+                <a:cs typeface="Lato" panose="020F0502020204030203" pitchFamily="34" charset="0"/>
               </a:rPr>
               <a:t>–  PRN: 12413107</a:t>
             </a:r>
@@ -3545,19 +3504,25 @@
             </a:pPr>
             <a:r>
               <a:rPr sz="3200" dirty="0">
-                <a:latin typeface="Lato Bold"/>
+                <a:latin typeface="Lato" panose="020F0502020204030203" pitchFamily="34" charset="0"/>
+                <a:ea typeface="Lato" panose="020F0502020204030203" pitchFamily="34" charset="0"/>
+                <a:cs typeface="Lato" panose="020F0502020204030203" pitchFamily="34" charset="0"/>
               </a:rPr>
               <a:t>Nitish Sahu  </a:t>
             </a:r>
             <a:r>
               <a:rPr lang="en-US" sz="3200" dirty="0">
-                <a:latin typeface="Lato Bold"/>
+                <a:latin typeface="Lato" panose="020F0502020204030203" pitchFamily="34" charset="0"/>
+                <a:ea typeface="Lato" panose="020F0502020204030203" pitchFamily="34" charset="0"/>
+                <a:cs typeface="Lato" panose="020F0502020204030203" pitchFamily="34" charset="0"/>
               </a:rPr>
               <a:t>   </a:t>
             </a:r>
             <a:r>
               <a:rPr sz="3200" dirty="0">
-                <a:latin typeface="Lato Bold"/>
+                <a:latin typeface="Lato" panose="020F0502020204030203" pitchFamily="34" charset="0"/>
+                <a:ea typeface="Lato" panose="020F0502020204030203" pitchFamily="34" charset="0"/>
+                <a:cs typeface="Lato" panose="020F0502020204030203" pitchFamily="34" charset="0"/>
               </a:rPr>
               <a:t>–  PRN: 12412096</a:t>
             </a:r>
@@ -3570,7 +3535,9 @@
             </a:pPr>
             <a:r>
               <a:rPr sz="3200" dirty="0">
-                <a:latin typeface="Lato Bold"/>
+                <a:latin typeface="Lato" panose="020F0502020204030203" pitchFamily="34" charset="0"/>
+                <a:ea typeface="Lato" panose="020F0502020204030203" pitchFamily="34" charset="0"/>
+                <a:cs typeface="Lato" panose="020F0502020204030203" pitchFamily="34" charset="0"/>
               </a:rPr>
               <a:t>Palash Sahuji  –  PRN: 12414915</a:t>
             </a:r>
@@ -3583,7 +3550,9 @@
             </a:pPr>
             <a:r>
               <a:rPr sz="3200" dirty="0">
-                <a:latin typeface="Lato Bold"/>
+                <a:latin typeface="Lato" panose="020F0502020204030203" pitchFamily="34" charset="0"/>
+                <a:ea typeface="Lato" panose="020F0502020204030203" pitchFamily="34" charset="0"/>
+                <a:cs typeface="Lato" panose="020F0502020204030203" pitchFamily="34" charset="0"/>
               </a:rPr>
               <a:t>Manthan Sali  –  PRN: 12411978</a:t>
             </a:r>
@@ -3598,8 +3567,8 @@
         </p:nvSpPr>
         <p:spPr>
           <a:xfrm>
-            <a:off x="10647613" y="4502232"/>
-            <a:ext cx="6376812" cy="1029962"/>
+            <a:off x="9677400" y="4502232"/>
+            <a:ext cx="7347025" cy="491353"/>
           </a:xfrm>
           <a:prstGeom prst="rect">
             <a:avLst/>
@@ -3621,10 +3590,33 @@
             </a:pPr>
             <a:r>
               <a:rPr sz="3200" b="1" dirty="0">
-                <a:latin typeface="Lato Bold"/>
-              </a:rPr>
-              <a:t>Project Guide :- Prof. Shubhangi Dadaso Kamble</a:t>
-            </a:r>
+                <a:latin typeface="Lato" panose="020F0502020204030203" pitchFamily="34" charset="0"/>
+                <a:ea typeface="Lato" panose="020F0502020204030203" pitchFamily="34" charset="0"/>
+                <a:cs typeface="Lato" panose="020F0502020204030203" pitchFamily="34" charset="0"/>
+              </a:rPr>
+              <a:t>Project Guide :- Prof. </a:t>
+            </a:r>
+            <a:r>
+              <a:rPr lang="en-IN" sz="3200" b="1" dirty="0">
+                <a:latin typeface="Lato" panose="020F0502020204030203" pitchFamily="34" charset="0"/>
+                <a:ea typeface="Lato" panose="020F0502020204030203" pitchFamily="34" charset="0"/>
+                <a:cs typeface="Lato" panose="020F0502020204030203" pitchFamily="34" charset="0"/>
+              </a:rPr>
+              <a:t>Priyanka </a:t>
+            </a:r>
+            <a:r>
+              <a:rPr lang="en-IN" sz="3200" b="1" dirty="0" err="1">
+                <a:latin typeface="Lato" panose="020F0502020204030203" pitchFamily="34" charset="0"/>
+                <a:ea typeface="Lato" panose="020F0502020204030203" pitchFamily="34" charset="0"/>
+                <a:cs typeface="Lato" panose="020F0502020204030203" pitchFamily="34" charset="0"/>
+              </a:rPr>
+              <a:t>Khalate</a:t>
+            </a:r>
+            <a:endParaRPr sz="3200" b="1" dirty="0">
+              <a:latin typeface="Lato" panose="020F0502020204030203" pitchFamily="34" charset="0"/>
+              <a:ea typeface="Lato" panose="020F0502020204030203" pitchFamily="34" charset="0"/>
+              <a:cs typeface="Lato" panose="020F0502020204030203" pitchFamily="34" charset="0"/>
+            </a:endParaRPr>
           </a:p>
         </p:txBody>
       </p:sp>
@@ -3636,7 +3628,7 @@
         </p:nvSpPr>
         <p:spPr>
           <a:xfrm>
-            <a:off x="1315988" y="6823830"/>
+            <a:off x="1056579" y="7272721"/>
             <a:ext cx="16972012" cy="1128514"/>
           </a:xfrm>
           <a:prstGeom prst="rect">
@@ -3714,7 +3706,7 @@
         </p:nvSpPr>
         <p:spPr>
           <a:xfrm>
-            <a:off x="3583232" y="8224757"/>
+            <a:off x="3581400" y="8748304"/>
             <a:ext cx="11922371" cy="547650"/>
           </a:xfrm>
           <a:prstGeom prst="rect">
@@ -3906,9 +3898,15 @@
 </p:sld>
 </file>
 
-<file path=ppt/slides/slide10.xml><?xml version="1.0" encoding="utf-8"?>
+<file path=ppt/slides/slide2.xml><?xml version="1.0" encoding="utf-8"?>
 <p:sld xmlns:a="http://schemas.openxmlformats.org/drawingml/2006/main" xmlns:r="http://schemas.openxmlformats.org/officeDocument/2006/relationships" xmlns:p="http://schemas.openxmlformats.org/presentationml/2006/main">
   <p:cSld>
+    <p:bg>
+      <p:bgPr>
+        <a:noFill/>
+        <a:effectLst/>
+      </p:bgPr>
+    </p:bg>
     <p:spTree>
       <p:nvGrpSpPr>
         <p:cNvPr id="1" name=""/>
@@ -4272,7 +4270,7 @@
           </a:bodyPr>
           <a:lstStyle/>
           <a:p>
-            <a:pPr algn="l">
+            <a:pPr>
               <a:lnSpc>
                 <a:spcPts val="10248"/>
               </a:lnSpc>
@@ -4281,10 +4279,16 @@
               </a:spcBef>
             </a:pPr>
             <a:r>
-              <a:rPr sz="6000">
+              <a:rPr lang="en-US" sz="6000" dirty="0">
+                <a:solidFill>
+                  <a:srgbClr val="051D40"/>
+                </a:solidFill>
                 <a:latin typeface="Open Sans Extra Bold"/>
-              </a:rPr>
-              <a:t>Tech Stack</a:t>
+                <a:ea typeface="Open Sans Extra Bold"/>
+                <a:cs typeface="Open Sans Extra Bold"/>
+                <a:sym typeface="Open Sans Extra Bold"/>
+              </a:rPr>
+              <a:t>Overview</a:t>
             </a:r>
           </a:p>
         </p:txBody>
@@ -4352,8 +4356,8 @@
         </p:nvSpPr>
         <p:spPr>
           <a:xfrm>
-            <a:off x="1828800" y="2377440"/>
-            <a:ext cx="14630400" cy="6858000"/>
+            <a:off x="2926080" y="2377440"/>
+            <a:ext cx="12435840" cy="6786666"/>
           </a:xfrm>
           <a:prstGeom prst="rect">
             <a:avLst/>
@@ -4374,22 +4378,15 @@
               </a:spcAft>
             </a:pPr>
             <a:r>
-              <a:rPr b="1" sz="2000">
+              <a:rPr sz="3200" b="0" dirty="0">
                 <a:solidFill>
                   <a:srgbClr val="0F172A"/>
                 </a:solidFill>
-                <a:latin typeface="Open Sans"/>
-              </a:rPr>
-              <a:t>Core Simulation Engine:</a:t>
-            </a:r>
-            <a:r>
-              <a:rPr b="0" sz="2000">
-                <a:solidFill>
-                  <a:srgbClr val="334155"/>
-                </a:solidFill>
-                <a:latin typeface="Open Sans"/>
-              </a:rPr>
-              <a:t> C++20 (Modern ISO C++), CMake 3.20+, GoogleTest (356 unit tests), POSIX APIs (&lt;unistd.h&gt;, &lt;semaphore.h&gt;).</a:t>
+                <a:latin typeface="Lato" panose="020F0502020204030203" pitchFamily="34" charset="0"/>
+                <a:ea typeface="Lato" panose="020F0502020204030203" pitchFamily="34" charset="0"/>
+                <a:cs typeface="Lato" panose="020F0502020204030203" pitchFamily="34" charset="0"/>
+              </a:rPr>
+              <a:t>1. Introduction &amp; Project Scope</a:t>
             </a:r>
           </a:p>
           <a:p>
@@ -4402,22 +4399,15 @@
               </a:spcAft>
             </a:pPr>
             <a:r>
-              <a:rPr b="1" sz="2000">
+              <a:rPr sz="3200" b="0" dirty="0">
                 <a:solidFill>
                   <a:srgbClr val="0F172A"/>
                 </a:solidFill>
-                <a:latin typeface="Open Sans"/>
-              </a:rPr>
-              <a:t>Backend &amp; API Server:</a:t>
-            </a:r>
-            <a:r>
-              <a:rPr b="0" sz="2000">
-                <a:solidFill>
-                  <a:srgbClr val="334155"/>
-                </a:solidFill>
-                <a:latin typeface="Open Sans"/>
-              </a:rPr>
-              <a:t> Python 3.12 Standard Library (http.server.ThreadingHTTPServer - zero external pip dependencies), Subprocess / WSL 2 execution runner.</a:t>
+                <a:latin typeface="Lato" panose="020F0502020204030203" pitchFamily="34" charset="0"/>
+                <a:ea typeface="Lato" panose="020F0502020204030203" pitchFamily="34" charset="0"/>
+                <a:cs typeface="Lato" panose="020F0502020204030203" pitchFamily="34" charset="0"/>
+              </a:rPr>
+              <a:t>2. Motivation &amp; Problem Statement</a:t>
             </a:r>
           </a:p>
           <a:p>
@@ -4430,22 +4420,15 @@
               </a:spcAft>
             </a:pPr>
             <a:r>
-              <a:rPr b="1" sz="2000">
+              <a:rPr sz="3200" b="0" dirty="0">
                 <a:solidFill>
                   <a:srgbClr val="0F172A"/>
                 </a:solidFill>
-                <a:latin typeface="Open Sans"/>
-              </a:rPr>
-              <a:t>Modern Web Frontend:</a:t>
-            </a:r>
-            <a:r>
-              <a:rPr b="0" sz="2000">
-                <a:solidFill>
-                  <a:srgbClr val="334155"/>
-                </a:solidFill>
-                <a:latin typeface="Open Sans"/>
-              </a:rPr>
-              <a:t> Vanilla JavaScript (ES6+), HTML5, CSS3 Custom Properties (Linear/Geist Light Mode Design System), Vector SVG Engine (Lucide-standard icons).</a:t>
+                <a:latin typeface="Lato" panose="020F0502020204030203" pitchFamily="34" charset="0"/>
+                <a:ea typeface="Lato" panose="020F0502020204030203" pitchFamily="34" charset="0"/>
+                <a:cs typeface="Lato" panose="020F0502020204030203" pitchFamily="34" charset="0"/>
+              </a:rPr>
+              <a:t>3. Literature Survey (Pedagogical Systems &amp; Simulators)</a:t>
             </a:r>
           </a:p>
           <a:p>
@@ -4458,57 +4441,183 @@
               </a:spcAft>
             </a:pPr>
             <a:r>
-              <a:rPr b="1" sz="2000">
+              <a:rPr sz="3200" b="0" dirty="0">
                 <a:solidFill>
                   <a:srgbClr val="0F172A"/>
                 </a:solidFill>
-                <a:latin typeface="Open Sans"/>
-              </a:rPr>
-              <a:t>Desktop GUI &amp; Testing:</a:t>
-            </a:r>
-            <a:r>
-              <a:rPr b="0" sz="2000">
+                <a:latin typeface="Lato" panose="020F0502020204030203" pitchFamily="34" charset="0"/>
+                <a:ea typeface="Lato" panose="020F0502020204030203" pitchFamily="34" charset="0"/>
+                <a:cs typeface="Lato" panose="020F0502020204030203" pitchFamily="34" charset="0"/>
+              </a:rPr>
+              <a:t>4. Research Gap &amp; Comparative Analysis</a:t>
+            </a:r>
+          </a:p>
+          <a:p>
+            <a:pPr>
+              <a:lnSpc>
+                <a:spcPct val="120000"/>
+              </a:lnSpc>
+              <a:spcAft>
+                <a:spcPts val="1400"/>
+              </a:spcAft>
+            </a:pPr>
+            <a:r>
+              <a:rPr sz="3200" b="0" dirty="0">
                 <a:solidFill>
-                  <a:srgbClr val="334155"/>
+                  <a:srgbClr val="0F172A"/>
                 </a:solidFill>
-                <a:latin typeface="Open Sans"/>
-              </a:rPr>
-              <a:t> PySide6 (Qt 6), Pytest 9.2 (150 automated tests), GitHub Actions CI pipeline.</a:t>
-            </a:r>
-          </a:p>
-        </p:txBody>
-      </p:sp>
-      <p:pic>
-        <p:nvPicPr>
-          <p:cNvPr id="13" name="Picture 12">
-            <a:extLst>
-              <a:ext uri="{FF2B5EF4-FFF2-40B4-BE49-F238E27FC236}">
-                <a16:creationId xmlns:a16="http://schemas.microsoft.com/office/drawing/2014/main" id="{3340E126-75F2-002E-5C79-5F6E68A9ACA1}"/>
-              </a:ext>
-            </a:extLst>
-          </p:cNvPr>
-          <p:cNvPicPr>
-            <a:picLocks noChangeAspect="1"/>
-          </p:cNvPicPr>
-          <p:nvPr/>
-        </p:nvPicPr>
-        <p:blipFill>
-          <a:blip r:embed="rId2"/>
-          <a:stretch>
-            <a:fillRect/>
-          </a:stretch>
-        </p:blipFill>
-        <p:spPr>
-          <a:xfrm>
-            <a:off x="14762973" y="0"/>
-            <a:ext cx="2475191" cy="2097206"/>
-          </a:xfrm>
-          <a:prstGeom prst="rect">
+                <a:latin typeface="Lato" panose="020F0502020204030203" pitchFamily="34" charset="0"/>
+                <a:ea typeface="Lato" panose="020F0502020204030203" pitchFamily="34" charset="0"/>
+                <a:cs typeface="Lato" panose="020F0502020204030203" pitchFamily="34" charset="0"/>
+              </a:rPr>
+              <a:t>5. Project Objectives &amp; Deliverables</a:t>
+            </a:r>
+          </a:p>
+          <a:p>
+            <a:pPr>
+              <a:lnSpc>
+                <a:spcPct val="120000"/>
+              </a:lnSpc>
+              <a:spcAft>
+                <a:spcPts val="1400"/>
+              </a:spcAft>
+            </a:pPr>
+            <a:r>
+              <a:rPr sz="3200" b="0" dirty="0">
+                <a:solidFill>
+                  <a:srgbClr val="0F172A"/>
+                </a:solidFill>
+                <a:latin typeface="Lato" panose="020F0502020204030203" pitchFamily="34" charset="0"/>
+                <a:ea typeface="Lato" panose="020F0502020204030203" pitchFamily="34" charset="0"/>
+                <a:cs typeface="Lato" panose="020F0502020204030203" pitchFamily="34" charset="0"/>
+              </a:rPr>
+              <a:t>6. Design &amp; 4-Tier System Architecture</a:t>
+            </a:r>
+          </a:p>
+          <a:p>
+            <a:pPr>
+              <a:lnSpc>
+                <a:spcPct val="120000"/>
+              </a:lnSpc>
+              <a:spcAft>
+                <a:spcPts val="1400"/>
+              </a:spcAft>
+            </a:pPr>
+            <a:r>
+              <a:rPr sz="3200" b="0" dirty="0">
+                <a:solidFill>
+                  <a:srgbClr val="0F172A"/>
+                </a:solidFill>
+                <a:latin typeface="Lato" panose="020F0502020204030203" pitchFamily="34" charset="0"/>
+                <a:ea typeface="Lato" panose="020F0502020204030203" pitchFamily="34" charset="0"/>
+                <a:cs typeface="Lato" panose="020F0502020204030203" pitchFamily="34" charset="0"/>
+              </a:rPr>
+              <a:t>7. Technical Stack &amp; Implementation Details</a:t>
+            </a:r>
+          </a:p>
+          <a:p>
+            <a:pPr>
+              <a:lnSpc>
+                <a:spcPct val="120000"/>
+              </a:lnSpc>
+              <a:spcAft>
+                <a:spcPts val="1400"/>
+              </a:spcAft>
+            </a:pPr>
+            <a:r>
+              <a:rPr sz="3200" b="0" dirty="0">
+                <a:solidFill>
+                  <a:srgbClr val="0F172A"/>
+                </a:solidFill>
+                <a:latin typeface="Lato" panose="020F0502020204030203" pitchFamily="34" charset="0"/>
+                <a:ea typeface="Lato" panose="020F0502020204030203" pitchFamily="34" charset="0"/>
+                <a:cs typeface="Lato" panose="020F0502020204030203" pitchFamily="34" charset="0"/>
+              </a:rPr>
+              <a:t>8. Academic References &amp; Citations</a:t>
+            </a:r>
+          </a:p>
+          <a:p>
+            <a:pPr>
+              <a:lnSpc>
+                <a:spcPct val="120000"/>
+              </a:lnSpc>
+              <a:spcAft>
+                <a:spcPts val="1400"/>
+              </a:spcAft>
+            </a:pPr>
+            <a:r>
+              <a:rPr sz="3200" b="0" dirty="0">
+                <a:solidFill>
+                  <a:srgbClr val="0F172A"/>
+                </a:solidFill>
+                <a:latin typeface="Lato" panose="020F0502020204030203" pitchFamily="34" charset="0"/>
+                <a:ea typeface="Lato" panose="020F0502020204030203" pitchFamily="34" charset="0"/>
+                <a:cs typeface="Lato" panose="020F0502020204030203" pitchFamily="34" charset="0"/>
+              </a:rPr>
+              <a:t>9. Conclusion &amp; Project Summary</a:t>
+            </a:r>
+          </a:p>
+        </p:txBody>
+      </p:sp>
+      <p:sp>
+        <p:nvSpPr>
+          <p:cNvPr id="15" name="Freeform 10"/>
+          <p:cNvSpPr/>
+          <p:nvPr/>
+        </p:nvSpPr>
+        <p:spPr>
+          <a:xfrm>
+            <a:off x="14760804" y="0"/>
+            <a:ext cx="2477360" cy="2095128"/>
+          </a:xfrm>
+          <a:custGeom>
             <a:avLst/>
-          </a:prstGeom>
-        </p:spPr>
-      </p:pic>
+            <a:gdLst/>
+            <a:ahLst/>
+            <a:cxnLst/>
+            <a:rect l="l" t="t" r="r" b="b"/>
+            <a:pathLst>
+              <a:path w="2477360" h="2725964">
+                <a:moveTo>
+                  <a:pt x="0" y="0"/>
+                </a:moveTo>
+                <a:lnTo>
+                  <a:pt x="2477360" y="0"/>
+                </a:lnTo>
+                <a:lnTo>
+                  <a:pt x="2477360" y="2725965"/>
+                </a:lnTo>
+                <a:lnTo>
+                  <a:pt x="0" y="2725965"/>
+                </a:lnTo>
+                <a:lnTo>
+                  <a:pt x="0" y="0"/>
+                </a:lnTo>
+                <a:close/>
+              </a:path>
+            </a:pathLst>
+          </a:custGeom>
+          <a:blipFill>
+            <a:blip r:embed="rId2"/>
+            <a:stretch>
+              <a:fillRect t="-9805" r="-231773" b="-25876"/>
+            </a:stretch>
+          </a:blipFill>
+        </p:spPr>
+        <p:txBody>
+          <a:bodyPr/>
+          <a:lstStyle/>
+          <a:p>
+            <a:endParaRPr lang="en-IN"/>
+          </a:p>
+        </p:txBody>
+      </p:sp>
     </p:spTree>
+    <p:extLst>
+      <p:ext uri="{BB962C8B-B14F-4D97-AF65-F5344CB8AC3E}">
+        <p14:creationId xmlns:p14="http://schemas.microsoft.com/office/powerpoint/2010/main" val="2472234980"/>
+      </p:ext>
+    </p:extLst>
   </p:cSld>
   <p:clrMapOvr>
     <a:masterClrMapping/>
@@ -4516,7 +4625,7 @@
 </p:sld>
 </file>
 
-<file path=ppt/slides/slide11.xml><?xml version="1.0" encoding="utf-8"?>
+<file path=ppt/slides/slide3.xml><?xml version="1.0" encoding="utf-8"?>
 <p:sld xmlns:a="http://schemas.openxmlformats.org/drawingml/2006/main" xmlns:r="http://schemas.openxmlformats.org/officeDocument/2006/relationships" xmlns:p="http://schemas.openxmlformats.org/presentationml/2006/main">
   <p:cSld>
     <p:spTree>
@@ -4838,7 +4947,7 @@
         </p:nvSpPr>
         <p:spPr>
           <a:xfrm>
-            <a:off x="1723107" y="2460438"/>
+            <a:off x="1723107" y="2097206"/>
             <a:ext cx="903745" cy="0"/>
           </a:xfrm>
           <a:prstGeom prst="line">
@@ -4869,7 +4978,7 @@
         </p:nvSpPr>
         <p:spPr>
           <a:xfrm>
-            <a:off x="1723107" y="900442"/>
+            <a:off x="1723107" y="674021"/>
             <a:ext cx="9354483" cy="1194686"/>
           </a:xfrm>
           <a:prstGeom prst="rect">
@@ -4891,10 +5000,10 @@
               </a:spcBef>
             </a:pPr>
             <a:r>
-              <a:rPr sz="6000">
+              <a:rPr sz="6000" dirty="0">
                 <a:latin typeface="Open Sans Extra Bold"/>
               </a:rPr>
-              <a:t>References</a:t>
+              <a:t>Introduction</a:t>
             </a:r>
           </a:p>
         </p:txBody>
@@ -4962,8 +5071,8 @@
         </p:nvSpPr>
         <p:spPr>
           <a:xfrm>
-            <a:off x="1828800" y="2286000"/>
-            <a:ext cx="14630400" cy="7132320"/>
+            <a:off x="1066801" y="2486901"/>
+            <a:ext cx="8778239" cy="6790449"/>
           </a:xfrm>
           <a:prstGeom prst="rect">
             <a:avLst/>
@@ -4984,13 +5093,26 @@
               </a:spcAft>
             </a:pPr>
             <a:r>
-              <a:rPr b="0" sz="1800">
+              <a:rPr sz="2400" b="1" dirty="0">
                 <a:solidFill>
                   <a:srgbClr val="0F172A"/>
                 </a:solidFill>
-                <a:latin typeface="Open Sans"/>
-              </a:rPr>
-              <a:t>Silberschatz, A., Galvin, P. B., &amp; Gagne, G. (2021). Operating System Concepts (10th ed.). John Wiley &amp; Sons.</a:t>
+                <a:latin typeface="Lato" panose="020F0502020204030203" pitchFamily="34" charset="0"/>
+                <a:ea typeface="Lato" panose="020F0502020204030203" pitchFamily="34" charset="0"/>
+                <a:cs typeface="Lato" panose="020F0502020204030203" pitchFamily="34" charset="0"/>
+              </a:rPr>
+              <a:t>Interactive Systems Laboratory:</a:t>
+            </a:r>
+            <a:r>
+              <a:rPr sz="2400" b="0" dirty="0">
+                <a:solidFill>
+                  <a:srgbClr val="334155"/>
+                </a:solidFill>
+                <a:latin typeface="Lato" panose="020F0502020204030203" pitchFamily="34" charset="0"/>
+                <a:ea typeface="Lato" panose="020F0502020204030203" pitchFamily="34" charset="0"/>
+                <a:cs typeface="Lato" panose="020F0502020204030203" pitchFamily="34" charset="0"/>
+              </a:rPr>
+              <a:t> Connects theoretical Operating System principles with real algorithmic execution, measurement, vector visualization, and comparative benchmarks.</a:t>
             </a:r>
           </a:p>
           <a:p>
@@ -5003,13 +5125,26 @@
               </a:spcAft>
             </a:pPr>
             <a:r>
-              <a:rPr b="0" sz="1800">
+              <a:rPr sz="2400" b="1" dirty="0">
                 <a:solidFill>
                   <a:srgbClr val="0F172A"/>
                 </a:solidFill>
-                <a:latin typeface="Open Sans"/>
-              </a:rPr>
-              <a:t>Tanenbaum, A. S., &amp; Bos, H. (2023). Modern Operating Systems (5th ed.). Pearson Education.</a:t>
+                <a:latin typeface="Lato" panose="020F0502020204030203" pitchFamily="34" charset="0"/>
+                <a:ea typeface="Lato" panose="020F0502020204030203" pitchFamily="34" charset="0"/>
+                <a:cs typeface="Lato" panose="020F0502020204030203" pitchFamily="34" charset="0"/>
+              </a:rPr>
+              <a:t>Bridging Abstract Theory:</a:t>
+            </a:r>
+            <a:r>
+              <a:rPr sz="2400" b="0" dirty="0">
+                <a:solidFill>
+                  <a:srgbClr val="334155"/>
+                </a:solidFill>
+                <a:latin typeface="Lato" panose="020F0502020204030203" pitchFamily="34" charset="0"/>
+                <a:ea typeface="Lato" panose="020F0502020204030203" pitchFamily="34" charset="0"/>
+                <a:cs typeface="Lato" panose="020F0502020204030203" pitchFamily="34" charset="0"/>
+              </a:rPr>
+              <a:t> Eliminates black-box confusion by demystifying how CPU dispatching, dynamic memory placement, virtual paging, and deadlocks function in practice.</a:t>
             </a:r>
           </a:p>
           <a:p>
@@ -5022,13 +5157,48 @@
               </a:spcAft>
             </a:pPr>
             <a:r>
-              <a:rPr b="0" sz="1800">
+              <a:rPr sz="2400" b="1" dirty="0">
                 <a:solidFill>
                   <a:srgbClr val="0F172A"/>
                 </a:solidFill>
-                <a:latin typeface="Open Sans"/>
-              </a:rPr>
-              <a:t>Al-Kharabsheh, K. et al. (2022). "Evaluating Interactive Visual Simulators for Operating Systems Education." IEEE Transactions on Learning Technologies, 15(3), 340-352.</a:t>
+                <a:latin typeface="Lato" panose="020F0502020204030203" pitchFamily="34" charset="0"/>
+                <a:ea typeface="Lato" panose="020F0502020204030203" pitchFamily="34" charset="0"/>
+                <a:cs typeface="Lato" panose="020F0502020204030203" pitchFamily="34" charset="0"/>
+              </a:rPr>
+              <a:t>Dual-Pillar Architecture:</a:t>
+            </a:r>
+            <a:r>
+              <a:rPr sz="2400" b="0" dirty="0">
+                <a:solidFill>
+                  <a:srgbClr val="334155"/>
+                </a:solidFill>
+                <a:latin typeface="Lato" panose="020F0502020204030203" pitchFamily="34" charset="0"/>
+                <a:ea typeface="Lato" panose="020F0502020204030203" pitchFamily="34" charset="0"/>
+                <a:cs typeface="Lato" panose="020F0502020204030203" pitchFamily="34" charset="0"/>
+              </a:rPr>
+              <a:t> Couples an authoritative C++20 simulation core with real Linux/POSIX kernel interfaces (fork/</a:t>
+            </a:r>
+            <a:r>
+              <a:rPr sz="2400" b="0" dirty="0" err="1">
+                <a:solidFill>
+                  <a:srgbClr val="334155"/>
+                </a:solidFill>
+                <a:latin typeface="Lato" panose="020F0502020204030203" pitchFamily="34" charset="0"/>
+                <a:ea typeface="Lato" panose="020F0502020204030203" pitchFamily="34" charset="0"/>
+                <a:cs typeface="Lato" panose="020F0502020204030203" pitchFamily="34" charset="0"/>
+              </a:rPr>
+              <a:t>execve</a:t>
+            </a:r>
+            <a:r>
+              <a:rPr sz="2400" b="0" dirty="0">
+                <a:solidFill>
+                  <a:srgbClr val="334155"/>
+                </a:solidFill>
+                <a:latin typeface="Lato" panose="020F0502020204030203" pitchFamily="34" charset="0"/>
+                <a:ea typeface="Lato" panose="020F0502020204030203" pitchFamily="34" charset="0"/>
+                <a:cs typeface="Lato" panose="020F0502020204030203" pitchFamily="34" charset="0"/>
+              </a:rPr>
+              <a:t> process trees, anonymous pipes, semaphores, and /proc telemetry).</a:t>
             </a:r>
           </a:p>
           <a:p>
@@ -5041,32 +5211,26 @@
               </a:spcAft>
             </a:pPr>
             <a:r>
-              <a:rPr b="0" sz="1800">
+              <a:rPr sz="2400" b="1" dirty="0">
                 <a:solidFill>
                   <a:srgbClr val="0F172A"/>
                 </a:solidFill>
-                <a:latin typeface="Open Sans"/>
-              </a:rPr>
-              <a:t>Robbins, K. A., &amp; Robbins, S. (2020). "Practical UNIX and Systems Programming Visualization." ACM Technical Symposium on Computer Science Education (SIGCSE), 52(1), 112-118.</a:t>
-            </a:r>
-          </a:p>
-          <a:p>
-            <a:pPr>
-              <a:lnSpc>
-                <a:spcPct val="120000"/>
-              </a:lnSpc>
-              <a:spcAft>
-                <a:spcPts val="1400"/>
-              </a:spcAft>
-            </a:pPr>
-            <a:r>
-              <a:rPr b="0" sz="1800">
+                <a:latin typeface="Lato" panose="020F0502020204030203" pitchFamily="34" charset="0"/>
+                <a:ea typeface="Lato" panose="020F0502020204030203" pitchFamily="34" charset="0"/>
+                <a:cs typeface="Lato" panose="020F0502020204030203" pitchFamily="34" charset="0"/>
+              </a:rPr>
+              <a:t>Production-Grade Web Experience:</a:t>
+            </a:r>
+            <a:r>
+              <a:rPr sz="2400" b="0" dirty="0">
                 <a:solidFill>
-                  <a:srgbClr val="0F172A"/>
+                  <a:srgbClr val="334155"/>
                 </a:solidFill>
-                <a:latin typeface="Open Sans"/>
-              </a:rPr>
-              <a:t>Love, R. (2018). Linux Kernel Development (3rd ed.). Addison-Wesley Professional.</a:t>
+                <a:latin typeface="Lato" panose="020F0502020204030203" pitchFamily="34" charset="0"/>
+                <a:ea typeface="Lato" panose="020F0502020204030203" pitchFamily="34" charset="0"/>
+                <a:cs typeface="Lato" panose="020F0502020204030203" pitchFamily="34" charset="0"/>
+              </a:rPr>
+              <a:t> Delivers an accessible, zero-dependency modern light-mode engineering platform inspired by Linear/Geist design guidelines across 10 distinct OS domains.</a:t>
             </a:r>
           </a:p>
         </p:txBody>
@@ -5076,7 +5240,7 @@
           <p:cNvPr id="13" name="Picture 12">
             <a:extLst>
               <a:ext uri="{FF2B5EF4-FFF2-40B4-BE49-F238E27FC236}">
-                <a16:creationId xmlns:a16="http://schemas.microsoft.com/office/drawing/2014/main" id="{ED2DF0ED-4752-BED5-545F-3DD4ABF75597}"/>
+                <a16:creationId xmlns:a16="http://schemas.microsoft.com/office/drawing/2014/main" id="{10588309-5823-B91D-F091-DEA9FF2FD52C}"/>
               </a:ext>
             </a:extLst>
           </p:cNvPr>
@@ -5093,8 +5257,32 @@
         </p:blipFill>
         <p:spPr>
           <a:xfrm>
-            <a:off x="14762973" y="-2078"/>
+            <a:off x="14767889" y="0"/>
             <a:ext cx="2475191" cy="2097206"/>
+          </a:xfrm>
+          <a:prstGeom prst="rect">
+            <a:avLst/>
+          </a:prstGeom>
+        </p:spPr>
+      </p:pic>
+      <p:pic>
+        <p:nvPicPr>
+          <p:cNvPr id="19" name="Picture 18" descr="modules_matrix.png"/>
+          <p:cNvPicPr>
+            <a:picLocks noChangeAspect="1"/>
+          </p:cNvPicPr>
+          <p:nvPr/>
+        </p:nvPicPr>
+        <p:blipFill>
+          <a:blip r:embed="rId3"/>
+          <a:stretch>
+            <a:fillRect/>
+          </a:stretch>
+        </p:blipFill>
+        <p:spPr>
+          <a:xfrm>
+            <a:off x="9369184" y="2019300"/>
+            <a:ext cx="8510752" cy="6019800"/>
           </a:xfrm>
           <a:prstGeom prst="rect">
             <a:avLst/>
@@ -5109,7 +5297,7 @@
 </p:sld>
 </file>
 
-<file path=ppt/slides/slide12.xml><?xml version="1.0" encoding="utf-8"?>
+<file path=ppt/slides/slide4.xml><?xml version="1.0" encoding="utf-8"?>
 <p:sld xmlns:a="http://schemas.openxmlformats.org/drawingml/2006/main" xmlns:r="http://schemas.openxmlformats.org/officeDocument/2006/relationships" xmlns:p="http://schemas.openxmlformats.org/presentationml/2006/main">
   <p:cSld>
     <p:spTree>
@@ -5487,7 +5675,7 @@
               <a:rPr sz="6000">
                 <a:latin typeface="Open Sans Extra Bold"/>
               </a:rPr>
-              <a:t>Conclusion</a:t>
+              <a:t>Motivation</a:t>
             </a:r>
           </a:p>
         </p:txBody>
@@ -5555,8 +5743,8 @@
         </p:nvSpPr>
         <p:spPr>
           <a:xfrm>
-            <a:off x="1828800" y="2377440"/>
-            <a:ext cx="14630400" cy="6858000"/>
+            <a:off x="1097280" y="2286000"/>
+            <a:ext cx="8412480" cy="6858000"/>
           </a:xfrm>
           <a:prstGeom prst="rect">
             <a:avLst/>
@@ -5577,22 +5765,22 @@
               </a:spcAft>
             </a:pPr>
             <a:r>
-              <a:rPr b="1" sz="2000">
+              <a:rPr sz="1800" b="1">
                 <a:solidFill>
                   <a:srgbClr val="0F172A"/>
                 </a:solidFill>
                 <a:latin typeface="Open Sans"/>
               </a:rPr>
-              <a:t>Comprehensive Integration:</a:t>
-            </a:r>
-            <a:r>
-              <a:rPr b="0" sz="2000">
+              <a:t>High Cognitive Barrier:</a:t>
+            </a:r>
+            <a:r>
+              <a:rPr sz="1800" b="0">
                 <a:solidFill>
                   <a:srgbClr val="334155"/>
                 </a:solidFill>
                 <a:latin typeface="Open Sans"/>
               </a:rPr>
-              <a:t> Successfully unified 10 core Operating Systems domains into a single production-quality laboratory platform.</a:t>
+              <a:t> Abstract kernel concepts (address translation, multi-queue preemption, Belady's anomaly) are hidden in kernel space and difficult to grasp from static textbook diagrams.</a:t>
             </a:r>
           </a:p>
           <a:p>
@@ -5605,22 +5793,22 @@
               </a:spcAft>
             </a:pPr>
             <a:r>
-              <a:rPr b="1" sz="2000">
+              <a:rPr sz="1800" b="1">
                 <a:solidFill>
                   <a:srgbClr val="0F172A"/>
                 </a:solidFill>
                 <a:latin typeface="Open Sans"/>
               </a:rPr>
-              <a:t>Pedagogical Impact:</a:t>
-            </a:r>
-            <a:r>
-              <a:rPr b="0" sz="2000">
+              <a:t>Severe Tool Fragmentation:</a:t>
+            </a:r>
+            <a:r>
+              <a:rPr sz="1800" b="0">
                 <a:solidFill>
                   <a:srgbClr val="334155"/>
                 </a:solidFill>
                 <a:latin typeface="Open Sans"/>
               </a:rPr>
-              <a:t> Bridges abstract theoretical textbook models with concrete visual execution, enabling intuitive experimentation for CS students.</a:t>
+              <a:t> Students are forced to switch between disconnected, single-topic CLI programs or abandoned 2000s Java applets with no unified workflow.</a:t>
             </a:r>
           </a:p>
           <a:p>
@@ -5633,22 +5821,22 @@
               </a:spcAft>
             </a:pPr>
             <a:r>
-              <a:rPr b="1" sz="2000">
+              <a:rPr sz="1800" b="1">
                 <a:solidFill>
                   <a:srgbClr val="0F172A"/>
                 </a:solidFill>
                 <a:latin typeface="Open Sans"/>
               </a:rPr>
-              <a:t>Engineering Rigor:</a:t>
-            </a:r>
-            <a:r>
-              <a:rPr b="0" sz="2000">
+              <a:t>Lack of Empirical Verification:</a:t>
+            </a:r>
+            <a:r>
+              <a:rPr sz="1800" b="0">
                 <a:solidFill>
                   <a:srgbClr val="334155"/>
                 </a:solidFill>
                 <a:latin typeface="Open Sans"/>
               </a:rPr>
-              <a:t> Combines high-performance C++20 simulation accuracy with real POSIX kernel integration and 150 automated verification tests.</a:t>
+              <a:t> Inability to systematically test and benchmark edge cases (convoy effects, priority inversions, memory fragmentation, and safe vs unsafe state sequences).</a:t>
             </a:r>
           </a:p>
           <a:p>
@@ -5661,32 +5849,32 @@
               </a:spcAft>
             </a:pPr>
             <a:r>
-              <a:rPr b="1" sz="2000">
+              <a:rPr sz="1800" b="1">
                 <a:solidFill>
                   <a:srgbClr val="0F172A"/>
                 </a:solidFill>
                 <a:latin typeface="Open Sans"/>
               </a:rPr>
-              <a:t>Accessible Deployment:</a:t>
-            </a:r>
-            <a:r>
-              <a:rPr b="0" sz="2000">
+              <a:t>Active Learning Methodology:</a:t>
+            </a:r>
+            <a:r>
+              <a:rPr sz="1800" b="0">
                 <a:solidFill>
                   <a:srgbClr val="334155"/>
                 </a:solidFill>
                 <a:latin typeface="Open Sans"/>
               </a:rPr>
-              <a:t> Zero external pip dependencies, instant browser launch, and modern light-theme devtool ergonomics.</a:t>
+              <a:t> Addresses the proven pedagogical pipeline: Learn -&gt; Configure Workloads -&gt; Execute C++ Simulation -&gt; Observe Vector Visualizers -&gt; Measure Metrics -&gt; Analyze.</a:t>
             </a:r>
           </a:p>
         </p:txBody>
       </p:sp>
       <p:pic>
         <p:nvPicPr>
-          <p:cNvPr id="13" name="Picture 12">
+          <p:cNvPr id="19" name="Picture 18">
             <a:extLst>
               <a:ext uri="{FF2B5EF4-FFF2-40B4-BE49-F238E27FC236}">
-                <a16:creationId xmlns:a16="http://schemas.microsoft.com/office/drawing/2014/main" id="{49A95A48-FED7-90FE-2396-589EEA344C2F}"/>
+                <a16:creationId xmlns:a16="http://schemas.microsoft.com/office/drawing/2014/main" id="{C58E4A21-9D9D-571F-D536-7B858BE8C33C}"/>
               </a:ext>
             </a:extLst>
           </p:cNvPr>
@@ -5703,8 +5891,32 @@
         </p:blipFill>
         <p:spPr>
           <a:xfrm>
-            <a:off x="14762973" y="0"/>
+            <a:off x="14762973" y="-2078"/>
             <a:ext cx="2475191" cy="2097206"/>
+          </a:xfrm>
+          <a:prstGeom prst="rect">
+            <a:avLst/>
+          </a:prstGeom>
+        </p:spPr>
+      </p:pic>
+      <p:pic>
+        <p:nvPicPr>
+          <p:cNvPr id="20" name="Picture 19" descr="visualizers_showcase.png"/>
+          <p:cNvPicPr>
+            <a:picLocks noChangeAspect="1"/>
+          </p:cNvPicPr>
+          <p:nvPr/>
+        </p:nvPicPr>
+        <p:blipFill>
+          <a:blip r:embed="rId3"/>
+          <a:stretch>
+            <a:fillRect/>
+          </a:stretch>
+        </p:blipFill>
+        <p:spPr>
+          <a:xfrm>
+            <a:off x="9875520" y="2377440"/>
+            <a:ext cx="7498079" cy="5303520"/>
           </a:xfrm>
           <a:prstGeom prst="rect">
             <a:avLst/>
@@ -5719,15 +5931,9 @@
 </p:sld>
 </file>
 
-<file path=ppt/slides/slide2.xml><?xml version="1.0" encoding="utf-8"?>
+<file path=ppt/slides/slide5.xml><?xml version="1.0" encoding="utf-8"?>
 <p:sld xmlns:a="http://schemas.openxmlformats.org/drawingml/2006/main" xmlns:r="http://schemas.openxmlformats.org/officeDocument/2006/relationships" xmlns:p="http://schemas.openxmlformats.org/presentationml/2006/main">
   <p:cSld>
-    <p:bg>
-      <p:bgPr>
-        <a:noFill/>
-        <a:effectLst/>
-      </p:bgPr>
-    </p:bg>
     <p:spTree>
       <p:nvGrpSpPr>
         <p:cNvPr id="1" name=""/>
@@ -6091,7 +6297,7 @@
           </a:bodyPr>
           <a:lstStyle/>
           <a:p>
-            <a:pPr>
+            <a:pPr algn="l">
               <a:lnSpc>
                 <a:spcPts val="10248"/>
               </a:lnSpc>
@@ -6100,16 +6306,10 @@
               </a:spcBef>
             </a:pPr>
             <a:r>
-              <a:rPr lang="en-US" sz="6000" dirty="0">
-                <a:solidFill>
-                  <a:srgbClr val="051D40"/>
-                </a:solidFill>
+              <a:rPr sz="6000">
                 <a:latin typeface="Open Sans Extra Bold"/>
-                <a:ea typeface="Open Sans Extra Bold"/>
-                <a:cs typeface="Open Sans Extra Bold"/>
-                <a:sym typeface="Open Sans Extra Bold"/>
-              </a:rPr>
-              <a:t>Overview</a:t>
+              </a:rPr>
+              <a:t>Objective</a:t>
             </a:r>
           </a:p>
         </p:txBody>
@@ -6177,8 +6377,8 @@
         </p:nvSpPr>
         <p:spPr>
           <a:xfrm>
-            <a:off x="2926080" y="2377440"/>
-            <a:ext cx="12435840" cy="6858000"/>
+            <a:off x="1828800" y="2377440"/>
+            <a:ext cx="14630400" cy="6858000"/>
           </a:xfrm>
           <a:prstGeom prst="rect">
             <a:avLst/>
@@ -6199,13 +6399,22 @@
               </a:spcAft>
             </a:pPr>
             <a:r>
-              <a:rPr b="0" sz="2000">
+              <a:rPr sz="2000" b="1">
                 <a:solidFill>
                   <a:srgbClr val="0F172A"/>
                 </a:solidFill>
                 <a:latin typeface="Open Sans"/>
               </a:rPr>
-              <a:t>1. Introduction &amp; Project Scope</a:t>
+              <a:t>Unified 10-Module Suite:</a:t>
+            </a:r>
+            <a:r>
+              <a:rPr sz="2000" b="0">
+                <a:solidFill>
+                  <a:srgbClr val="334155"/>
+                </a:solidFill>
+                <a:latin typeface="Open Sans"/>
+              </a:rPr>
+              <a:t> Build a comprehensive laboratory covering CPU Scheduling, Dynamic Memory, Page Replacement, Banker's Deadlock Avoidance, Disk Arm Seek, Virtual Memory MMU, File Systems, Process Lifecycle, POSIX Concurrency, and Host Telemetry.</a:t>
             </a:r>
           </a:p>
           <a:p>
@@ -6218,13 +6427,22 @@
               </a:spcAft>
             </a:pPr>
             <a:r>
-              <a:rPr b="0" sz="2000">
+              <a:rPr sz="2000" b="1">
                 <a:solidFill>
                   <a:srgbClr val="0F172A"/>
                 </a:solidFill>
                 <a:latin typeface="Open Sans"/>
               </a:rPr>
-              <a:t>2. Motivation &amp; Problem Statement</a:t>
+              <a:t>High-Precision Vector Visualizers:</a:t>
+            </a:r>
+            <a:r>
+              <a:rPr sz="2000" b="0">
+                <a:solidFill>
+                  <a:srgbClr val="334155"/>
+                </a:solidFill>
+                <a:latin typeface="Open Sans"/>
+              </a:rPr>
+              <a:t> Implement native SVG rendering for Gantt charts with millisecond guidelines, memory maps with fragmentation analysis, step-by-step frame steppers, and cylinder seek plots.</a:t>
             </a:r>
           </a:p>
           <a:p>
@@ -6237,13 +6455,22 @@
               </a:spcAft>
             </a:pPr>
             <a:r>
-              <a:rPr b="0" sz="2000">
+              <a:rPr sz="2000" b="1">
                 <a:solidFill>
                   <a:srgbClr val="0F172A"/>
                 </a:solidFill>
                 <a:latin typeface="Open Sans"/>
               </a:rPr>
-              <a:t>3. Literature Survey (Pedagogical Systems &amp; Simulators)</a:t>
+              <a:t>Authoritative C++ Core &amp; Deterministic Benchmarking:</a:t>
+            </a:r>
+            <a:r>
+              <a:rPr sz="2000" b="0">
+                <a:solidFill>
+                  <a:srgbClr val="334155"/>
+                </a:solidFill>
+                <a:latin typeface="Open Sans"/>
+              </a:rPr>
+              <a:t> Connect simulations to a compiled C++20 engine verified by 356 GoogleTests, providing reproducible textbook presets (Belady's anomaly, convoy effect, safe sequence).</a:t>
             </a:r>
           </a:p>
           <a:p>
@@ -6256,171 +6483,57 @@
               </a:spcAft>
             </a:pPr>
             <a:r>
-              <a:rPr b="0" sz="2000">
+              <a:rPr sz="2000" b="1">
                 <a:solidFill>
                   <a:srgbClr val="0F172A"/>
                 </a:solidFill>
                 <a:latin typeface="Open Sans"/>
               </a:rPr>
-              <a:t>4. Research Gap &amp; Comparative Analysis</a:t>
-            </a:r>
-          </a:p>
-          <a:p>
-            <a:pPr>
-              <a:lnSpc>
-                <a:spcPct val="120000"/>
-              </a:lnSpc>
-              <a:spcAft>
-                <a:spcPts val="1400"/>
-              </a:spcAft>
-            </a:pPr>
-            <a:r>
-              <a:rPr b="0" sz="2000">
+              <a:t>Dual Modern Interface:</a:t>
+            </a:r>
+            <a:r>
+              <a:rPr sz="2000" b="0">
                 <a:solidFill>
-                  <a:srgbClr val="0F172A"/>
+                  <a:srgbClr val="334155"/>
                 </a:solidFill>
                 <a:latin typeface="Open Sans"/>
               </a:rPr>
-              <a:t>5. Project Objectives &amp; Deliverables</a:t>
-            </a:r>
-          </a:p>
-          <a:p>
-            <a:pPr>
-              <a:lnSpc>
-                <a:spcPct val="120000"/>
-              </a:lnSpc>
-              <a:spcAft>
-                <a:spcPts val="1400"/>
-              </a:spcAft>
-            </a:pPr>
-            <a:r>
-              <a:rPr b="0" sz="2000">
-                <a:solidFill>
-                  <a:srgbClr val="0F172A"/>
-                </a:solidFill>
-                <a:latin typeface="Open Sans"/>
-              </a:rPr>
-              <a:t>6. Design &amp; 4-Tier System Architecture</a:t>
-            </a:r>
-          </a:p>
-          <a:p>
-            <a:pPr>
-              <a:lnSpc>
-                <a:spcPct val="120000"/>
-              </a:lnSpc>
-              <a:spcAft>
-                <a:spcPts val="1400"/>
-              </a:spcAft>
-            </a:pPr>
-            <a:r>
-              <a:rPr b="0" sz="2000">
-                <a:solidFill>
-                  <a:srgbClr val="0F172A"/>
-                </a:solidFill>
-                <a:latin typeface="Open Sans"/>
-              </a:rPr>
-              <a:t>7. Technical Stack &amp; Implementation Details</a:t>
-            </a:r>
-          </a:p>
-          <a:p>
-            <a:pPr>
-              <a:lnSpc>
-                <a:spcPct val="120000"/>
-              </a:lnSpc>
-              <a:spcAft>
-                <a:spcPts val="1400"/>
-              </a:spcAft>
-            </a:pPr>
-            <a:r>
-              <a:rPr b="0" sz="2000">
-                <a:solidFill>
-                  <a:srgbClr val="0F172A"/>
-                </a:solidFill>
-                <a:latin typeface="Open Sans"/>
-              </a:rPr>
-              <a:t>8. Academic References &amp; Citations</a:t>
-            </a:r>
-          </a:p>
-          <a:p>
-            <a:pPr>
-              <a:lnSpc>
-                <a:spcPct val="120000"/>
-              </a:lnSpc>
-              <a:spcAft>
-                <a:spcPts val="1400"/>
-              </a:spcAft>
-            </a:pPr>
-            <a:r>
-              <a:rPr b="0" sz="2000">
-                <a:solidFill>
-                  <a:srgbClr val="0F172A"/>
-                </a:solidFill>
-                <a:latin typeface="Open Sans"/>
-              </a:rPr>
-              <a:t>9. Conclusion &amp; Project Summary</a:t>
-            </a:r>
-          </a:p>
-        </p:txBody>
-      </p:sp>
-      <p:sp>
-        <p:nvSpPr>
-          <p:cNvPr id="15" name="Freeform 10"/>
-          <p:cNvSpPr/>
-          <p:nvPr/>
-        </p:nvSpPr>
-        <p:spPr>
-          <a:xfrm>
-            <a:off x="14760804" y="0"/>
-            <a:ext cx="2477360" cy="2095128"/>
-          </a:xfrm>
-          <a:custGeom>
+              <a:t> Deliver a zero-dependency light-mode web application and a native PySide6 desktop GUI with 150 automated end-to-end pytest tests.</a:t>
+            </a:r>
+          </a:p>
+        </p:txBody>
+      </p:sp>
+      <p:pic>
+        <p:nvPicPr>
+          <p:cNvPr id="13" name="Picture 12">
+            <a:extLst>
+              <a:ext uri="{FF2B5EF4-FFF2-40B4-BE49-F238E27FC236}">
+                <a16:creationId xmlns:a16="http://schemas.microsoft.com/office/drawing/2014/main" id="{C04892FC-3651-7240-1953-9B3C506E17FB}"/>
+              </a:ext>
+            </a:extLst>
+          </p:cNvPr>
+          <p:cNvPicPr>
+            <a:picLocks noChangeAspect="1"/>
+          </p:cNvPicPr>
+          <p:nvPr/>
+        </p:nvPicPr>
+        <p:blipFill>
+          <a:blip r:embed="rId2"/>
+          <a:stretch>
+            <a:fillRect/>
+          </a:stretch>
+        </p:blipFill>
+        <p:spPr>
+          <a:xfrm>
+            <a:off x="14762973" y="-2078"/>
+            <a:ext cx="2475191" cy="2097206"/>
+          </a:xfrm>
+          <a:prstGeom prst="rect">
             <a:avLst/>
-            <a:gdLst/>
-            <a:ahLst/>
-            <a:cxnLst/>
-            <a:rect l="l" t="t" r="r" b="b"/>
-            <a:pathLst>
-              <a:path w="2477360" h="2725964">
-                <a:moveTo>
-                  <a:pt x="0" y="0"/>
-                </a:moveTo>
-                <a:lnTo>
-                  <a:pt x="2477360" y="0"/>
-                </a:lnTo>
-                <a:lnTo>
-                  <a:pt x="2477360" y="2725965"/>
-                </a:lnTo>
-                <a:lnTo>
-                  <a:pt x="0" y="2725965"/>
-                </a:lnTo>
-                <a:lnTo>
-                  <a:pt x="0" y="0"/>
-                </a:lnTo>
-                <a:close/>
-              </a:path>
-            </a:pathLst>
-          </a:custGeom>
-          <a:blipFill>
-            <a:blip r:embed="rId2"/>
-            <a:stretch>
-              <a:fillRect t="-9805" r="-231773" b="-25876"/>
-            </a:stretch>
-          </a:blipFill>
-        </p:spPr>
-        <p:txBody>
-          <a:bodyPr/>
-          <a:lstStyle/>
-          <a:p>
-            <a:endParaRPr lang="en-IN"/>
-          </a:p>
-        </p:txBody>
-      </p:sp>
+          </a:prstGeom>
+        </p:spPr>
+      </p:pic>
     </p:spTree>
-    <p:extLst>
-      <p:ext uri="{BB962C8B-B14F-4D97-AF65-F5344CB8AC3E}">
-        <p14:creationId xmlns:p14="http://schemas.microsoft.com/office/powerpoint/2010/main" val="2472234980"/>
-      </p:ext>
-    </p:extLst>
   </p:cSld>
   <p:clrMapOvr>
     <a:masterClrMapping/>
@@ -6428,7 +6541,7 @@
 </p:sld>
 </file>
 
-<file path=ppt/slides/slide3.xml><?xml version="1.0" encoding="utf-8"?>
+<file path=ppt/slides/slide6.xml><?xml version="1.0" encoding="utf-8"?>
 <p:sld xmlns:a="http://schemas.openxmlformats.org/drawingml/2006/main" xmlns:r="http://schemas.openxmlformats.org/officeDocument/2006/relationships" xmlns:p="http://schemas.openxmlformats.org/presentationml/2006/main">
   <p:cSld>
     <p:spTree>
@@ -6806,7 +6919,7 @@
               <a:rPr sz="6000">
                 <a:latin typeface="Open Sans Extra Bold"/>
               </a:rPr>
-              <a:t>Introduction</a:t>
+              <a:t>System Architecture</a:t>
             </a:r>
           </a:p>
         </p:txBody>
@@ -6896,22 +7009,22 @@
               </a:spcAft>
             </a:pPr>
             <a:r>
-              <a:rPr b="1" sz="1800">
+              <a:rPr sz="1800" b="1">
                 <a:solidFill>
                   <a:srgbClr val="0F172A"/>
                 </a:solidFill>
                 <a:latin typeface="Open Sans"/>
               </a:rPr>
-              <a:t>Interactive Systems Laboratory:</a:t>
-            </a:r>
-            <a:r>
-              <a:rPr b="0" sz="1800">
+              <a:t>Tier 1 (Presentation Layer):</a:t>
+            </a:r>
+            <a:r>
+              <a:rPr sz="1800" b="0">
                 <a:solidFill>
                   <a:srgbClr val="334155"/>
                 </a:solidFill>
                 <a:latin typeface="Open Sans"/>
               </a:rPr>
-              <a:t> Connects theoretical Operating System principles with real algorithmic execution, measurement, vector visualization, and comparative benchmarks.</a:t>
+              <a:t> Modern Light-Mode Single Page Application (HTML5 / CSS3 / Vanilla ES6+) + Native PySide6 (Qt 6) Desktop GUI. Features custom inline SVG stroke icons.</a:t>
             </a:r>
           </a:p>
           <a:p>
@@ -6924,22 +7037,22 @@
               </a:spcAft>
             </a:pPr>
             <a:r>
-              <a:rPr b="1" sz="1800">
+              <a:rPr sz="1800" b="1">
                 <a:solidFill>
                   <a:srgbClr val="0F172A"/>
                 </a:solidFill>
                 <a:latin typeface="Open Sans"/>
               </a:rPr>
-              <a:t>Bridging Abstract Theory:</a:t>
-            </a:r>
-            <a:r>
-              <a:rPr b="0" sz="1800">
+              <a:t>Tier 2 (Application &amp; REST API Layer):</a:t>
+            </a:r>
+            <a:r>
+              <a:rPr sz="1800" b="0">
                 <a:solidFill>
                   <a:srgbClr val="334155"/>
                 </a:solidFill>
                 <a:latin typeface="Open Sans"/>
               </a:rPr>
-              <a:t> Eliminates black-box confusion by demystifying how CPU dispatching, dynamic memory placement, virtual paging, and deadlocks function in practice.</a:t>
+              <a:t> Python 3.12 Multi-Threaded HTTP Server (ThreadingHTTPServer) with zero external pip dependencies routing JSON endpoints (/api/*/run).</a:t>
             </a:r>
           </a:p>
           <a:p>
@@ -6952,22 +7065,22 @@
               </a:spcAft>
             </a:pPr>
             <a:r>
-              <a:rPr b="1" sz="1800">
+              <a:rPr sz="1800" b="1">
                 <a:solidFill>
                   <a:srgbClr val="0F172A"/>
                 </a:solidFill>
                 <a:latin typeface="Open Sans"/>
               </a:rPr>
-              <a:t>Dual-Pillar Architecture:</a:t>
-            </a:r>
-            <a:r>
-              <a:rPr b="0" sz="1800">
+              <a:t>Tier 3 (Platform Execution Bridge):</a:t>
+            </a:r>
+            <a:r>
+              <a:rPr sz="1800" b="0">
                 <a:solidFill>
                   <a:srgbClr val="334155"/>
                 </a:solidFill>
                 <a:latin typeface="Open Sans"/>
               </a:rPr>
-              <a:t> Couples an authoritative C++20 simulation core with real Linux/POSIX kernel interfaces (fork/execve process trees, anonymous pipes, semaphores, and /proc telemetry).</a:t>
+              <a:t> Automated environment runner supporting native Linux and Windows WSL 2 (wsl.exe), handling CLI argument marshaling and telemetry streaming.</a:t>
             </a:r>
           </a:p>
           <a:p>
@@ -6980,22 +7093,22 @@
               </a:spcAft>
             </a:pPr>
             <a:r>
-              <a:rPr b="1" sz="1800">
+              <a:rPr sz="1800" b="1">
                 <a:solidFill>
                   <a:srgbClr val="0F172A"/>
                 </a:solidFill>
                 <a:latin typeface="Open Sans"/>
               </a:rPr>
-              <a:t>Production-Grade Web Experience:</a:t>
-            </a:r>
-            <a:r>
-              <a:rPr b="0" sz="1800">
+              <a:t>Tier 4 (Authoritative Simulation Core):</a:t>
+            </a:r>
+            <a:r>
+              <a:rPr sz="1800" b="0">
                 <a:solidFill>
                   <a:srgbClr val="334155"/>
                 </a:solidFill>
                 <a:latin typeface="Open Sans"/>
               </a:rPr>
-              <a:t> Delivers an accessible, zero-dependency modern light-mode engineering platform inspired by Linear/Geist design guidelines across 10 distinct OS domains.</a:t>
+              <a:t> Compiled C++20 engine executing deterministic algorithms, real POSIX system calls (fork, execve, pipe, sem_t), and /proc parser.</a:t>
             </a:r>
           </a:p>
         </p:txBody>
@@ -7005,7 +7118,7 @@
           <p:cNvPr id="13" name="Picture 12">
             <a:extLst>
               <a:ext uri="{FF2B5EF4-FFF2-40B4-BE49-F238E27FC236}">
-                <a16:creationId xmlns:a16="http://schemas.microsoft.com/office/drawing/2014/main" id="{10588309-5823-B91D-F091-DEA9FF2FD52C}"/>
+                <a16:creationId xmlns:a16="http://schemas.microsoft.com/office/drawing/2014/main" id="{BECC1CFB-8B90-7A75-E4C6-1E012CF4A32A}"/>
               </a:ext>
             </a:extLst>
           </p:cNvPr>
@@ -7022,7 +7135,7 @@
         </p:blipFill>
         <p:spPr>
           <a:xfrm>
-            <a:off x="14767889" y="0"/>
+            <a:off x="14762973" y="0"/>
             <a:ext cx="2475191" cy="2097206"/>
           </a:xfrm>
           <a:prstGeom prst="rect">
@@ -7032,7 +7145,7 @@
       </p:pic>
       <p:pic>
         <p:nvPicPr>
-          <p:cNvPr id="19" name="Picture 18" descr="modules_matrix.png"/>
+          <p:cNvPr id="19" name="Picture 18" descr="architecture_diagram.png"/>
           <p:cNvPicPr>
             <a:picLocks noChangeAspect="1"/>
           </p:cNvPicPr>
@@ -7062,7 +7175,7 @@
 </p:sld>
 </file>
 
-<file path=ppt/slides/slide4.xml><?xml version="1.0" encoding="utf-8"?>
+<file path=ppt/slides/slide7.xml><?xml version="1.0" encoding="utf-8"?>
 <p:sld xmlns:a="http://schemas.openxmlformats.org/drawingml/2006/main" xmlns:r="http://schemas.openxmlformats.org/officeDocument/2006/relationships" xmlns:p="http://schemas.openxmlformats.org/presentationml/2006/main">
   <p:cSld>
     <p:spTree>
@@ -7440,7 +7553,7 @@
               <a:rPr sz="6000">
                 <a:latin typeface="Open Sans Extra Bold"/>
               </a:rPr>
-              <a:t>Motivation</a:t>
+              <a:t>Tech Stack</a:t>
             </a:r>
           </a:p>
         </p:txBody>
@@ -7508,8 +7621,8 @@
         </p:nvSpPr>
         <p:spPr>
           <a:xfrm>
-            <a:off x="1097280" y="2286000"/>
-            <a:ext cx="8412480" cy="6858000"/>
+            <a:off x="1828800" y="2377440"/>
+            <a:ext cx="14630400" cy="6858000"/>
           </a:xfrm>
           <a:prstGeom prst="rect">
             <a:avLst/>
@@ -7530,22 +7643,22 @@
               </a:spcAft>
             </a:pPr>
             <a:r>
-              <a:rPr b="1" sz="1800">
+              <a:rPr sz="2000" b="1">
                 <a:solidFill>
                   <a:srgbClr val="0F172A"/>
                 </a:solidFill>
                 <a:latin typeface="Open Sans"/>
               </a:rPr>
-              <a:t>High Cognitive Barrier:</a:t>
-            </a:r>
-            <a:r>
-              <a:rPr b="0" sz="1800">
+              <a:t>Core Simulation Engine:</a:t>
+            </a:r>
+            <a:r>
+              <a:rPr sz="2000" b="0">
                 <a:solidFill>
                   <a:srgbClr val="334155"/>
                 </a:solidFill>
                 <a:latin typeface="Open Sans"/>
               </a:rPr>
-              <a:t> Abstract kernel concepts (address translation, multi-queue preemption, Belady's anomaly) are hidden in kernel space and difficult to grasp from static textbook diagrams.</a:t>
+              <a:t> C++20 (Modern ISO C++), CMake 3.20+, GoogleTest (356 unit tests), POSIX APIs (&lt;unistd.h&gt;, &lt;semaphore.h&gt;).</a:t>
             </a:r>
           </a:p>
           <a:p>
@@ -7558,22 +7671,22 @@
               </a:spcAft>
             </a:pPr>
             <a:r>
-              <a:rPr b="1" sz="1800">
+              <a:rPr sz="2000" b="1">
                 <a:solidFill>
                   <a:srgbClr val="0F172A"/>
                 </a:solidFill>
                 <a:latin typeface="Open Sans"/>
               </a:rPr>
-              <a:t>Severe Tool Fragmentation:</a:t>
-            </a:r>
-            <a:r>
-              <a:rPr b="0" sz="1800">
+              <a:t>Backend &amp; API Server:</a:t>
+            </a:r>
+            <a:r>
+              <a:rPr sz="2000" b="0">
                 <a:solidFill>
                   <a:srgbClr val="334155"/>
                 </a:solidFill>
                 <a:latin typeface="Open Sans"/>
               </a:rPr>
-              <a:t> Students are forced to switch between disconnected, single-topic CLI programs or abandoned 2000s Java applets with no unified workflow.</a:t>
+              <a:t> Python 3.12 Standard Library (http.server.ThreadingHTTPServer - zero external pip dependencies), Subprocess / WSL 2 execution runner.</a:t>
             </a:r>
           </a:p>
           <a:p>
@@ -7586,22 +7699,22 @@
               </a:spcAft>
             </a:pPr>
             <a:r>
-              <a:rPr b="1" sz="1800">
+              <a:rPr sz="2000" b="1">
                 <a:solidFill>
                   <a:srgbClr val="0F172A"/>
                 </a:solidFill>
                 <a:latin typeface="Open Sans"/>
               </a:rPr>
-              <a:t>Lack of Empirical Verification:</a:t>
-            </a:r>
-            <a:r>
-              <a:rPr b="0" sz="1800">
+              <a:t>Modern Web Frontend:</a:t>
+            </a:r>
+            <a:r>
+              <a:rPr sz="2000" b="0">
                 <a:solidFill>
                   <a:srgbClr val="334155"/>
                 </a:solidFill>
                 <a:latin typeface="Open Sans"/>
               </a:rPr>
-              <a:t> Inability to systematically test and benchmark edge cases (convoy effects, priority inversions, memory fragmentation, and safe vs unsafe state sequences).</a:t>
+              <a:t> Vanilla JavaScript (ES6+), HTML5, CSS3 Custom Properties (Linear/Geist Light Mode Design System), Vector SVG Engine (Lucide-standard icons).</a:t>
             </a:r>
           </a:p>
           <a:p>
@@ -7614,32 +7727,32 @@
               </a:spcAft>
             </a:pPr>
             <a:r>
-              <a:rPr b="1" sz="1800">
+              <a:rPr sz="2000" b="1">
                 <a:solidFill>
                   <a:srgbClr val="0F172A"/>
                 </a:solidFill>
                 <a:latin typeface="Open Sans"/>
               </a:rPr>
-              <a:t>Active Learning Methodology:</a:t>
-            </a:r>
-            <a:r>
-              <a:rPr b="0" sz="1800">
+              <a:t>Desktop GUI &amp; Testing:</a:t>
+            </a:r>
+            <a:r>
+              <a:rPr sz="2000" b="0">
                 <a:solidFill>
                   <a:srgbClr val="334155"/>
                 </a:solidFill>
                 <a:latin typeface="Open Sans"/>
               </a:rPr>
-              <a:t> Addresses the proven pedagogical pipeline: Learn -&gt; Configure Workloads -&gt; Execute C++ Simulation -&gt; Observe Vector Visualizers -&gt; Measure Metrics -&gt; Analyze.</a:t>
+              <a:t> PySide6 (Qt 6), Pytest 9.2 (150 automated tests), GitHub Actions CI pipeline.</a:t>
             </a:r>
           </a:p>
         </p:txBody>
       </p:sp>
       <p:pic>
         <p:nvPicPr>
-          <p:cNvPr id="19" name="Picture 18">
+          <p:cNvPr id="13" name="Picture 12">
             <a:extLst>
               <a:ext uri="{FF2B5EF4-FFF2-40B4-BE49-F238E27FC236}">
-                <a16:creationId xmlns:a16="http://schemas.microsoft.com/office/drawing/2014/main" id="{C58E4A21-9D9D-571F-D536-7B858BE8C33C}"/>
+                <a16:creationId xmlns:a16="http://schemas.microsoft.com/office/drawing/2014/main" id="{3340E126-75F2-002E-5C79-5F6E68A9ACA1}"/>
               </a:ext>
             </a:extLst>
           </p:cNvPr>
@@ -7656,32 +7769,8 @@
         </p:blipFill>
         <p:spPr>
           <a:xfrm>
-            <a:off x="14762973" y="-2078"/>
+            <a:off x="14762973" y="0"/>
             <a:ext cx="2475191" cy="2097206"/>
-          </a:xfrm>
-          <a:prstGeom prst="rect">
-            <a:avLst/>
-          </a:prstGeom>
-        </p:spPr>
-      </p:pic>
-      <p:pic>
-        <p:nvPicPr>
-          <p:cNvPr id="20" name="Picture 19" descr="visualizers_showcase.png"/>
-          <p:cNvPicPr>
-            <a:picLocks noChangeAspect="1"/>
-          </p:cNvPicPr>
-          <p:nvPr/>
-        </p:nvPicPr>
-        <p:blipFill>
-          <a:blip r:embed="rId3"/>
-          <a:stretch>
-            <a:fillRect/>
-          </a:stretch>
-        </p:blipFill>
-        <p:spPr>
-          <a:xfrm>
-            <a:off x="9875520" y="2377440"/>
-            <a:ext cx="7498079" cy="5303520"/>
           </a:xfrm>
           <a:prstGeom prst="rect">
             <a:avLst/>
@@ -7696,3126 +7785,7 @@
 </p:sld>
 </file>
 
-<file path=ppt/slides/slide5.xml><?xml version="1.0" encoding="utf-8"?>
-<p:sld xmlns:a="http://schemas.openxmlformats.org/drawingml/2006/main" xmlns:r="http://schemas.openxmlformats.org/officeDocument/2006/relationships" xmlns:p="http://schemas.openxmlformats.org/presentationml/2006/main">
-  <p:cSld>
-    <p:spTree>
-      <p:nvGrpSpPr>
-        <p:cNvPr id="1" name=""/>
-        <p:cNvGrpSpPr/>
-        <p:nvPr/>
-      </p:nvGrpSpPr>
-      <p:grpSpPr>
-        <a:xfrm>
-          <a:off x="0" y="0"/>
-          <a:ext cx="0" cy="0"/>
-          <a:chOff x="0" y="0"/>
-          <a:chExt cx="0" cy="0"/>
-        </a:xfrm>
-      </p:grpSpPr>
-      <p:sp>
-        <p:nvSpPr>
-          <p:cNvPr id="6" name="TextBox 6"/>
-          <p:cNvSpPr txBox="1"/>
-          <p:nvPr/>
-        </p:nvSpPr>
-        <p:spPr>
-          <a:xfrm>
-            <a:off x="1723107" y="2850095"/>
-            <a:ext cx="12408632" cy="1050031"/>
-          </a:xfrm>
-          <a:prstGeom prst="rect">
-            <a:avLst/>
-          </a:prstGeom>
-        </p:spPr>
-        <p:txBody>
-          <a:bodyPr lIns="0" tIns="0" rIns="0" bIns="0" rtlCol="0" anchor="t">
-            <a:spAutoFit/>
-          </a:bodyPr>
-          <a:lstStyle/>
-          <a:p>
-            <a:pPr algn="just">
-              <a:lnSpc>
-                <a:spcPts val="4326"/>
-              </a:lnSpc>
-            </a:pPr>
-            <a:endParaRPr dirty="0"/>
-          </a:p>
-          <a:p>
-            <a:pPr algn="just">
-              <a:lnSpc>
-                <a:spcPts val="4326"/>
-              </a:lnSpc>
-            </a:pPr>
-            <a:endParaRPr lang="en-US" sz="2884" spc="187" dirty="0">
-              <a:solidFill>
-                <a:srgbClr val="000000"/>
-              </a:solidFill>
-              <a:latin typeface="Open Sauce"/>
-              <a:ea typeface="Open Sauce"/>
-              <a:cs typeface="Open Sauce"/>
-              <a:sym typeface="Open Sauce"/>
-            </a:endParaRPr>
-          </a:p>
-        </p:txBody>
-      </p:sp>
-      <p:sp>
-        <p:nvSpPr>
-          <p:cNvPr id="10" name="AutoShape 10"/>
-          <p:cNvSpPr/>
-          <p:nvPr/>
-        </p:nvSpPr>
-        <p:spPr>
-          <a:xfrm>
-            <a:off x="304800" y="9944100"/>
-            <a:ext cx="15392400" cy="76200"/>
-          </a:xfrm>
-          <a:prstGeom prst="line">
-            <a:avLst/>
-          </a:prstGeom>
-          <a:ln w="38100" cap="flat">
-            <a:solidFill>
-              <a:schemeClr val="accent5"/>
-            </a:solidFill>
-            <a:prstDash val="solid"/>
-            <a:headEnd type="none" w="sm" len="sm"/>
-            <a:tailEnd type="none" w="sm" len="sm"/>
-          </a:ln>
-        </p:spPr>
-        <p:txBody>
-          <a:bodyPr/>
-          <a:lstStyle/>
-          <a:p>
-            <a:endParaRPr/>
-          </a:p>
-        </p:txBody>
-      </p:sp>
-      <p:grpSp>
-        <p:nvGrpSpPr>
-          <p:cNvPr id="20" name="Group 3"/>
-          <p:cNvGrpSpPr/>
-          <p:nvPr/>
-        </p:nvGrpSpPr>
-        <p:grpSpPr>
-          <a:xfrm>
-            <a:off x="0" y="769076"/>
-            <a:ext cx="685802" cy="10287000"/>
-            <a:chOff x="0" y="0"/>
-            <a:chExt cx="270933" cy="466552"/>
-          </a:xfrm>
-          <a:solidFill>
-            <a:schemeClr val="accent5"/>
-          </a:solidFill>
-        </p:grpSpPr>
-        <p:sp>
-          <p:nvSpPr>
-            <p:cNvPr id="21" name="Freeform 4"/>
-            <p:cNvSpPr/>
-            <p:nvPr/>
-          </p:nvSpPr>
-          <p:spPr>
-            <a:xfrm>
-              <a:off x="0" y="0"/>
-              <a:ext cx="270933" cy="466552"/>
-            </a:xfrm>
-            <a:custGeom>
-              <a:avLst/>
-              <a:gdLst/>
-              <a:ahLst/>
-              <a:cxnLst/>
-              <a:rect l="l" t="t" r="r" b="b"/>
-              <a:pathLst>
-                <a:path w="270933" h="466552">
-                  <a:moveTo>
-                    <a:pt x="0" y="0"/>
-                  </a:moveTo>
-                  <a:lnTo>
-                    <a:pt x="270933" y="0"/>
-                  </a:lnTo>
-                  <a:lnTo>
-                    <a:pt x="270933" y="466552"/>
-                  </a:lnTo>
-                  <a:lnTo>
-                    <a:pt x="0" y="466552"/>
-                  </a:lnTo>
-                  <a:close/>
-                </a:path>
-              </a:pathLst>
-            </a:custGeom>
-            <a:grpFill/>
-          </p:spPr>
-          <p:txBody>
-            <a:bodyPr/>
-            <a:lstStyle/>
-            <a:p>
-              <a:endParaRPr lang="en-IN"/>
-            </a:p>
-          </p:txBody>
-        </p:sp>
-        <p:sp>
-          <p:nvSpPr>
-            <p:cNvPr id="22" name="TextBox 5"/>
-            <p:cNvSpPr txBox="1"/>
-            <p:nvPr/>
-          </p:nvSpPr>
-          <p:spPr>
-            <a:xfrm>
-              <a:off x="0" y="-57150"/>
-              <a:ext cx="270933" cy="523702"/>
-            </a:xfrm>
-            <a:prstGeom prst="rect">
-              <a:avLst/>
-            </a:prstGeom>
-            <a:grpFill/>
-          </p:spPr>
-          <p:txBody>
-            <a:bodyPr lIns="50800" tIns="50800" rIns="50800" bIns="50800" rtlCol="0" anchor="ctr"/>
-            <a:lstStyle/>
-            <a:p>
-              <a:pPr algn="ctr">
-                <a:lnSpc>
-                  <a:spcPts val="2659"/>
-                </a:lnSpc>
-              </a:pPr>
-              <a:endParaRPr/>
-            </a:p>
-          </p:txBody>
-        </p:sp>
-      </p:grpSp>
-      <p:sp>
-        <p:nvSpPr>
-          <p:cNvPr id="2" name="Rectangle 1"/>
-          <p:cNvSpPr/>
-          <p:nvPr/>
-        </p:nvSpPr>
-        <p:spPr>
-          <a:xfrm>
-            <a:off x="5369695" y="0"/>
-            <a:ext cx="5253362" cy="876907"/>
-          </a:xfrm>
-          <a:prstGeom prst="rect">
-            <a:avLst/>
-          </a:prstGeom>
-        </p:spPr>
-        <p:txBody>
-          <a:bodyPr wrap="none">
-            <a:spAutoFit/>
-          </a:bodyPr>
-          <a:lstStyle/>
-          <a:p>
-            <a:pPr lvl="0" algn="ctr">
-              <a:lnSpc>
-                <a:spcPts val="6730"/>
-              </a:lnSpc>
-              <a:spcBef>
-                <a:spcPct val="0"/>
-              </a:spcBef>
-            </a:pPr>
-            <a:r>
-              <a:rPr sz="4800" b="1">
-                <a:latin typeface="Akzidenz-Grotesk Heavy"/>
-              </a:rPr>
-              <a:t>Literature Survey</a:t>
-            </a:r>
-            <a:endParaRPr lang="en-US" sz="4800" b="1" dirty="0">
-              <a:solidFill>
-                <a:srgbClr val="0E2F5F"/>
-              </a:solidFill>
-              <a:latin typeface="Akzidenz-Grotesk Heavy"/>
-              <a:ea typeface="Akzidenz-Grotesk Heavy"/>
-              <a:cs typeface="Akzidenz-Grotesk Heavy"/>
-              <a:sym typeface="Akzidenz-Grotesk Heavy"/>
-            </a:endParaRPr>
-          </a:p>
-        </p:txBody>
-      </p:sp>
-      <p:graphicFrame>
-        <p:nvGraphicFramePr>
-          <p:cNvPr id="23" name="Content Placeholder 4">
-            <a:extLst>
-              <a:ext uri="{FF2B5EF4-FFF2-40B4-BE49-F238E27FC236}">
-                <a16:creationId xmlns:a16="http://schemas.microsoft.com/office/drawing/2014/main" id="{7255246C-0B60-7E90-B4BC-E71B3A8BD324}"/>
-              </a:ext>
-            </a:extLst>
-          </p:cNvPr>
-          <p:cNvGraphicFramePr/>
-          <p:nvPr>
-            <p:extLst>
-              <p:ext uri="{D42A27DB-BD31-4B8C-83A1-F6EECF244321}">
-                <p14:modId xmlns:p14="http://schemas.microsoft.com/office/powerpoint/2010/main" val="1884293609"/>
-              </p:ext>
-            </p:extLst>
-          </p:nvPr>
-        </p:nvGraphicFramePr>
-        <p:xfrm>
-          <a:off x="1028700" y="1771443"/>
-          <a:ext cx="16412711" cy="7590669"/>
-        </p:xfrm>
-        <a:graphic>
-          <a:graphicData uri="http://schemas.openxmlformats.org/drawingml/2006/table">
-            <a:tbl>
-              <a:tblPr firstRow="1">
-                <a:tableStyleId>{69012ECD-51FC-41F1-AA8D-1B2483CD663E}</a:tableStyleId>
-              </a:tblPr>
-              <a:tblGrid>
-                <a:gridCol w="1130982">
-                  <a:extLst>
-                    <a:ext uri="{9D8B030D-6E8A-4147-A177-3AD203B41FA5}">
-                      <a16:colId xmlns:a16="http://schemas.microsoft.com/office/drawing/2014/main" val="20000"/>
-                    </a:ext>
-                  </a:extLst>
-                </a:gridCol>
-                <a:gridCol w="2036151">
-                  <a:extLst>
-                    <a:ext uri="{9D8B030D-6E8A-4147-A177-3AD203B41FA5}">
-                      <a16:colId xmlns:a16="http://schemas.microsoft.com/office/drawing/2014/main" val="20001"/>
-                    </a:ext>
-                  </a:extLst>
-                </a:gridCol>
-                <a:gridCol w="2913634">
-                  <a:extLst>
-                    <a:ext uri="{9D8B030D-6E8A-4147-A177-3AD203B41FA5}">
-                      <a16:colId xmlns:a16="http://schemas.microsoft.com/office/drawing/2014/main" val="3670930075"/>
-                    </a:ext>
-                  </a:extLst>
-                </a:gridCol>
-                <a:gridCol w="2850360">
-                  <a:extLst>
-                    <a:ext uri="{9D8B030D-6E8A-4147-A177-3AD203B41FA5}">
-                      <a16:colId xmlns:a16="http://schemas.microsoft.com/office/drawing/2014/main" val="1292415790"/>
-                    </a:ext>
-                  </a:extLst>
-                </a:gridCol>
-                <a:gridCol w="2945371">
-                  <a:extLst>
-                    <a:ext uri="{9D8B030D-6E8A-4147-A177-3AD203B41FA5}">
-                      <a16:colId xmlns:a16="http://schemas.microsoft.com/office/drawing/2014/main" val="20002"/>
-                    </a:ext>
-                  </a:extLst>
-                </a:gridCol>
-                <a:gridCol w="2432276">
-                  <a:extLst>
-                    <a:ext uri="{9D8B030D-6E8A-4147-A177-3AD203B41FA5}">
-                      <a16:colId xmlns:a16="http://schemas.microsoft.com/office/drawing/2014/main" val="702408066"/>
-                    </a:ext>
-                  </a:extLst>
-                </a:gridCol>
-                <a:gridCol w="2103937">
-                  <a:extLst>
-                    <a:ext uri="{9D8B030D-6E8A-4147-A177-3AD203B41FA5}">
-                      <a16:colId xmlns:a16="http://schemas.microsoft.com/office/drawing/2014/main" val="20005"/>
-                    </a:ext>
-                  </a:extLst>
-                </a:gridCol>
-              </a:tblGrid>
-              <a:tr h="793748">
-                <a:tc>
-                  <a:txBody>
-                    <a:bodyPr/>
-                    <a:lstStyle/>
-                    <a:p>
-                      <a:r>
-                        <a:rPr sz="2200" b="1"/>
-                        <a:t>Sr.No</a:t>
-                      </a:r>
-                    </a:p>
-                  </a:txBody>
-                  <a:tcPr anchor="ctr">
-                    <a:lnL w="12700" cap="flat" cmpd="sng" algn="ctr">
-                      <a:solidFill>
-                        <a:schemeClr val="tx1"/>
-                      </a:solidFill>
-                      <a:prstDash val="solid"/>
-                      <a:round/>
-                      <a:headEnd type="none" w="med" len="med"/>
-                      <a:tailEnd type="none" w="med" len="med"/>
-                    </a:lnL>
-                    <a:lnR w="12700" cap="flat" cmpd="sng" algn="ctr">
-                      <a:solidFill>
-                        <a:schemeClr val="tx1"/>
-                      </a:solidFill>
-                      <a:prstDash val="solid"/>
-                      <a:round/>
-                      <a:headEnd type="none" w="med" len="med"/>
-                      <a:tailEnd type="none" w="med" len="med"/>
-                    </a:lnR>
-                    <a:lnT w="12700" cap="flat" cmpd="sng" algn="ctr">
-                      <a:solidFill>
-                        <a:schemeClr val="tx1"/>
-                      </a:solidFill>
-                      <a:prstDash val="solid"/>
-                      <a:round/>
-                      <a:headEnd type="none" w="med" len="med"/>
-                      <a:tailEnd type="none" w="med" len="med"/>
-                    </a:lnT>
-                    <a:lnB w="12700" cap="flat" cmpd="sng" algn="ctr">
-                      <a:solidFill>
-                        <a:schemeClr val="tx1"/>
-                      </a:solidFill>
-                      <a:prstDash val="solid"/>
-                      <a:round/>
-                      <a:headEnd type="none" w="med" len="med"/>
-                      <a:tailEnd type="none" w="med" len="med"/>
-                    </a:lnB>
-                    <a:solidFill>
-                      <a:schemeClr val="accent5"/>
-                    </a:solidFill>
-                  </a:tcPr>
-                </a:tc>
-                <a:tc>
-                  <a:txBody>
-                    <a:bodyPr/>
-                    <a:lstStyle/>
-                    <a:p>
-                      <a:r>
-                        <a:rPr sz="2200" b="1"/>
-                        <a:t>Author &amp; Year</a:t>
-                      </a:r>
-                    </a:p>
-                  </a:txBody>
-                  <a:tcPr anchor="ctr">
-                    <a:lnL w="12700" cap="flat" cmpd="sng" algn="ctr">
-                      <a:solidFill>
-                        <a:schemeClr val="tx1"/>
-                      </a:solidFill>
-                      <a:prstDash val="solid"/>
-                      <a:round/>
-                      <a:headEnd type="none" w="med" len="med"/>
-                      <a:tailEnd type="none" w="med" len="med"/>
-                    </a:lnL>
-                    <a:lnR w="12700" cap="flat" cmpd="sng" algn="ctr">
-                      <a:solidFill>
-                        <a:schemeClr val="tx1"/>
-                      </a:solidFill>
-                      <a:prstDash val="solid"/>
-                      <a:round/>
-                      <a:headEnd type="none" w="med" len="med"/>
-                      <a:tailEnd type="none" w="med" len="med"/>
-                    </a:lnR>
-                    <a:lnT w="12700" cap="flat" cmpd="sng" algn="ctr">
-                      <a:solidFill>
-                        <a:schemeClr val="tx1"/>
-                      </a:solidFill>
-                      <a:prstDash val="solid"/>
-                      <a:round/>
-                      <a:headEnd type="none" w="med" len="med"/>
-                      <a:tailEnd type="none" w="med" len="med"/>
-                    </a:lnT>
-                    <a:lnB w="12700" cap="flat" cmpd="sng" algn="ctr">
-                      <a:solidFill>
-                        <a:schemeClr val="tx1"/>
-                      </a:solidFill>
-                      <a:prstDash val="solid"/>
-                      <a:round/>
-                      <a:headEnd type="none" w="med" len="med"/>
-                      <a:tailEnd type="none" w="med" len="med"/>
-                    </a:lnB>
-                    <a:solidFill>
-                      <a:schemeClr val="accent5"/>
-                    </a:solidFill>
-                  </a:tcPr>
-                </a:tc>
-                <a:tc>
-                  <a:txBody>
-                    <a:bodyPr/>
-                    <a:lstStyle/>
-                    <a:p>
-                      <a:r>
-                        <a:rPr sz="2200" b="1"/>
-                        <a:t>Title of Paper</a:t>
-                      </a:r>
-                    </a:p>
-                  </a:txBody>
-                  <a:tcPr anchor="ctr">
-                    <a:lnL w="12700" cap="flat" cmpd="sng" algn="ctr">
-                      <a:solidFill>
-                        <a:schemeClr val="tx1"/>
-                      </a:solidFill>
-                      <a:prstDash val="solid"/>
-                      <a:round/>
-                      <a:headEnd type="none" w="med" len="med"/>
-                      <a:tailEnd type="none" w="med" len="med"/>
-                    </a:lnL>
-                    <a:lnR w="12700" cap="flat" cmpd="sng" algn="ctr">
-                      <a:solidFill>
-                        <a:schemeClr val="tx1"/>
-                      </a:solidFill>
-                      <a:prstDash val="solid"/>
-                      <a:round/>
-                      <a:headEnd type="none" w="med" len="med"/>
-                      <a:tailEnd type="none" w="med" len="med"/>
-                    </a:lnR>
-                    <a:lnT w="12700" cap="flat" cmpd="sng" algn="ctr">
-                      <a:solidFill>
-                        <a:schemeClr val="tx1"/>
-                      </a:solidFill>
-                      <a:prstDash val="solid"/>
-                      <a:round/>
-                      <a:headEnd type="none" w="med" len="med"/>
-                      <a:tailEnd type="none" w="med" len="med"/>
-                    </a:lnT>
-                    <a:lnB w="12700" cap="flat" cmpd="sng" algn="ctr">
-                      <a:solidFill>
-                        <a:schemeClr val="tx1"/>
-                      </a:solidFill>
-                      <a:prstDash val="solid"/>
-                      <a:round/>
-                      <a:headEnd type="none" w="med" len="med"/>
-                      <a:tailEnd type="none" w="med" len="med"/>
-                    </a:lnB>
-                    <a:solidFill>
-                      <a:schemeClr val="accent5"/>
-                    </a:solidFill>
-                  </a:tcPr>
-                </a:tc>
-                <a:tc>
-                  <a:txBody>
-                    <a:bodyPr/>
-                    <a:lstStyle/>
-                    <a:p>
-                      <a:r>
-                        <a:rPr sz="2200" b="1"/>
-                        <a:t>Publisher</a:t>
-                      </a:r>
-                    </a:p>
-                  </a:txBody>
-                  <a:tcPr anchor="ctr">
-                    <a:lnL w="12700" cap="flat" cmpd="sng" algn="ctr">
-                      <a:solidFill>
-                        <a:schemeClr val="tx1"/>
-                      </a:solidFill>
-                      <a:prstDash val="solid"/>
-                      <a:round/>
-                      <a:headEnd type="none" w="med" len="med"/>
-                      <a:tailEnd type="none" w="med" len="med"/>
-                    </a:lnL>
-                    <a:lnR w="12700" cap="flat" cmpd="sng" algn="ctr">
-                      <a:solidFill>
-                        <a:schemeClr val="tx1"/>
-                      </a:solidFill>
-                      <a:prstDash val="solid"/>
-                      <a:round/>
-                      <a:headEnd type="none" w="med" len="med"/>
-                      <a:tailEnd type="none" w="med" len="med"/>
-                    </a:lnR>
-                    <a:lnT w="12700" cap="flat" cmpd="sng" algn="ctr">
-                      <a:solidFill>
-                        <a:schemeClr val="tx1"/>
-                      </a:solidFill>
-                      <a:prstDash val="solid"/>
-                      <a:round/>
-                      <a:headEnd type="none" w="med" len="med"/>
-                      <a:tailEnd type="none" w="med" len="med"/>
-                    </a:lnT>
-                    <a:lnB w="12700" cap="flat" cmpd="sng" algn="ctr">
-                      <a:solidFill>
-                        <a:schemeClr val="tx1"/>
-                      </a:solidFill>
-                      <a:prstDash val="solid"/>
-                      <a:round/>
-                      <a:headEnd type="none" w="med" len="med"/>
-                      <a:tailEnd type="none" w="med" len="med"/>
-                    </a:lnB>
-                    <a:solidFill>
-                      <a:schemeClr val="accent5"/>
-                    </a:solidFill>
-                  </a:tcPr>
-                </a:tc>
-                <a:tc>
-                  <a:txBody>
-                    <a:bodyPr/>
-                    <a:lstStyle/>
-                    <a:p>
-                      <a:r>
-                        <a:rPr sz="2200" b="1"/>
-                        <a:t>Techniques used</a:t>
-                      </a:r>
-                    </a:p>
-                  </a:txBody>
-                  <a:tcPr anchor="ctr">
-                    <a:lnL w="12700" cap="flat" cmpd="sng" algn="ctr">
-                      <a:solidFill>
-                        <a:schemeClr val="tx1"/>
-                      </a:solidFill>
-                      <a:prstDash val="solid"/>
-                      <a:round/>
-                      <a:headEnd type="none" w="med" len="med"/>
-                      <a:tailEnd type="none" w="med" len="med"/>
-                    </a:lnL>
-                    <a:lnR w="12700" cap="flat" cmpd="sng" algn="ctr">
-                      <a:solidFill>
-                        <a:schemeClr val="tx1"/>
-                      </a:solidFill>
-                      <a:prstDash val="solid"/>
-                      <a:round/>
-                      <a:headEnd type="none" w="med" len="med"/>
-                      <a:tailEnd type="none" w="med" len="med"/>
-                    </a:lnR>
-                    <a:lnT w="12700" cap="flat" cmpd="sng" algn="ctr">
-                      <a:solidFill>
-                        <a:schemeClr val="tx1"/>
-                      </a:solidFill>
-                      <a:prstDash val="solid"/>
-                      <a:round/>
-                      <a:headEnd type="none" w="med" len="med"/>
-                      <a:tailEnd type="none" w="med" len="med"/>
-                    </a:lnT>
-                    <a:lnB w="12700" cap="flat" cmpd="sng" algn="ctr">
-                      <a:solidFill>
-                        <a:schemeClr val="tx1"/>
-                      </a:solidFill>
-                      <a:prstDash val="solid"/>
-                      <a:round/>
-                      <a:headEnd type="none" w="med" len="med"/>
-                      <a:tailEnd type="none" w="med" len="med"/>
-                    </a:lnB>
-                    <a:solidFill>
-                      <a:schemeClr val="accent5"/>
-                    </a:solidFill>
-                  </a:tcPr>
-                </a:tc>
-                <a:tc>
-                  <a:txBody>
-                    <a:bodyPr/>
-                    <a:lstStyle/>
-                    <a:p>
-                      <a:r>
-                        <a:rPr sz="2200" b="1"/>
-                        <a:t>Findings</a:t>
-                      </a:r>
-                    </a:p>
-                  </a:txBody>
-                  <a:tcPr anchor="ctr">
-                    <a:lnL w="12700" cap="flat" cmpd="sng" algn="ctr">
-                      <a:solidFill>
-                        <a:schemeClr val="tx1"/>
-                      </a:solidFill>
-                      <a:prstDash val="solid"/>
-                      <a:round/>
-                      <a:headEnd type="none" w="med" len="med"/>
-                      <a:tailEnd type="none" w="med" len="med"/>
-                    </a:lnL>
-                    <a:lnR w="12700" cap="flat" cmpd="sng" algn="ctr">
-                      <a:solidFill>
-                        <a:schemeClr val="tx1"/>
-                      </a:solidFill>
-                      <a:prstDash val="solid"/>
-                      <a:round/>
-                      <a:headEnd type="none" w="med" len="med"/>
-                      <a:tailEnd type="none" w="med" len="med"/>
-                    </a:lnR>
-                    <a:lnT w="12700" cap="flat" cmpd="sng" algn="ctr">
-                      <a:solidFill>
-                        <a:schemeClr val="tx1"/>
-                      </a:solidFill>
-                      <a:prstDash val="solid"/>
-                      <a:round/>
-                      <a:headEnd type="none" w="med" len="med"/>
-                      <a:tailEnd type="none" w="med" len="med"/>
-                    </a:lnT>
-                    <a:lnB w="12700" cap="flat" cmpd="sng" algn="ctr">
-                      <a:solidFill>
-                        <a:schemeClr val="tx1"/>
-                      </a:solidFill>
-                      <a:prstDash val="solid"/>
-                      <a:round/>
-                      <a:headEnd type="none" w="med" len="med"/>
-                      <a:tailEnd type="none" w="med" len="med"/>
-                    </a:lnB>
-                    <a:solidFill>
-                      <a:schemeClr val="accent5"/>
-                    </a:solidFill>
-                  </a:tcPr>
-                </a:tc>
-                <a:tc>
-                  <a:txBody>
-                    <a:bodyPr/>
-                    <a:lstStyle/>
-                    <a:p>
-                      <a:r>
-                        <a:rPr sz="2200" b="1"/>
-                        <a:t>Research gap</a:t>
-                      </a:r>
-                    </a:p>
-                  </a:txBody>
-                  <a:tcPr anchor="ctr">
-                    <a:lnL w="12700" cap="flat" cmpd="sng" algn="ctr">
-                      <a:solidFill>
-                        <a:schemeClr val="tx1"/>
-                      </a:solidFill>
-                      <a:prstDash val="solid"/>
-                      <a:round/>
-                      <a:headEnd type="none" w="med" len="med"/>
-                      <a:tailEnd type="none" w="med" len="med"/>
-                    </a:lnL>
-                    <a:lnR w="12700" cap="flat" cmpd="sng" algn="ctr">
-                      <a:solidFill>
-                        <a:schemeClr val="tx1"/>
-                      </a:solidFill>
-                      <a:prstDash val="solid"/>
-                      <a:round/>
-                      <a:headEnd type="none" w="med" len="med"/>
-                      <a:tailEnd type="none" w="med" len="med"/>
-                    </a:lnR>
-                    <a:lnT w="12700" cap="flat" cmpd="sng" algn="ctr">
-                      <a:solidFill>
-                        <a:schemeClr val="tx1"/>
-                      </a:solidFill>
-                      <a:prstDash val="solid"/>
-                      <a:round/>
-                      <a:headEnd type="none" w="med" len="med"/>
-                      <a:tailEnd type="none" w="med" len="med"/>
-                    </a:lnT>
-                    <a:lnB w="12700" cap="flat" cmpd="sng" algn="ctr">
-                      <a:solidFill>
-                        <a:schemeClr val="tx1"/>
-                      </a:solidFill>
-                      <a:prstDash val="solid"/>
-                      <a:round/>
-                      <a:headEnd type="none" w="med" len="med"/>
-                      <a:tailEnd type="none" w="med" len="med"/>
-                    </a:lnB>
-                    <a:solidFill>
-                      <a:schemeClr val="accent5"/>
-                    </a:solidFill>
-                  </a:tcPr>
-                </a:tc>
-                <a:extLst>
-                  <a:ext uri="{0D108BD9-81ED-4DB2-BD59-A6C34878D82A}">
-                    <a16:rowId xmlns:a16="http://schemas.microsoft.com/office/drawing/2014/main" val="10000"/>
-                  </a:ext>
-                </a:extLst>
-              </a:tr>
-              <a:tr h="3905240">
-                <a:tc>
-                  <a:txBody>
-                    <a:bodyPr/>
-                    <a:lstStyle/>
-                    <a:p>
-                      <a:pPr algn="ctr">
-                        <a:defRPr sz="1300">
-                          <a:solidFill>
-                            <a:srgbClr val="0F172A"/>
-                          </a:solidFill>
-                          <a:latin typeface="Open Sans"/>
-                        </a:defRPr>
-                      </a:pPr>
-                      <a:r>
-                        <a:t>1</a:t>
-                      </a:r>
-                    </a:p>
-                  </a:txBody>
-                  <a:tcPr anchor="ctr">
-                    <a:lnL w="12700" cap="flat" cmpd="sng" algn="ctr">
-                      <a:solidFill>
-                        <a:schemeClr val="tx1"/>
-                      </a:solidFill>
-                      <a:prstDash val="solid"/>
-                      <a:round/>
-                      <a:headEnd type="none" w="med" len="med"/>
-                      <a:tailEnd type="none" w="med" len="med"/>
-                    </a:lnL>
-                    <a:lnR w="12700" cap="flat" cmpd="sng" algn="ctr">
-                      <a:solidFill>
-                        <a:schemeClr val="tx1"/>
-                      </a:solidFill>
-                      <a:prstDash val="solid"/>
-                      <a:round/>
-                      <a:headEnd type="none" w="med" len="med"/>
-                      <a:tailEnd type="none" w="med" len="med"/>
-                    </a:lnR>
-                    <a:lnT w="12700" cap="flat" cmpd="sng" algn="ctr">
-                      <a:solidFill>
-                        <a:schemeClr val="tx1"/>
-                      </a:solidFill>
-                      <a:prstDash val="solid"/>
-                      <a:round/>
-                      <a:headEnd type="none" w="med" len="med"/>
-                      <a:tailEnd type="none" w="med" len="med"/>
-                    </a:lnT>
-                    <a:lnB w="12700" cap="flat" cmpd="sng" algn="ctr">
-                      <a:solidFill>
-                        <a:schemeClr val="tx1"/>
-                      </a:solidFill>
-                      <a:prstDash val="solid"/>
-                      <a:round/>
-                      <a:headEnd type="none" w="med" len="med"/>
-                      <a:tailEnd type="none" w="med" len="med"/>
-                    </a:lnB>
-                  </a:tcPr>
-                </a:tc>
-                <a:tc>
-                  <a:txBody>
-                    <a:bodyPr/>
-                    <a:lstStyle/>
-                    <a:p>
-                      <a:pPr>
-                        <a:defRPr sz="1300">
-                          <a:solidFill>
-                            <a:srgbClr val="0F172A"/>
-                          </a:solidFill>
-                          <a:latin typeface="Open Sans"/>
-                        </a:defRPr>
-                      </a:pPr>
-                      <a:r>
-                        <a:t>K. Al-Kharabsheh, et al. (2022)</a:t>
-                      </a:r>
-                    </a:p>
-                  </a:txBody>
-                  <a:tcPr anchor="ctr">
-                    <a:lnL w="12700" cap="flat" cmpd="sng" algn="ctr">
-                      <a:solidFill>
-                        <a:schemeClr val="tx1"/>
-                      </a:solidFill>
-                      <a:prstDash val="solid"/>
-                      <a:round/>
-                      <a:headEnd type="none" w="med" len="med"/>
-                      <a:tailEnd type="none" w="med" len="med"/>
-                    </a:lnL>
-                    <a:lnR w="12700" cap="flat" cmpd="sng" algn="ctr">
-                      <a:solidFill>
-                        <a:schemeClr val="tx1"/>
-                      </a:solidFill>
-                      <a:prstDash val="solid"/>
-                      <a:round/>
-                      <a:headEnd type="none" w="med" len="med"/>
-                      <a:tailEnd type="none" w="med" len="med"/>
-                    </a:lnR>
-                    <a:lnT w="12700" cap="flat" cmpd="sng" algn="ctr">
-                      <a:solidFill>
-                        <a:schemeClr val="tx1"/>
-                      </a:solidFill>
-                      <a:prstDash val="solid"/>
-                      <a:round/>
-                      <a:headEnd type="none" w="med" len="med"/>
-                      <a:tailEnd type="none" w="med" len="med"/>
-                    </a:lnT>
-                    <a:lnB w="12700" cap="flat" cmpd="sng" algn="ctr">
-                      <a:solidFill>
-                        <a:schemeClr val="tx1"/>
-                      </a:solidFill>
-                      <a:prstDash val="solid"/>
-                      <a:round/>
-                      <a:headEnd type="none" w="med" len="med"/>
-                      <a:tailEnd type="none" w="med" len="med"/>
-                    </a:lnB>
-                  </a:tcPr>
-                </a:tc>
-                <a:tc>
-                  <a:txBody>
-                    <a:bodyPr/>
-                    <a:lstStyle/>
-                    <a:p>
-                      <a:pPr>
-                        <a:defRPr sz="1300">
-                          <a:solidFill>
-                            <a:srgbClr val="0F172A"/>
-                          </a:solidFill>
-                          <a:latin typeface="Open Sans"/>
-                        </a:defRPr>
-                      </a:pPr>
-                      <a:r>
-                        <a:t>Evaluating Interactive Visual Simulators for Operating Systems Education</a:t>
-                      </a:r>
-                    </a:p>
-                  </a:txBody>
-                  <a:tcPr anchor="ctr">
-                    <a:lnL w="12700" cap="flat" cmpd="sng" algn="ctr">
-                      <a:solidFill>
-                        <a:schemeClr val="tx1"/>
-                      </a:solidFill>
-                      <a:prstDash val="solid"/>
-                      <a:round/>
-                      <a:headEnd type="none" w="med" len="med"/>
-                      <a:tailEnd type="none" w="med" len="med"/>
-                    </a:lnL>
-                    <a:lnR w="12700" cap="flat" cmpd="sng" algn="ctr">
-                      <a:solidFill>
-                        <a:schemeClr val="tx1"/>
-                      </a:solidFill>
-                      <a:prstDash val="solid"/>
-                      <a:round/>
-                      <a:headEnd type="none" w="med" len="med"/>
-                      <a:tailEnd type="none" w="med" len="med"/>
-                    </a:lnR>
-                    <a:lnT w="12700" cap="flat" cmpd="sng" algn="ctr">
-                      <a:solidFill>
-                        <a:schemeClr val="tx1"/>
-                      </a:solidFill>
-                      <a:prstDash val="solid"/>
-                      <a:round/>
-                      <a:headEnd type="none" w="med" len="med"/>
-                      <a:tailEnd type="none" w="med" len="med"/>
-                    </a:lnT>
-                    <a:lnB w="12700" cap="flat" cmpd="sng" algn="ctr">
-                      <a:solidFill>
-                        <a:schemeClr val="tx1"/>
-                      </a:solidFill>
-                      <a:prstDash val="solid"/>
-                      <a:round/>
-                      <a:headEnd type="none" w="med" len="med"/>
-                      <a:tailEnd type="none" w="med" len="med"/>
-                    </a:lnB>
-                  </a:tcPr>
-                </a:tc>
-                <a:tc>
-                  <a:txBody>
-                    <a:bodyPr/>
-                    <a:lstStyle/>
-                    <a:p>
-                      <a:pPr>
-                        <a:defRPr sz="1300">
-                          <a:solidFill>
-                            <a:srgbClr val="0F172A"/>
-                          </a:solidFill>
-                          <a:latin typeface="Open Sans"/>
-                        </a:defRPr>
-                      </a:pPr>
-                      <a:r>
-                        <a:t>IEEE Trans. on Learning Technologies</a:t>
-                      </a:r>
-                    </a:p>
-                  </a:txBody>
-                  <a:tcPr anchor="ctr">
-                    <a:lnL w="12700" cap="flat" cmpd="sng" algn="ctr">
-                      <a:solidFill>
-                        <a:schemeClr val="tx1"/>
-                      </a:solidFill>
-                      <a:prstDash val="solid"/>
-                      <a:round/>
-                      <a:headEnd type="none" w="med" len="med"/>
-                      <a:tailEnd type="none" w="med" len="med"/>
-                    </a:lnL>
-                    <a:lnR w="12700" cap="flat" cmpd="sng" algn="ctr">
-                      <a:solidFill>
-                        <a:schemeClr val="tx1"/>
-                      </a:solidFill>
-                      <a:prstDash val="solid"/>
-                      <a:round/>
-                      <a:headEnd type="none" w="med" len="med"/>
-                      <a:tailEnd type="none" w="med" len="med"/>
-                    </a:lnR>
-                    <a:lnT w="12700" cap="flat" cmpd="sng" algn="ctr">
-                      <a:solidFill>
-                        <a:schemeClr val="tx1"/>
-                      </a:solidFill>
-                      <a:prstDash val="solid"/>
-                      <a:round/>
-                      <a:headEnd type="none" w="med" len="med"/>
-                      <a:tailEnd type="none" w="med" len="med"/>
-                    </a:lnT>
-                    <a:lnB w="12700" cap="flat" cmpd="sng" algn="ctr">
-                      <a:solidFill>
-                        <a:schemeClr val="tx1"/>
-                      </a:solidFill>
-                      <a:prstDash val="solid"/>
-                      <a:round/>
-                      <a:headEnd type="none" w="med" len="med"/>
-                      <a:tailEnd type="none" w="med" len="med"/>
-                    </a:lnB>
-                  </a:tcPr>
-                </a:tc>
-                <a:tc>
-                  <a:txBody>
-                    <a:bodyPr/>
-                    <a:lstStyle/>
-                    <a:p>
-                      <a:pPr>
-                        <a:defRPr sz="1300">
-                          <a:solidFill>
-                            <a:srgbClr val="0F172A"/>
-                          </a:solidFill>
-                          <a:latin typeface="Open Sans"/>
-                        </a:defRPr>
-                      </a:pPr>
-                      <a:r>
-                        <a:t>Interactive algorithmic step-throughs, dynamic Gantt chart generation.</a:t>
-                      </a:r>
-                    </a:p>
-                  </a:txBody>
-                  <a:tcPr anchor="ctr">
-                    <a:lnL w="12700" cap="flat" cmpd="sng" algn="ctr">
-                      <a:solidFill>
-                        <a:schemeClr val="tx1"/>
-                      </a:solidFill>
-                      <a:prstDash val="solid"/>
-                      <a:round/>
-                      <a:headEnd type="none" w="med" len="med"/>
-                      <a:tailEnd type="none" w="med" len="med"/>
-                    </a:lnL>
-                    <a:lnR w="12700" cap="flat" cmpd="sng" algn="ctr">
-                      <a:solidFill>
-                        <a:schemeClr val="tx1"/>
-                      </a:solidFill>
-                      <a:prstDash val="solid"/>
-                      <a:round/>
-                      <a:headEnd type="none" w="med" len="med"/>
-                      <a:tailEnd type="none" w="med" len="med"/>
-                    </a:lnR>
-                    <a:lnT w="12700" cap="flat" cmpd="sng" algn="ctr">
-                      <a:solidFill>
-                        <a:schemeClr val="tx1"/>
-                      </a:solidFill>
-                      <a:prstDash val="solid"/>
-                      <a:round/>
-                      <a:headEnd type="none" w="med" len="med"/>
-                      <a:tailEnd type="none" w="med" len="med"/>
-                    </a:lnT>
-                    <a:lnB w="12700" cap="flat" cmpd="sng" algn="ctr">
-                      <a:solidFill>
-                        <a:schemeClr val="tx1"/>
-                      </a:solidFill>
-                      <a:prstDash val="solid"/>
-                      <a:round/>
-                      <a:headEnd type="none" w="med" len="med"/>
-                      <a:tailEnd type="none" w="med" len="med"/>
-                    </a:lnB>
-                  </a:tcPr>
-                </a:tc>
-                <a:tc>
-                  <a:txBody>
-                    <a:bodyPr/>
-                    <a:lstStyle/>
-                    <a:p>
-                      <a:pPr>
-                        <a:defRPr sz="1300">
-                          <a:solidFill>
-                            <a:srgbClr val="0F172A"/>
-                          </a:solidFill>
-                          <a:latin typeface="Open Sans"/>
-                        </a:defRPr>
-                      </a:pPr>
-                      <a:r>
-                        <a:t>Demonstrates 28% increase in concept retention over static lecture slides.</a:t>
-                      </a:r>
-                    </a:p>
-                  </a:txBody>
-                  <a:tcPr anchor="ctr">
-                    <a:lnL w="12700" cap="flat" cmpd="sng" algn="ctr">
-                      <a:solidFill>
-                        <a:schemeClr val="tx1"/>
-                      </a:solidFill>
-                      <a:prstDash val="solid"/>
-                      <a:round/>
-                      <a:headEnd type="none" w="med" len="med"/>
-                      <a:tailEnd type="none" w="med" len="med"/>
-                    </a:lnL>
-                    <a:lnR w="12700" cap="flat" cmpd="sng" algn="ctr">
-                      <a:solidFill>
-                        <a:schemeClr val="tx1"/>
-                      </a:solidFill>
-                      <a:prstDash val="solid"/>
-                      <a:round/>
-                      <a:headEnd type="none" w="med" len="med"/>
-                      <a:tailEnd type="none" w="med" len="med"/>
-                    </a:lnR>
-                    <a:lnT w="12700" cap="flat" cmpd="sng" algn="ctr">
-                      <a:solidFill>
-                        <a:schemeClr val="tx1"/>
-                      </a:solidFill>
-                      <a:prstDash val="solid"/>
-                      <a:round/>
-                      <a:headEnd type="none" w="med" len="med"/>
-                      <a:tailEnd type="none" w="med" len="med"/>
-                    </a:lnT>
-                    <a:lnB w="12700" cap="flat" cmpd="sng" algn="ctr">
-                      <a:solidFill>
-                        <a:schemeClr val="tx1"/>
-                      </a:solidFill>
-                      <a:prstDash val="solid"/>
-                      <a:round/>
-                      <a:headEnd type="none" w="med" len="med"/>
-                      <a:tailEnd type="none" w="med" len="med"/>
-                    </a:lnB>
-                  </a:tcPr>
-                </a:tc>
-                <a:tc>
-                  <a:txBody>
-                    <a:bodyPr/>
-                    <a:lstStyle/>
-                    <a:p>
-                      <a:pPr>
-                        <a:defRPr sz="1300">
-                          <a:solidFill>
-                            <a:srgbClr val="0F172A"/>
-                          </a:solidFill>
-                          <a:latin typeface="Open Sans"/>
-                        </a:defRPr>
-                      </a:pPr>
-                      <a:r>
-                        <a:t>Limited strictly to CPU scheduling; lacks memory paging, file systems, or real kernel primitives.</a:t>
-                      </a:r>
-                    </a:p>
-                  </a:txBody>
-                  <a:tcPr anchor="ctr">
-                    <a:lnL w="12700" cap="flat" cmpd="sng" algn="ctr">
-                      <a:solidFill>
-                        <a:schemeClr val="tx1"/>
-                      </a:solidFill>
-                      <a:prstDash val="solid"/>
-                      <a:round/>
-                      <a:headEnd type="none" w="med" len="med"/>
-                      <a:tailEnd type="none" w="med" len="med"/>
-                    </a:lnL>
-                    <a:lnR w="12700" cap="flat" cmpd="sng" algn="ctr">
-                      <a:solidFill>
-                        <a:schemeClr val="tx1"/>
-                      </a:solidFill>
-                      <a:prstDash val="solid"/>
-                      <a:round/>
-                      <a:headEnd type="none" w="med" len="med"/>
-                      <a:tailEnd type="none" w="med" len="med"/>
-                    </a:lnR>
-                    <a:lnT w="12700" cap="flat" cmpd="sng" algn="ctr">
-                      <a:solidFill>
-                        <a:schemeClr val="tx1"/>
-                      </a:solidFill>
-                      <a:prstDash val="solid"/>
-                      <a:round/>
-                      <a:headEnd type="none" w="med" len="med"/>
-                      <a:tailEnd type="none" w="med" len="med"/>
-                    </a:lnT>
-                    <a:lnB w="12700" cap="flat" cmpd="sng" algn="ctr">
-                      <a:solidFill>
-                        <a:schemeClr val="tx1"/>
-                      </a:solidFill>
-                      <a:prstDash val="solid"/>
-                      <a:round/>
-                      <a:headEnd type="none" w="med" len="med"/>
-                      <a:tailEnd type="none" w="med" len="med"/>
-                    </a:lnB>
-                  </a:tcPr>
-                </a:tc>
-                <a:extLst>
-                  <a:ext uri="{0D108BD9-81ED-4DB2-BD59-A6C34878D82A}">
-                    <a16:rowId xmlns:a16="http://schemas.microsoft.com/office/drawing/2014/main" val="10001"/>
-                  </a:ext>
-                </a:extLst>
-              </a:tr>
-              <a:tr h="2891681">
-                <a:tc>
-                  <a:txBody>
-                    <a:bodyPr/>
-                    <a:lstStyle/>
-                    <a:p>
-                      <a:pPr algn="ctr">
-                        <a:defRPr sz="1300">
-                          <a:solidFill>
-                            <a:srgbClr val="0F172A"/>
-                          </a:solidFill>
-                          <a:latin typeface="Open Sans"/>
-                        </a:defRPr>
-                      </a:pPr>
-                      <a:r>
-                        <a:t>2</a:t>
-                      </a:r>
-                    </a:p>
-                  </a:txBody>
-                  <a:tcPr anchor="ctr">
-                    <a:lnR w="12700" cap="flat" cmpd="sng" algn="ctr">
-                      <a:solidFill>
-                        <a:schemeClr val="tx1"/>
-                      </a:solidFill>
-                      <a:prstDash val="solid"/>
-                      <a:round/>
-                      <a:headEnd type="none" w="med" len="med"/>
-                      <a:tailEnd type="none" w="med" len="med"/>
-                    </a:lnR>
-                    <a:lnT w="12700" cap="flat" cmpd="sng" algn="ctr">
-                      <a:solidFill>
-                        <a:schemeClr val="tx1"/>
-                      </a:solidFill>
-                      <a:prstDash val="solid"/>
-                      <a:round/>
-                      <a:headEnd type="none" w="med" len="med"/>
-                      <a:tailEnd type="none" w="med" len="med"/>
-                    </a:lnT>
-                  </a:tcPr>
-                </a:tc>
-                <a:tc>
-                  <a:txBody>
-                    <a:bodyPr/>
-                    <a:lstStyle/>
-                    <a:p>
-                      <a:pPr>
-                        <a:defRPr sz="1300">
-                          <a:solidFill>
-                            <a:srgbClr val="0F172A"/>
-                          </a:solidFill>
-                          <a:latin typeface="Open Sans"/>
-                        </a:defRPr>
-                      </a:pPr>
-                      <a:r>
-                        <a:t>A. Silberschatz, P. Galvin, G. Gagne (2021)</a:t>
-                      </a:r>
-                    </a:p>
-                  </a:txBody>
-                  <a:tcPr anchor="ctr">
-                    <a:lnL w="12700" cap="flat" cmpd="sng" algn="ctr">
-                      <a:solidFill>
-                        <a:schemeClr val="tx1"/>
-                      </a:solidFill>
-                      <a:prstDash val="solid"/>
-                      <a:round/>
-                      <a:headEnd type="none" w="med" len="med"/>
-                      <a:tailEnd type="none" w="med" len="med"/>
-                    </a:lnL>
-                    <a:lnR w="12700" cap="flat" cmpd="sng" algn="ctr">
-                      <a:solidFill>
-                        <a:schemeClr val="tx1"/>
-                      </a:solidFill>
-                      <a:prstDash val="solid"/>
-                      <a:round/>
-                      <a:headEnd type="none" w="med" len="med"/>
-                      <a:tailEnd type="none" w="med" len="med"/>
-                    </a:lnR>
-                    <a:lnT w="12700" cap="flat" cmpd="sng" algn="ctr">
-                      <a:solidFill>
-                        <a:schemeClr val="tx1"/>
-                      </a:solidFill>
-                      <a:prstDash val="solid"/>
-                      <a:round/>
-                      <a:headEnd type="none" w="med" len="med"/>
-                      <a:tailEnd type="none" w="med" len="med"/>
-                    </a:lnT>
-                    <a:lnB w="12700" cap="flat" cmpd="sng" algn="ctr">
-                      <a:solidFill>
-                        <a:schemeClr val="tx1"/>
-                      </a:solidFill>
-                      <a:prstDash val="solid"/>
-                      <a:round/>
-                      <a:headEnd type="none" w="med" len="med"/>
-                      <a:tailEnd type="none" w="med" len="med"/>
-                    </a:lnB>
-                  </a:tcPr>
-                </a:tc>
-                <a:tc>
-                  <a:txBody>
-                    <a:bodyPr/>
-                    <a:lstStyle/>
-                    <a:p>
-                      <a:pPr>
-                        <a:defRPr sz="1300">
-                          <a:solidFill>
-                            <a:srgbClr val="0F172A"/>
-                          </a:solidFill>
-                          <a:latin typeface="Open Sans"/>
-                        </a:defRPr>
-                      </a:pPr>
-                      <a:r>
-                        <a:t>Operating System Concepts &amp; Problem Benchmarking</a:t>
-                      </a:r>
-                    </a:p>
-                  </a:txBody>
-                  <a:tcPr anchor="ctr">
-                    <a:lnL w="12700" cap="flat" cmpd="sng" algn="ctr">
-                      <a:solidFill>
-                        <a:schemeClr val="tx1"/>
-                      </a:solidFill>
-                      <a:prstDash val="solid"/>
-                      <a:round/>
-                      <a:headEnd type="none" w="med" len="med"/>
-                      <a:tailEnd type="none" w="med" len="med"/>
-                    </a:lnL>
-                    <a:lnR w="12700" cap="flat" cmpd="sng" algn="ctr">
-                      <a:solidFill>
-                        <a:schemeClr val="tx1"/>
-                      </a:solidFill>
-                      <a:prstDash val="solid"/>
-                      <a:round/>
-                      <a:headEnd type="none" w="med" len="med"/>
-                      <a:tailEnd type="none" w="med" len="med"/>
-                    </a:lnR>
-                    <a:lnT w="12700" cap="flat" cmpd="sng" algn="ctr">
-                      <a:solidFill>
-                        <a:schemeClr val="tx1"/>
-                      </a:solidFill>
-                      <a:prstDash val="solid"/>
-                      <a:round/>
-                      <a:headEnd type="none" w="med" len="med"/>
-                      <a:tailEnd type="none" w="med" len="med"/>
-                    </a:lnT>
-                    <a:lnB w="12700" cap="flat" cmpd="sng" algn="ctr">
-                      <a:solidFill>
-                        <a:schemeClr val="tx1"/>
-                      </a:solidFill>
-                      <a:prstDash val="solid"/>
-                      <a:round/>
-                      <a:headEnd type="none" w="med" len="med"/>
-                      <a:tailEnd type="none" w="med" len="med"/>
-                    </a:lnB>
-                  </a:tcPr>
-                </a:tc>
-                <a:tc>
-                  <a:txBody>
-                    <a:bodyPr/>
-                    <a:lstStyle/>
-                    <a:p>
-                      <a:pPr>
-                        <a:defRPr sz="1300">
-                          <a:solidFill>
-                            <a:srgbClr val="0F172A"/>
-                          </a:solidFill>
-                          <a:latin typeface="Open Sans"/>
-                        </a:defRPr>
-                      </a:pPr>
-                      <a:r>
-                        <a:t>John Wiley &amp; Sons</a:t>
-                      </a:r>
-                    </a:p>
-                  </a:txBody>
-                  <a:tcPr anchor="ctr">
-                    <a:lnL w="12700" cap="flat" cmpd="sng" algn="ctr">
-                      <a:solidFill>
-                        <a:schemeClr val="tx1"/>
-                      </a:solidFill>
-                      <a:prstDash val="solid"/>
-                      <a:round/>
-                      <a:headEnd type="none" w="med" len="med"/>
-                      <a:tailEnd type="none" w="med" len="med"/>
-                    </a:lnL>
-                    <a:lnR w="12700" cap="flat" cmpd="sng" algn="ctr">
-                      <a:solidFill>
-                        <a:schemeClr val="tx1"/>
-                      </a:solidFill>
-                      <a:prstDash val="solid"/>
-                      <a:round/>
-                      <a:headEnd type="none" w="med" len="med"/>
-                      <a:tailEnd type="none" w="med" len="med"/>
-                    </a:lnR>
-                    <a:lnT w="12700" cap="flat" cmpd="sng" algn="ctr">
-                      <a:solidFill>
-                        <a:schemeClr val="tx1"/>
-                      </a:solidFill>
-                      <a:prstDash val="solid"/>
-                      <a:round/>
-                      <a:headEnd type="none" w="med" len="med"/>
-                      <a:tailEnd type="none" w="med" len="med"/>
-                    </a:lnT>
-                    <a:lnB w="12700" cap="flat" cmpd="sng" algn="ctr">
-                      <a:solidFill>
-                        <a:schemeClr val="tx1"/>
-                      </a:solidFill>
-                      <a:prstDash val="solid"/>
-                      <a:round/>
-                      <a:headEnd type="none" w="med" len="med"/>
-                      <a:tailEnd type="none" w="med" len="med"/>
-                    </a:lnB>
-                  </a:tcPr>
-                </a:tc>
-                <a:tc>
-                  <a:txBody>
-                    <a:bodyPr/>
-                    <a:lstStyle/>
-                    <a:p>
-                      <a:pPr>
-                        <a:defRPr sz="1300">
-                          <a:solidFill>
-                            <a:srgbClr val="0F172A"/>
-                          </a:solidFill>
-                          <a:latin typeface="Open Sans"/>
-                        </a:defRPr>
-                      </a:pPr>
-                      <a:r>
-                        <a:t>Standardized benchmark problem sets for scheduling, synchronization, and virtual memory.</a:t>
-                      </a:r>
-                    </a:p>
-                  </a:txBody>
-                  <a:tcPr anchor="ctr">
-                    <a:lnL w="12700" cap="flat" cmpd="sng" algn="ctr">
-                      <a:solidFill>
-                        <a:schemeClr val="tx1"/>
-                      </a:solidFill>
-                      <a:prstDash val="solid"/>
-                      <a:round/>
-                      <a:headEnd type="none" w="med" len="med"/>
-                      <a:tailEnd type="none" w="med" len="med"/>
-                    </a:lnL>
-                    <a:lnR w="12700" cap="flat" cmpd="sng" algn="ctr">
-                      <a:solidFill>
-                        <a:schemeClr val="tx1"/>
-                      </a:solidFill>
-                      <a:prstDash val="solid"/>
-                      <a:round/>
-                      <a:headEnd type="none" w="med" len="med"/>
-                      <a:tailEnd type="none" w="med" len="med"/>
-                    </a:lnR>
-                    <a:lnT w="12700" cap="flat" cmpd="sng" algn="ctr">
-                      <a:solidFill>
-                        <a:schemeClr val="tx1"/>
-                      </a:solidFill>
-                      <a:prstDash val="solid"/>
-                      <a:round/>
-                      <a:headEnd type="none" w="med" len="med"/>
-                      <a:tailEnd type="none" w="med" len="med"/>
-                    </a:lnT>
-                    <a:lnB w="12700" cap="flat" cmpd="sng" algn="ctr">
-                      <a:solidFill>
-                        <a:schemeClr val="tx1"/>
-                      </a:solidFill>
-                      <a:prstDash val="solid"/>
-                      <a:round/>
-                      <a:headEnd type="none" w="med" len="med"/>
-                      <a:tailEnd type="none" w="med" len="med"/>
-                    </a:lnB>
-                  </a:tcPr>
-                </a:tc>
-                <a:tc>
-                  <a:txBody>
-                    <a:bodyPr/>
-                    <a:lstStyle/>
-                    <a:p>
-                      <a:pPr>
-                        <a:defRPr sz="1300">
-                          <a:solidFill>
-                            <a:srgbClr val="0F172A"/>
-                          </a:solidFill>
-                          <a:latin typeface="Open Sans"/>
-                        </a:defRPr>
-                      </a:pPr>
-                      <a:r>
-                        <a:t>Highlights the critical pedagogical need for reproducible workload comparisons.</a:t>
-                      </a:r>
-                    </a:p>
-                  </a:txBody>
-                  <a:tcPr anchor="ctr">
-                    <a:lnL w="12700" cap="flat" cmpd="sng" algn="ctr">
-                      <a:solidFill>
-                        <a:schemeClr val="tx1"/>
-                      </a:solidFill>
-                      <a:prstDash val="solid"/>
-                      <a:round/>
-                      <a:headEnd type="none" w="med" len="med"/>
-                      <a:tailEnd type="none" w="med" len="med"/>
-                    </a:lnL>
-                    <a:lnR w="12700" cap="flat" cmpd="sng" algn="ctr">
-                      <a:solidFill>
-                        <a:schemeClr val="tx1"/>
-                      </a:solidFill>
-                      <a:prstDash val="solid"/>
-                      <a:round/>
-                      <a:headEnd type="none" w="med" len="med"/>
-                      <a:tailEnd type="none" w="med" len="med"/>
-                    </a:lnR>
-                    <a:lnT w="12700" cap="flat" cmpd="sng" algn="ctr">
-                      <a:solidFill>
-                        <a:schemeClr val="tx1"/>
-                      </a:solidFill>
-                      <a:prstDash val="solid"/>
-                      <a:round/>
-                      <a:headEnd type="none" w="med" len="med"/>
-                      <a:tailEnd type="none" w="med" len="med"/>
-                    </a:lnT>
-                    <a:lnB w="12700" cap="flat" cmpd="sng" algn="ctr">
-                      <a:solidFill>
-                        <a:schemeClr val="tx1"/>
-                      </a:solidFill>
-                      <a:prstDash val="solid"/>
-                      <a:round/>
-                      <a:headEnd type="none" w="med" len="med"/>
-                      <a:tailEnd type="none" w="med" len="med"/>
-                    </a:lnB>
-                  </a:tcPr>
-                </a:tc>
-                <a:tc>
-                  <a:txBody>
-                    <a:bodyPr/>
-                    <a:lstStyle/>
-                    <a:p>
-                      <a:pPr>
-                        <a:defRPr sz="1300">
-                          <a:solidFill>
-                            <a:srgbClr val="0F172A"/>
-                          </a:solidFill>
-                          <a:latin typeface="Open Sans"/>
-                        </a:defRPr>
-                      </a:pPr>
-                      <a:r>
-                        <a:t>Conceptual textbook models without an interactive, production-grade software experimentation laboratory.</a:t>
-                      </a:r>
-                    </a:p>
-                  </a:txBody>
-                  <a:tcPr anchor="ctr">
-                    <a:lnL w="12700" cap="flat" cmpd="sng" algn="ctr">
-                      <a:solidFill>
-                        <a:schemeClr val="tx1"/>
-                      </a:solidFill>
-                      <a:prstDash val="solid"/>
-                      <a:round/>
-                      <a:headEnd type="none" w="med" len="med"/>
-                      <a:tailEnd type="none" w="med" len="med"/>
-                    </a:lnL>
-                    <a:lnR w="12700" cap="flat" cmpd="sng" algn="ctr">
-                      <a:solidFill>
-                        <a:schemeClr val="tx1"/>
-                      </a:solidFill>
-                      <a:prstDash val="solid"/>
-                      <a:round/>
-                      <a:headEnd type="none" w="med" len="med"/>
-                      <a:tailEnd type="none" w="med" len="med"/>
-                    </a:lnR>
-                    <a:lnT w="12700" cap="flat" cmpd="sng" algn="ctr">
-                      <a:solidFill>
-                        <a:schemeClr val="tx1"/>
-                      </a:solidFill>
-                      <a:prstDash val="solid"/>
-                      <a:round/>
-                      <a:headEnd type="none" w="med" len="med"/>
-                      <a:tailEnd type="none" w="med" len="med"/>
-                    </a:lnT>
-                    <a:lnB w="12700" cap="flat" cmpd="sng" algn="ctr">
-                      <a:solidFill>
-                        <a:schemeClr val="tx1"/>
-                      </a:solidFill>
-                      <a:prstDash val="solid"/>
-                      <a:round/>
-                      <a:headEnd type="none" w="med" len="med"/>
-                      <a:tailEnd type="none" w="med" len="med"/>
-                    </a:lnB>
-                  </a:tcPr>
-                </a:tc>
-                <a:extLst>
-                  <a:ext uri="{0D108BD9-81ED-4DB2-BD59-A6C34878D82A}">
-                    <a16:rowId xmlns:a16="http://schemas.microsoft.com/office/drawing/2014/main" val="10003"/>
-                  </a:ext>
-                </a:extLst>
-              </a:tr>
-            </a:tbl>
-          </a:graphicData>
-        </a:graphic>
-      </p:graphicFrame>
-      <p:sp>
-        <p:nvSpPr>
-          <p:cNvPr id="24" name="AutoShape 16"/>
-          <p:cNvSpPr/>
-          <p:nvPr/>
-        </p:nvSpPr>
-        <p:spPr>
-          <a:xfrm>
-            <a:off x="819362" y="571500"/>
-            <a:ext cx="903745" cy="0"/>
-          </a:xfrm>
-          <a:prstGeom prst="line">
-            <a:avLst/>
-          </a:prstGeom>
-          <a:ln w="238125" cap="flat">
-            <a:solidFill>
-              <a:schemeClr val="accent5"/>
-            </a:solidFill>
-            <a:prstDash val="solid"/>
-            <a:headEnd type="none" w="sm" len="sm"/>
-            <a:tailEnd type="none" w="sm" len="sm"/>
-          </a:ln>
-        </p:spPr>
-        <p:txBody>
-          <a:bodyPr/>
-          <a:lstStyle/>
-          <a:p>
-            <a:endParaRPr lang="en-IN"/>
-          </a:p>
-        </p:txBody>
-      </p:sp>
-      <p:pic>
-        <p:nvPicPr>
-          <p:cNvPr id="4" name="Picture 3">
-            <a:extLst>
-              <a:ext uri="{FF2B5EF4-FFF2-40B4-BE49-F238E27FC236}">
-                <a16:creationId xmlns:a16="http://schemas.microsoft.com/office/drawing/2014/main" id="{50BB07BC-7878-1E83-ED35-FCF5099DF11C}"/>
-              </a:ext>
-            </a:extLst>
-          </p:cNvPr>
-          <p:cNvPicPr>
-            <a:picLocks noChangeAspect="1"/>
-          </p:cNvPicPr>
-          <p:nvPr/>
-        </p:nvPicPr>
-        <p:blipFill>
-          <a:blip r:embed="rId2"/>
-          <a:stretch>
-            <a:fillRect/>
-          </a:stretch>
-        </p:blipFill>
-        <p:spPr>
-          <a:xfrm>
-            <a:off x="14993447" y="-344198"/>
-            <a:ext cx="2475191" cy="2097206"/>
-          </a:xfrm>
-          <a:prstGeom prst="rect">
-            <a:avLst/>
-          </a:prstGeom>
-        </p:spPr>
-      </p:pic>
-    </p:spTree>
-    <p:extLst>
-      <p:ext uri="{BB962C8B-B14F-4D97-AF65-F5344CB8AC3E}">
-        <p14:creationId xmlns:p14="http://schemas.microsoft.com/office/powerpoint/2010/main" val="590363732"/>
-      </p:ext>
-    </p:extLst>
-  </p:cSld>
-  <p:clrMapOvr>
-    <a:masterClrMapping/>
-  </p:clrMapOvr>
-</p:sld>
-</file>
-
-<file path=ppt/slides/slide6.xml><?xml version="1.0" encoding="utf-8"?>
-<p:sld xmlns:a="http://schemas.openxmlformats.org/drawingml/2006/main" xmlns:r="http://schemas.openxmlformats.org/officeDocument/2006/relationships" xmlns:p="http://schemas.openxmlformats.org/presentationml/2006/main">
-  <p:cSld>
-    <p:spTree>
-      <p:nvGrpSpPr>
-        <p:cNvPr id="1" name=""/>
-        <p:cNvGrpSpPr/>
-        <p:nvPr/>
-      </p:nvGrpSpPr>
-      <p:grpSpPr>
-        <a:xfrm>
-          <a:off x="0" y="0"/>
-          <a:ext cx="0" cy="0"/>
-          <a:chOff x="0" y="0"/>
-          <a:chExt cx="0" cy="0"/>
-        </a:xfrm>
-      </p:grpSpPr>
-      <p:sp>
-        <p:nvSpPr>
-          <p:cNvPr id="6" name="TextBox 6"/>
-          <p:cNvSpPr txBox="1"/>
-          <p:nvPr/>
-        </p:nvSpPr>
-        <p:spPr>
-          <a:xfrm>
-            <a:off x="1723107" y="2850095"/>
-            <a:ext cx="12408632" cy="1050031"/>
-          </a:xfrm>
-          <a:prstGeom prst="rect">
-            <a:avLst/>
-          </a:prstGeom>
-        </p:spPr>
-        <p:txBody>
-          <a:bodyPr lIns="0" tIns="0" rIns="0" bIns="0" rtlCol="0" anchor="t">
-            <a:spAutoFit/>
-          </a:bodyPr>
-          <a:lstStyle/>
-          <a:p>
-            <a:pPr algn="just">
-              <a:lnSpc>
-                <a:spcPts val="4326"/>
-              </a:lnSpc>
-            </a:pPr>
-            <a:endParaRPr dirty="0"/>
-          </a:p>
-          <a:p>
-            <a:pPr algn="just">
-              <a:lnSpc>
-                <a:spcPts val="4326"/>
-              </a:lnSpc>
-            </a:pPr>
-            <a:endParaRPr lang="en-US" sz="2884" spc="187" dirty="0">
-              <a:solidFill>
-                <a:srgbClr val="000000"/>
-              </a:solidFill>
-              <a:latin typeface="Open Sauce"/>
-              <a:ea typeface="Open Sauce"/>
-              <a:cs typeface="Open Sauce"/>
-              <a:sym typeface="Open Sauce"/>
-            </a:endParaRPr>
-          </a:p>
-        </p:txBody>
-      </p:sp>
-      <p:sp>
-        <p:nvSpPr>
-          <p:cNvPr id="10" name="AutoShape 10"/>
-          <p:cNvSpPr/>
-          <p:nvPr/>
-        </p:nvSpPr>
-        <p:spPr>
-          <a:xfrm>
-            <a:off x="304800" y="9944100"/>
-            <a:ext cx="15392400" cy="76200"/>
-          </a:xfrm>
-          <a:prstGeom prst="line">
-            <a:avLst/>
-          </a:prstGeom>
-          <a:ln w="38100" cap="flat">
-            <a:solidFill>
-              <a:schemeClr val="accent5"/>
-            </a:solidFill>
-            <a:prstDash val="solid"/>
-            <a:headEnd type="none" w="sm" len="sm"/>
-            <a:tailEnd type="none" w="sm" len="sm"/>
-          </a:ln>
-        </p:spPr>
-        <p:txBody>
-          <a:bodyPr/>
-          <a:lstStyle/>
-          <a:p>
-            <a:endParaRPr/>
-          </a:p>
-        </p:txBody>
-      </p:sp>
-      <p:grpSp>
-        <p:nvGrpSpPr>
-          <p:cNvPr id="20" name="Group 3"/>
-          <p:cNvGrpSpPr/>
-          <p:nvPr/>
-        </p:nvGrpSpPr>
-        <p:grpSpPr>
-          <a:xfrm>
-            <a:off x="0" y="769076"/>
-            <a:ext cx="685802" cy="10287000"/>
-            <a:chOff x="0" y="0"/>
-            <a:chExt cx="270933" cy="466552"/>
-          </a:xfrm>
-          <a:solidFill>
-            <a:schemeClr val="accent5"/>
-          </a:solidFill>
-        </p:grpSpPr>
-        <p:sp>
-          <p:nvSpPr>
-            <p:cNvPr id="21" name="Freeform 4"/>
-            <p:cNvSpPr/>
-            <p:nvPr/>
-          </p:nvSpPr>
-          <p:spPr>
-            <a:xfrm>
-              <a:off x="0" y="0"/>
-              <a:ext cx="270933" cy="466552"/>
-            </a:xfrm>
-            <a:custGeom>
-              <a:avLst/>
-              <a:gdLst/>
-              <a:ahLst/>
-              <a:cxnLst/>
-              <a:rect l="l" t="t" r="r" b="b"/>
-              <a:pathLst>
-                <a:path w="270933" h="466552">
-                  <a:moveTo>
-                    <a:pt x="0" y="0"/>
-                  </a:moveTo>
-                  <a:lnTo>
-                    <a:pt x="270933" y="0"/>
-                  </a:lnTo>
-                  <a:lnTo>
-                    <a:pt x="270933" y="466552"/>
-                  </a:lnTo>
-                  <a:lnTo>
-                    <a:pt x="0" y="466552"/>
-                  </a:lnTo>
-                  <a:close/>
-                </a:path>
-              </a:pathLst>
-            </a:custGeom>
-            <a:grpFill/>
-          </p:spPr>
-          <p:txBody>
-            <a:bodyPr/>
-            <a:lstStyle/>
-            <a:p>
-              <a:endParaRPr lang="en-IN"/>
-            </a:p>
-          </p:txBody>
-        </p:sp>
-        <p:sp>
-          <p:nvSpPr>
-            <p:cNvPr id="22" name="TextBox 5"/>
-            <p:cNvSpPr txBox="1"/>
-            <p:nvPr/>
-          </p:nvSpPr>
-          <p:spPr>
-            <a:xfrm>
-              <a:off x="0" y="-57150"/>
-              <a:ext cx="270933" cy="523702"/>
-            </a:xfrm>
-            <a:prstGeom prst="rect">
-              <a:avLst/>
-            </a:prstGeom>
-            <a:grpFill/>
-          </p:spPr>
-          <p:txBody>
-            <a:bodyPr lIns="50800" tIns="50800" rIns="50800" bIns="50800" rtlCol="0" anchor="ctr"/>
-            <a:lstStyle/>
-            <a:p>
-              <a:pPr algn="ctr">
-                <a:lnSpc>
-                  <a:spcPts val="2659"/>
-                </a:lnSpc>
-              </a:pPr>
-              <a:endParaRPr/>
-            </a:p>
-          </p:txBody>
-        </p:sp>
-      </p:grpSp>
-      <p:sp>
-        <p:nvSpPr>
-          <p:cNvPr id="2" name="Rectangle 1"/>
-          <p:cNvSpPr/>
-          <p:nvPr/>
-        </p:nvSpPr>
-        <p:spPr>
-          <a:xfrm>
-            <a:off x="5369695" y="0"/>
-            <a:ext cx="5253362" cy="876907"/>
-          </a:xfrm>
-          <a:prstGeom prst="rect">
-            <a:avLst/>
-          </a:prstGeom>
-        </p:spPr>
-        <p:txBody>
-          <a:bodyPr wrap="none">
-            <a:spAutoFit/>
-          </a:bodyPr>
-          <a:lstStyle/>
-          <a:p>
-            <a:pPr lvl="0" algn="ctr">
-              <a:lnSpc>
-                <a:spcPts val="6730"/>
-              </a:lnSpc>
-              <a:spcBef>
-                <a:spcPct val="0"/>
-              </a:spcBef>
-            </a:pPr>
-            <a:r>
-              <a:rPr sz="4800" b="1">
-                <a:latin typeface="Akzidenz-Grotesk Heavy"/>
-              </a:rPr>
-              <a:t>Literature Survey</a:t>
-            </a:r>
-            <a:endParaRPr lang="en-US" sz="4800" b="1" dirty="0">
-              <a:solidFill>
-                <a:srgbClr val="0E2F5F"/>
-              </a:solidFill>
-              <a:latin typeface="Akzidenz-Grotesk Heavy"/>
-              <a:ea typeface="Akzidenz-Grotesk Heavy"/>
-              <a:cs typeface="Akzidenz-Grotesk Heavy"/>
-              <a:sym typeface="Akzidenz-Grotesk Heavy"/>
-            </a:endParaRPr>
-          </a:p>
-        </p:txBody>
-      </p:sp>
-      <p:graphicFrame>
-        <p:nvGraphicFramePr>
-          <p:cNvPr id="23" name="Content Placeholder 4">
-            <a:extLst>
-              <a:ext uri="{FF2B5EF4-FFF2-40B4-BE49-F238E27FC236}">
-                <a16:creationId xmlns:a16="http://schemas.microsoft.com/office/drawing/2014/main" id="{7255246C-0B60-7E90-B4BC-E71B3A8BD324}"/>
-              </a:ext>
-            </a:extLst>
-          </p:cNvPr>
-          <p:cNvGraphicFramePr/>
-          <p:nvPr>
-            <p:extLst>
-              <p:ext uri="{D42A27DB-BD31-4B8C-83A1-F6EECF244321}">
-                <p14:modId xmlns:p14="http://schemas.microsoft.com/office/powerpoint/2010/main" val="1979327828"/>
-              </p:ext>
-            </p:extLst>
-          </p:nvPr>
-        </p:nvGraphicFramePr>
-        <p:xfrm>
-          <a:off x="1028700" y="1771443"/>
-          <a:ext cx="16412711" cy="8009610"/>
-        </p:xfrm>
-        <a:graphic>
-          <a:graphicData uri="http://schemas.openxmlformats.org/drawingml/2006/table">
-            <a:tbl>
-              <a:tblPr firstRow="1">
-                <a:tableStyleId>{69012ECD-51FC-41F1-AA8D-1B2483CD663E}</a:tableStyleId>
-              </a:tblPr>
-              <a:tblGrid>
-                <a:gridCol w="1130982">
-                  <a:extLst>
-                    <a:ext uri="{9D8B030D-6E8A-4147-A177-3AD203B41FA5}">
-                      <a16:colId xmlns:a16="http://schemas.microsoft.com/office/drawing/2014/main" val="20000"/>
-                    </a:ext>
-                  </a:extLst>
-                </a:gridCol>
-                <a:gridCol w="2036151">
-                  <a:extLst>
-                    <a:ext uri="{9D8B030D-6E8A-4147-A177-3AD203B41FA5}">
-                      <a16:colId xmlns:a16="http://schemas.microsoft.com/office/drawing/2014/main" val="20001"/>
-                    </a:ext>
-                  </a:extLst>
-                </a:gridCol>
-                <a:gridCol w="2913634">
-                  <a:extLst>
-                    <a:ext uri="{9D8B030D-6E8A-4147-A177-3AD203B41FA5}">
-                      <a16:colId xmlns:a16="http://schemas.microsoft.com/office/drawing/2014/main" val="3670930075"/>
-                    </a:ext>
-                  </a:extLst>
-                </a:gridCol>
-                <a:gridCol w="2850360">
-                  <a:extLst>
-                    <a:ext uri="{9D8B030D-6E8A-4147-A177-3AD203B41FA5}">
-                      <a16:colId xmlns:a16="http://schemas.microsoft.com/office/drawing/2014/main" val="1292415790"/>
-                    </a:ext>
-                  </a:extLst>
-                </a:gridCol>
-                <a:gridCol w="2945371">
-                  <a:extLst>
-                    <a:ext uri="{9D8B030D-6E8A-4147-A177-3AD203B41FA5}">
-                      <a16:colId xmlns:a16="http://schemas.microsoft.com/office/drawing/2014/main" val="20002"/>
-                    </a:ext>
-                  </a:extLst>
-                </a:gridCol>
-                <a:gridCol w="2432276">
-                  <a:extLst>
-                    <a:ext uri="{9D8B030D-6E8A-4147-A177-3AD203B41FA5}">
-                      <a16:colId xmlns:a16="http://schemas.microsoft.com/office/drawing/2014/main" val="702408066"/>
-                    </a:ext>
-                  </a:extLst>
-                </a:gridCol>
-                <a:gridCol w="2103937">
-                  <a:extLst>
-                    <a:ext uri="{9D8B030D-6E8A-4147-A177-3AD203B41FA5}">
-                      <a16:colId xmlns:a16="http://schemas.microsoft.com/office/drawing/2014/main" val="20005"/>
-                    </a:ext>
-                  </a:extLst>
-                </a:gridCol>
-              </a:tblGrid>
-              <a:tr h="822904">
-                <a:tc>
-                  <a:txBody>
-                    <a:bodyPr/>
-                    <a:lstStyle/>
-                    <a:p>
-                      <a:r>
-                        <a:rPr sz="2200" b="1"/>
-                        <a:t>Sr.No</a:t>
-                      </a:r>
-                    </a:p>
-                  </a:txBody>
-                  <a:tcPr anchor="ctr">
-                    <a:lnL w="12700" cap="flat" cmpd="sng" algn="ctr">
-                      <a:solidFill>
-                        <a:schemeClr val="tx1"/>
-                      </a:solidFill>
-                      <a:prstDash val="solid"/>
-                      <a:round/>
-                      <a:headEnd type="none" w="med" len="med"/>
-                      <a:tailEnd type="none" w="med" len="med"/>
-                    </a:lnL>
-                    <a:lnR w="12700" cap="flat" cmpd="sng" algn="ctr">
-                      <a:solidFill>
-                        <a:schemeClr val="tx1"/>
-                      </a:solidFill>
-                      <a:prstDash val="solid"/>
-                      <a:round/>
-                      <a:headEnd type="none" w="med" len="med"/>
-                      <a:tailEnd type="none" w="med" len="med"/>
-                    </a:lnR>
-                    <a:lnT w="12700" cap="flat" cmpd="sng" algn="ctr">
-                      <a:solidFill>
-                        <a:schemeClr val="tx1"/>
-                      </a:solidFill>
-                      <a:prstDash val="solid"/>
-                      <a:round/>
-                      <a:headEnd type="none" w="med" len="med"/>
-                      <a:tailEnd type="none" w="med" len="med"/>
-                    </a:lnT>
-                    <a:lnB w="12700" cap="flat" cmpd="sng" algn="ctr">
-                      <a:solidFill>
-                        <a:schemeClr val="tx1"/>
-                      </a:solidFill>
-                      <a:prstDash val="solid"/>
-                      <a:round/>
-                      <a:headEnd type="none" w="med" len="med"/>
-                      <a:tailEnd type="none" w="med" len="med"/>
-                    </a:lnB>
-                    <a:solidFill>
-                      <a:schemeClr val="accent5"/>
-                    </a:solidFill>
-                  </a:tcPr>
-                </a:tc>
-                <a:tc>
-                  <a:txBody>
-                    <a:bodyPr/>
-                    <a:lstStyle/>
-                    <a:p>
-                      <a:r>
-                        <a:rPr sz="2200" b="1"/>
-                        <a:t>Author &amp; Year</a:t>
-                      </a:r>
-                    </a:p>
-                  </a:txBody>
-                  <a:tcPr anchor="ctr">
-                    <a:lnL w="12700" cap="flat" cmpd="sng" algn="ctr">
-                      <a:solidFill>
-                        <a:schemeClr val="tx1"/>
-                      </a:solidFill>
-                      <a:prstDash val="solid"/>
-                      <a:round/>
-                      <a:headEnd type="none" w="med" len="med"/>
-                      <a:tailEnd type="none" w="med" len="med"/>
-                    </a:lnL>
-                    <a:lnR w="12700" cap="flat" cmpd="sng" algn="ctr">
-                      <a:solidFill>
-                        <a:schemeClr val="tx1"/>
-                      </a:solidFill>
-                      <a:prstDash val="solid"/>
-                      <a:round/>
-                      <a:headEnd type="none" w="med" len="med"/>
-                      <a:tailEnd type="none" w="med" len="med"/>
-                    </a:lnR>
-                    <a:lnT w="12700" cap="flat" cmpd="sng" algn="ctr">
-                      <a:solidFill>
-                        <a:schemeClr val="tx1"/>
-                      </a:solidFill>
-                      <a:prstDash val="solid"/>
-                      <a:round/>
-                      <a:headEnd type="none" w="med" len="med"/>
-                      <a:tailEnd type="none" w="med" len="med"/>
-                    </a:lnT>
-                    <a:lnB w="12700" cap="flat" cmpd="sng" algn="ctr">
-                      <a:solidFill>
-                        <a:schemeClr val="tx1"/>
-                      </a:solidFill>
-                      <a:prstDash val="solid"/>
-                      <a:round/>
-                      <a:headEnd type="none" w="med" len="med"/>
-                      <a:tailEnd type="none" w="med" len="med"/>
-                    </a:lnB>
-                    <a:solidFill>
-                      <a:schemeClr val="accent5"/>
-                    </a:solidFill>
-                  </a:tcPr>
-                </a:tc>
-                <a:tc>
-                  <a:txBody>
-                    <a:bodyPr/>
-                    <a:lstStyle/>
-                    <a:p>
-                      <a:r>
-                        <a:rPr sz="2200" b="1"/>
-                        <a:t>Title of Paper</a:t>
-                      </a:r>
-                    </a:p>
-                  </a:txBody>
-                  <a:tcPr anchor="ctr">
-                    <a:lnL w="12700" cap="flat" cmpd="sng" algn="ctr">
-                      <a:solidFill>
-                        <a:schemeClr val="tx1"/>
-                      </a:solidFill>
-                      <a:prstDash val="solid"/>
-                      <a:round/>
-                      <a:headEnd type="none" w="med" len="med"/>
-                      <a:tailEnd type="none" w="med" len="med"/>
-                    </a:lnL>
-                    <a:lnR w="12700" cap="flat" cmpd="sng" algn="ctr">
-                      <a:solidFill>
-                        <a:schemeClr val="tx1"/>
-                      </a:solidFill>
-                      <a:prstDash val="solid"/>
-                      <a:round/>
-                      <a:headEnd type="none" w="med" len="med"/>
-                      <a:tailEnd type="none" w="med" len="med"/>
-                    </a:lnR>
-                    <a:lnT w="12700" cap="flat" cmpd="sng" algn="ctr">
-                      <a:solidFill>
-                        <a:schemeClr val="tx1"/>
-                      </a:solidFill>
-                      <a:prstDash val="solid"/>
-                      <a:round/>
-                      <a:headEnd type="none" w="med" len="med"/>
-                      <a:tailEnd type="none" w="med" len="med"/>
-                    </a:lnT>
-                    <a:lnB w="12700" cap="flat" cmpd="sng" algn="ctr">
-                      <a:solidFill>
-                        <a:schemeClr val="tx1"/>
-                      </a:solidFill>
-                      <a:prstDash val="solid"/>
-                      <a:round/>
-                      <a:headEnd type="none" w="med" len="med"/>
-                      <a:tailEnd type="none" w="med" len="med"/>
-                    </a:lnB>
-                    <a:solidFill>
-                      <a:schemeClr val="accent5"/>
-                    </a:solidFill>
-                  </a:tcPr>
-                </a:tc>
-                <a:tc>
-                  <a:txBody>
-                    <a:bodyPr/>
-                    <a:lstStyle/>
-                    <a:p>
-                      <a:r>
-                        <a:rPr sz="2200" b="1"/>
-                        <a:t>Publisher</a:t>
-                      </a:r>
-                    </a:p>
-                  </a:txBody>
-                  <a:tcPr anchor="ctr">
-                    <a:lnL w="12700" cap="flat" cmpd="sng" algn="ctr">
-                      <a:solidFill>
-                        <a:schemeClr val="tx1"/>
-                      </a:solidFill>
-                      <a:prstDash val="solid"/>
-                      <a:round/>
-                      <a:headEnd type="none" w="med" len="med"/>
-                      <a:tailEnd type="none" w="med" len="med"/>
-                    </a:lnL>
-                    <a:lnR w="12700" cap="flat" cmpd="sng" algn="ctr">
-                      <a:solidFill>
-                        <a:schemeClr val="tx1"/>
-                      </a:solidFill>
-                      <a:prstDash val="solid"/>
-                      <a:round/>
-                      <a:headEnd type="none" w="med" len="med"/>
-                      <a:tailEnd type="none" w="med" len="med"/>
-                    </a:lnR>
-                    <a:lnT w="12700" cap="flat" cmpd="sng" algn="ctr">
-                      <a:solidFill>
-                        <a:schemeClr val="tx1"/>
-                      </a:solidFill>
-                      <a:prstDash val="solid"/>
-                      <a:round/>
-                      <a:headEnd type="none" w="med" len="med"/>
-                      <a:tailEnd type="none" w="med" len="med"/>
-                    </a:lnT>
-                    <a:lnB w="12700" cap="flat" cmpd="sng" algn="ctr">
-                      <a:solidFill>
-                        <a:schemeClr val="tx1"/>
-                      </a:solidFill>
-                      <a:prstDash val="solid"/>
-                      <a:round/>
-                      <a:headEnd type="none" w="med" len="med"/>
-                      <a:tailEnd type="none" w="med" len="med"/>
-                    </a:lnB>
-                    <a:solidFill>
-                      <a:schemeClr val="accent5"/>
-                    </a:solidFill>
-                  </a:tcPr>
-                </a:tc>
-                <a:tc>
-                  <a:txBody>
-                    <a:bodyPr/>
-                    <a:lstStyle/>
-                    <a:p>
-                      <a:r>
-                        <a:rPr sz="2200" b="1"/>
-                        <a:t>Techniques used</a:t>
-                      </a:r>
-                    </a:p>
-                  </a:txBody>
-                  <a:tcPr anchor="ctr">
-                    <a:lnL w="12700" cap="flat" cmpd="sng" algn="ctr">
-                      <a:solidFill>
-                        <a:schemeClr val="tx1"/>
-                      </a:solidFill>
-                      <a:prstDash val="solid"/>
-                      <a:round/>
-                      <a:headEnd type="none" w="med" len="med"/>
-                      <a:tailEnd type="none" w="med" len="med"/>
-                    </a:lnL>
-                    <a:lnR w="12700" cap="flat" cmpd="sng" algn="ctr">
-                      <a:solidFill>
-                        <a:schemeClr val="tx1"/>
-                      </a:solidFill>
-                      <a:prstDash val="solid"/>
-                      <a:round/>
-                      <a:headEnd type="none" w="med" len="med"/>
-                      <a:tailEnd type="none" w="med" len="med"/>
-                    </a:lnR>
-                    <a:lnT w="12700" cap="flat" cmpd="sng" algn="ctr">
-                      <a:solidFill>
-                        <a:schemeClr val="tx1"/>
-                      </a:solidFill>
-                      <a:prstDash val="solid"/>
-                      <a:round/>
-                      <a:headEnd type="none" w="med" len="med"/>
-                      <a:tailEnd type="none" w="med" len="med"/>
-                    </a:lnT>
-                    <a:lnB w="12700" cap="flat" cmpd="sng" algn="ctr">
-                      <a:solidFill>
-                        <a:schemeClr val="tx1"/>
-                      </a:solidFill>
-                      <a:prstDash val="solid"/>
-                      <a:round/>
-                      <a:headEnd type="none" w="med" len="med"/>
-                      <a:tailEnd type="none" w="med" len="med"/>
-                    </a:lnB>
-                    <a:solidFill>
-                      <a:schemeClr val="accent5"/>
-                    </a:solidFill>
-                  </a:tcPr>
-                </a:tc>
-                <a:tc>
-                  <a:txBody>
-                    <a:bodyPr/>
-                    <a:lstStyle/>
-                    <a:p>
-                      <a:r>
-                        <a:rPr sz="2200" b="1"/>
-                        <a:t>Findings</a:t>
-                      </a:r>
-                    </a:p>
-                  </a:txBody>
-                  <a:tcPr anchor="ctr">
-                    <a:lnL w="12700" cap="flat" cmpd="sng" algn="ctr">
-                      <a:solidFill>
-                        <a:schemeClr val="tx1"/>
-                      </a:solidFill>
-                      <a:prstDash val="solid"/>
-                      <a:round/>
-                      <a:headEnd type="none" w="med" len="med"/>
-                      <a:tailEnd type="none" w="med" len="med"/>
-                    </a:lnL>
-                    <a:lnR w="12700" cap="flat" cmpd="sng" algn="ctr">
-                      <a:solidFill>
-                        <a:schemeClr val="tx1"/>
-                      </a:solidFill>
-                      <a:prstDash val="solid"/>
-                      <a:round/>
-                      <a:headEnd type="none" w="med" len="med"/>
-                      <a:tailEnd type="none" w="med" len="med"/>
-                    </a:lnR>
-                    <a:lnT w="12700" cap="flat" cmpd="sng" algn="ctr">
-                      <a:solidFill>
-                        <a:schemeClr val="tx1"/>
-                      </a:solidFill>
-                      <a:prstDash val="solid"/>
-                      <a:round/>
-                      <a:headEnd type="none" w="med" len="med"/>
-                      <a:tailEnd type="none" w="med" len="med"/>
-                    </a:lnT>
-                    <a:lnB w="12700" cap="flat" cmpd="sng" algn="ctr">
-                      <a:solidFill>
-                        <a:schemeClr val="tx1"/>
-                      </a:solidFill>
-                      <a:prstDash val="solid"/>
-                      <a:round/>
-                      <a:headEnd type="none" w="med" len="med"/>
-                      <a:tailEnd type="none" w="med" len="med"/>
-                    </a:lnB>
-                    <a:solidFill>
-                      <a:schemeClr val="accent5"/>
-                    </a:solidFill>
-                  </a:tcPr>
-                </a:tc>
-                <a:tc>
-                  <a:txBody>
-                    <a:bodyPr/>
-                    <a:lstStyle/>
-                    <a:p>
-                      <a:r>
-                        <a:rPr sz="2200" b="1"/>
-                        <a:t>Research gap</a:t>
-                      </a:r>
-                    </a:p>
-                  </a:txBody>
-                  <a:tcPr anchor="ctr">
-                    <a:lnL w="12700" cap="flat" cmpd="sng" algn="ctr">
-                      <a:solidFill>
-                        <a:schemeClr val="tx1"/>
-                      </a:solidFill>
-                      <a:prstDash val="solid"/>
-                      <a:round/>
-                      <a:headEnd type="none" w="med" len="med"/>
-                      <a:tailEnd type="none" w="med" len="med"/>
-                    </a:lnL>
-                    <a:lnR w="12700" cap="flat" cmpd="sng" algn="ctr">
-                      <a:solidFill>
-                        <a:schemeClr val="tx1"/>
-                      </a:solidFill>
-                      <a:prstDash val="solid"/>
-                      <a:round/>
-                      <a:headEnd type="none" w="med" len="med"/>
-                      <a:tailEnd type="none" w="med" len="med"/>
-                    </a:lnR>
-                    <a:lnT w="12700" cap="flat" cmpd="sng" algn="ctr">
-                      <a:solidFill>
-                        <a:schemeClr val="tx1"/>
-                      </a:solidFill>
-                      <a:prstDash val="solid"/>
-                      <a:round/>
-                      <a:headEnd type="none" w="med" len="med"/>
-                      <a:tailEnd type="none" w="med" len="med"/>
-                    </a:lnT>
-                    <a:lnB w="12700" cap="flat" cmpd="sng" algn="ctr">
-                      <a:solidFill>
-                        <a:schemeClr val="tx1"/>
-                      </a:solidFill>
-                      <a:prstDash val="solid"/>
-                      <a:round/>
-                      <a:headEnd type="none" w="med" len="med"/>
-                      <a:tailEnd type="none" w="med" len="med"/>
-                    </a:lnB>
-                    <a:solidFill>
-                      <a:schemeClr val="accent5"/>
-                    </a:solidFill>
-                  </a:tcPr>
-                </a:tc>
-                <a:extLst>
-                  <a:ext uri="{0D108BD9-81ED-4DB2-BD59-A6C34878D82A}">
-                    <a16:rowId xmlns:a16="http://schemas.microsoft.com/office/drawing/2014/main" val="10000"/>
-                  </a:ext>
-                </a:extLst>
-              </a:tr>
-              <a:tr h="3615953">
-                <a:tc>
-                  <a:txBody>
-                    <a:bodyPr/>
-                    <a:lstStyle/>
-                    <a:p>
-                      <a:pPr algn="ctr">
-                        <a:defRPr sz="1300">
-                          <a:solidFill>
-                            <a:srgbClr val="0F172A"/>
-                          </a:solidFill>
-                          <a:latin typeface="Open Sans"/>
-                        </a:defRPr>
-                      </a:pPr>
-                      <a:r>
-                        <a:t>3</a:t>
-                      </a:r>
-                    </a:p>
-                  </a:txBody>
-                  <a:tcPr anchor="ctr">
-                    <a:lnL w="12700" cap="flat" cmpd="sng" algn="ctr">
-                      <a:solidFill>
-                        <a:schemeClr val="tx1"/>
-                      </a:solidFill>
-                      <a:prstDash val="solid"/>
-                      <a:round/>
-                      <a:headEnd type="none" w="med" len="med"/>
-                      <a:tailEnd type="none" w="med" len="med"/>
-                    </a:lnL>
-                    <a:lnR w="12700" cap="flat" cmpd="sng" algn="ctr">
-                      <a:solidFill>
-                        <a:schemeClr val="tx1"/>
-                      </a:solidFill>
-                      <a:prstDash val="solid"/>
-                      <a:round/>
-                      <a:headEnd type="none" w="med" len="med"/>
-                      <a:tailEnd type="none" w="med" len="med"/>
-                    </a:lnR>
-                    <a:lnT w="12700" cap="flat" cmpd="sng" algn="ctr">
-                      <a:solidFill>
-                        <a:schemeClr val="tx1"/>
-                      </a:solidFill>
-                      <a:prstDash val="solid"/>
-                      <a:round/>
-                      <a:headEnd type="none" w="med" len="med"/>
-                      <a:tailEnd type="none" w="med" len="med"/>
-                    </a:lnT>
-                    <a:lnB w="12700" cap="flat" cmpd="sng" algn="ctr">
-                      <a:solidFill>
-                        <a:schemeClr val="tx1"/>
-                      </a:solidFill>
-                      <a:prstDash val="solid"/>
-                      <a:round/>
-                      <a:headEnd type="none" w="med" len="med"/>
-                      <a:tailEnd type="none" w="med" len="med"/>
-                    </a:lnB>
-                  </a:tcPr>
-                </a:tc>
-                <a:tc>
-                  <a:txBody>
-                    <a:bodyPr/>
-                    <a:lstStyle/>
-                    <a:p>
-                      <a:pPr>
-                        <a:defRPr sz="1300">
-                          <a:solidFill>
-                            <a:srgbClr val="0F172A"/>
-                          </a:solidFill>
-                          <a:latin typeface="Open Sans"/>
-                        </a:defRPr>
-                      </a:pPr>
-                      <a:r>
-                        <a:t>K. A. Robbins &amp; S. Robbins (2020)</a:t>
-                      </a:r>
-                    </a:p>
-                  </a:txBody>
-                  <a:tcPr anchor="ctr">
-                    <a:lnL w="12700" cap="flat" cmpd="sng" algn="ctr">
-                      <a:solidFill>
-                        <a:schemeClr val="tx1"/>
-                      </a:solidFill>
-                      <a:prstDash val="solid"/>
-                      <a:round/>
-                      <a:headEnd type="none" w="med" len="med"/>
-                      <a:tailEnd type="none" w="med" len="med"/>
-                    </a:lnL>
-                    <a:lnR w="12700" cap="flat" cmpd="sng" algn="ctr">
-                      <a:solidFill>
-                        <a:schemeClr val="tx1"/>
-                      </a:solidFill>
-                      <a:prstDash val="solid"/>
-                      <a:round/>
-                      <a:headEnd type="none" w="med" len="med"/>
-                      <a:tailEnd type="none" w="med" len="med"/>
-                    </a:lnR>
-                    <a:lnT w="12700" cap="flat" cmpd="sng" algn="ctr">
-                      <a:solidFill>
-                        <a:schemeClr val="tx1"/>
-                      </a:solidFill>
-                      <a:prstDash val="solid"/>
-                      <a:round/>
-                      <a:headEnd type="none" w="med" len="med"/>
-                      <a:tailEnd type="none" w="med" len="med"/>
-                    </a:lnT>
-                    <a:lnB w="12700" cap="flat" cmpd="sng" algn="ctr">
-                      <a:solidFill>
-                        <a:schemeClr val="tx1"/>
-                      </a:solidFill>
-                      <a:prstDash val="solid"/>
-                      <a:round/>
-                      <a:headEnd type="none" w="med" len="med"/>
-                      <a:tailEnd type="none" w="med" len="med"/>
-                    </a:lnB>
-                  </a:tcPr>
-                </a:tc>
-                <a:tc>
-                  <a:txBody>
-                    <a:bodyPr/>
-                    <a:lstStyle/>
-                    <a:p>
-                      <a:pPr>
-                        <a:defRPr sz="1300">
-                          <a:solidFill>
-                            <a:srgbClr val="0F172A"/>
-                          </a:solidFill>
-                          <a:latin typeface="Open Sans"/>
-                        </a:defRPr>
-                      </a:pPr>
-                      <a:r>
-                        <a:t>Practical UNIX and Systems Programming Visualization in CS Curricula</a:t>
-                      </a:r>
-                    </a:p>
-                  </a:txBody>
-                  <a:tcPr anchor="ctr">
-                    <a:lnL w="12700" cap="flat" cmpd="sng" algn="ctr">
-                      <a:solidFill>
-                        <a:schemeClr val="tx1"/>
-                      </a:solidFill>
-                      <a:prstDash val="solid"/>
-                      <a:round/>
-                      <a:headEnd type="none" w="med" len="med"/>
-                      <a:tailEnd type="none" w="med" len="med"/>
-                    </a:lnL>
-                    <a:lnR w="12700" cap="flat" cmpd="sng" algn="ctr">
-                      <a:solidFill>
-                        <a:schemeClr val="tx1"/>
-                      </a:solidFill>
-                      <a:prstDash val="solid"/>
-                      <a:round/>
-                      <a:headEnd type="none" w="med" len="med"/>
-                      <a:tailEnd type="none" w="med" len="med"/>
-                    </a:lnR>
-                    <a:lnT w="12700" cap="flat" cmpd="sng" algn="ctr">
-                      <a:solidFill>
-                        <a:schemeClr val="tx1"/>
-                      </a:solidFill>
-                      <a:prstDash val="solid"/>
-                      <a:round/>
-                      <a:headEnd type="none" w="med" len="med"/>
-                      <a:tailEnd type="none" w="med" len="med"/>
-                    </a:lnT>
-                    <a:lnB w="12700" cap="flat" cmpd="sng" algn="ctr">
-                      <a:solidFill>
-                        <a:schemeClr val="tx1"/>
-                      </a:solidFill>
-                      <a:prstDash val="solid"/>
-                      <a:round/>
-                      <a:headEnd type="none" w="med" len="med"/>
-                      <a:tailEnd type="none" w="med" len="med"/>
-                    </a:lnB>
-                  </a:tcPr>
-                </a:tc>
-                <a:tc>
-                  <a:txBody>
-                    <a:bodyPr/>
-                    <a:lstStyle/>
-                    <a:p>
-                      <a:pPr>
-                        <a:defRPr sz="1300">
-                          <a:solidFill>
-                            <a:srgbClr val="0F172A"/>
-                          </a:solidFill>
-                          <a:latin typeface="Open Sans"/>
-                        </a:defRPr>
-                      </a:pPr>
-                      <a:r>
-                        <a:t>ACM SIGCSE</a:t>
-                      </a:r>
-                    </a:p>
-                  </a:txBody>
-                  <a:tcPr anchor="ctr">
-                    <a:lnL w="12700" cap="flat" cmpd="sng" algn="ctr">
-                      <a:solidFill>
-                        <a:schemeClr val="tx1"/>
-                      </a:solidFill>
-                      <a:prstDash val="solid"/>
-                      <a:round/>
-                      <a:headEnd type="none" w="med" len="med"/>
-                      <a:tailEnd type="none" w="med" len="med"/>
-                    </a:lnL>
-                    <a:lnR w="12700" cap="flat" cmpd="sng" algn="ctr">
-                      <a:solidFill>
-                        <a:schemeClr val="tx1"/>
-                      </a:solidFill>
-                      <a:prstDash val="solid"/>
-                      <a:round/>
-                      <a:headEnd type="none" w="med" len="med"/>
-                      <a:tailEnd type="none" w="med" len="med"/>
-                    </a:lnR>
-                    <a:lnT w="12700" cap="flat" cmpd="sng" algn="ctr">
-                      <a:solidFill>
-                        <a:schemeClr val="tx1"/>
-                      </a:solidFill>
-                      <a:prstDash val="solid"/>
-                      <a:round/>
-                      <a:headEnd type="none" w="med" len="med"/>
-                      <a:tailEnd type="none" w="med" len="med"/>
-                    </a:lnT>
-                    <a:lnB w="12700" cap="flat" cmpd="sng" algn="ctr">
-                      <a:solidFill>
-                        <a:schemeClr val="tx1"/>
-                      </a:solidFill>
-                      <a:prstDash val="solid"/>
-                      <a:round/>
-                      <a:headEnd type="none" w="med" len="med"/>
-                      <a:tailEnd type="none" w="med" len="med"/>
-                    </a:lnB>
-                  </a:tcPr>
-                </a:tc>
-                <a:tc>
-                  <a:txBody>
-                    <a:bodyPr/>
-                    <a:lstStyle/>
-                    <a:p>
-                      <a:pPr>
-                        <a:defRPr sz="1300">
-                          <a:solidFill>
-                            <a:srgbClr val="0F172A"/>
-                          </a:solidFill>
-                          <a:latin typeface="Open Sans"/>
-                        </a:defRPr>
-                      </a:pPr>
-                      <a:r>
-                        <a:t>Real POSIX process tracing, pipe IPC demonstrations, and thread synchronization.</a:t>
-                      </a:r>
-                    </a:p>
-                  </a:txBody>
-                  <a:tcPr anchor="ctr">
-                    <a:lnL w="12700" cap="flat" cmpd="sng" algn="ctr">
-                      <a:solidFill>
-                        <a:schemeClr val="tx1"/>
-                      </a:solidFill>
-                      <a:prstDash val="solid"/>
-                      <a:round/>
-                      <a:headEnd type="none" w="med" len="med"/>
-                      <a:tailEnd type="none" w="med" len="med"/>
-                    </a:lnL>
-                    <a:lnR w="12700" cap="flat" cmpd="sng" algn="ctr">
-                      <a:solidFill>
-                        <a:schemeClr val="tx1"/>
-                      </a:solidFill>
-                      <a:prstDash val="solid"/>
-                      <a:round/>
-                      <a:headEnd type="none" w="med" len="med"/>
-                      <a:tailEnd type="none" w="med" len="med"/>
-                    </a:lnR>
-                    <a:lnT w="12700" cap="flat" cmpd="sng" algn="ctr">
-                      <a:solidFill>
-                        <a:schemeClr val="tx1"/>
-                      </a:solidFill>
-                      <a:prstDash val="solid"/>
-                      <a:round/>
-                      <a:headEnd type="none" w="med" len="med"/>
-                      <a:tailEnd type="none" w="med" len="med"/>
-                    </a:lnT>
-                    <a:lnB w="12700" cap="flat" cmpd="sng" algn="ctr">
-                      <a:solidFill>
-                        <a:schemeClr val="tx1"/>
-                      </a:solidFill>
-                      <a:prstDash val="solid"/>
-                      <a:round/>
-                      <a:headEnd type="none" w="med" len="med"/>
-                      <a:tailEnd type="none" w="med" len="med"/>
-                    </a:lnB>
-                  </a:tcPr>
-                </a:tc>
-                <a:tc>
-                  <a:txBody>
-                    <a:bodyPr/>
-                    <a:lstStyle/>
-                    <a:p>
-                      <a:pPr>
-                        <a:defRPr sz="1300">
-                          <a:solidFill>
-                            <a:srgbClr val="0F172A"/>
-                          </a:solidFill>
-                          <a:latin typeface="Open Sans"/>
-                        </a:defRPr>
-                      </a:pPr>
-                      <a:r>
-                        <a:t>Proves hands-on systems programming reinforces understanding of race conditions and deadlocks.</a:t>
-                      </a:r>
-                    </a:p>
-                  </a:txBody>
-                  <a:tcPr anchor="ctr">
-                    <a:lnL w="12700" cap="flat" cmpd="sng" algn="ctr">
-                      <a:solidFill>
-                        <a:schemeClr val="tx1"/>
-                      </a:solidFill>
-                      <a:prstDash val="solid"/>
-                      <a:round/>
-                      <a:headEnd type="none" w="med" len="med"/>
-                      <a:tailEnd type="none" w="med" len="med"/>
-                    </a:lnL>
-                    <a:lnR w="12700" cap="flat" cmpd="sng" algn="ctr">
-                      <a:solidFill>
-                        <a:schemeClr val="tx1"/>
-                      </a:solidFill>
-                      <a:prstDash val="solid"/>
-                      <a:round/>
-                      <a:headEnd type="none" w="med" len="med"/>
-                      <a:tailEnd type="none" w="med" len="med"/>
-                    </a:lnR>
-                    <a:lnT w="12700" cap="flat" cmpd="sng" algn="ctr">
-                      <a:solidFill>
-                        <a:schemeClr val="tx1"/>
-                      </a:solidFill>
-                      <a:prstDash val="solid"/>
-                      <a:round/>
-                      <a:headEnd type="none" w="med" len="med"/>
-                      <a:tailEnd type="none" w="med" len="med"/>
-                    </a:lnT>
-                    <a:lnB w="12700" cap="flat" cmpd="sng" algn="ctr">
-                      <a:solidFill>
-                        <a:schemeClr val="tx1"/>
-                      </a:solidFill>
-                      <a:prstDash val="solid"/>
-                      <a:round/>
-                      <a:headEnd type="none" w="med" len="med"/>
-                      <a:tailEnd type="none" w="med" len="med"/>
-                    </a:lnB>
-                  </a:tcPr>
-                </a:tc>
-                <a:tc>
-                  <a:txBody>
-                    <a:bodyPr/>
-                    <a:lstStyle/>
-                    <a:p>
-                      <a:pPr>
-                        <a:defRPr sz="1300">
-                          <a:solidFill>
-                            <a:srgbClr val="0F172A"/>
-                          </a:solidFill>
-                          <a:latin typeface="Open Sans"/>
-                        </a:defRPr>
-                      </a:pPr>
-                      <a:r>
-                        <a:t>Confined to plain-text terminal logs; lacks high-precision graphical visualization and dynamic GUI parameter configuration.</a:t>
-                      </a:r>
-                    </a:p>
-                  </a:txBody>
-                  <a:tcPr anchor="ctr">
-                    <a:lnL w="12700" cap="flat" cmpd="sng" algn="ctr">
-                      <a:solidFill>
-                        <a:schemeClr val="tx1"/>
-                      </a:solidFill>
-                      <a:prstDash val="solid"/>
-                      <a:round/>
-                      <a:headEnd type="none" w="med" len="med"/>
-                      <a:tailEnd type="none" w="med" len="med"/>
-                    </a:lnL>
-                    <a:lnR w="12700" cap="flat" cmpd="sng" algn="ctr">
-                      <a:solidFill>
-                        <a:schemeClr val="tx1"/>
-                      </a:solidFill>
-                      <a:prstDash val="solid"/>
-                      <a:round/>
-                      <a:headEnd type="none" w="med" len="med"/>
-                      <a:tailEnd type="none" w="med" len="med"/>
-                    </a:lnR>
-                    <a:lnT w="12700" cap="flat" cmpd="sng" algn="ctr">
-                      <a:solidFill>
-                        <a:schemeClr val="tx1"/>
-                      </a:solidFill>
-                      <a:prstDash val="solid"/>
-                      <a:round/>
-                      <a:headEnd type="none" w="med" len="med"/>
-                      <a:tailEnd type="none" w="med" len="med"/>
-                    </a:lnT>
-                    <a:lnB w="12700" cap="flat" cmpd="sng" algn="ctr">
-                      <a:solidFill>
-                        <a:schemeClr val="tx1"/>
-                      </a:solidFill>
-                      <a:prstDash val="solid"/>
-                      <a:round/>
-                      <a:headEnd type="none" w="med" len="med"/>
-                      <a:tailEnd type="none" w="med" len="med"/>
-                    </a:lnB>
-                  </a:tcPr>
-                </a:tc>
-                <a:extLst>
-                  <a:ext uri="{0D108BD9-81ED-4DB2-BD59-A6C34878D82A}">
-                    <a16:rowId xmlns:a16="http://schemas.microsoft.com/office/drawing/2014/main" val="10001"/>
-                  </a:ext>
-                </a:extLst>
-              </a:tr>
-              <a:tr h="3570753">
-                <a:tc>
-                  <a:txBody>
-                    <a:bodyPr/>
-                    <a:lstStyle/>
-                    <a:p>
-                      <a:pPr algn="ctr">
-                        <a:defRPr sz="1300">
-                          <a:solidFill>
-                            <a:srgbClr val="0F172A"/>
-                          </a:solidFill>
-                          <a:latin typeface="Open Sans"/>
-                        </a:defRPr>
-                      </a:pPr>
-                      <a:r>
-                        <a:t>4</a:t>
-                      </a:r>
-                    </a:p>
-                  </a:txBody>
-                  <a:tcPr anchor="ctr">
-                    <a:lnR w="12700" cap="flat" cmpd="sng" algn="ctr">
-                      <a:solidFill>
-                        <a:schemeClr val="tx1"/>
-                      </a:solidFill>
-                      <a:prstDash val="solid"/>
-                      <a:round/>
-                      <a:headEnd type="none" w="med" len="med"/>
-                      <a:tailEnd type="none" w="med" len="med"/>
-                    </a:lnR>
-                    <a:lnT w="12700" cap="flat" cmpd="sng" algn="ctr">
-                      <a:solidFill>
-                        <a:schemeClr val="tx1"/>
-                      </a:solidFill>
-                      <a:prstDash val="solid"/>
-                      <a:round/>
-                      <a:headEnd type="none" w="med" len="med"/>
-                      <a:tailEnd type="none" w="med" len="med"/>
-                    </a:lnT>
-                  </a:tcPr>
-                </a:tc>
-                <a:tc>
-                  <a:txBody>
-                    <a:bodyPr/>
-                    <a:lstStyle/>
-                    <a:p>
-                      <a:pPr>
-                        <a:defRPr sz="1300">
-                          <a:solidFill>
-                            <a:srgbClr val="0F172A"/>
-                          </a:solidFill>
-                          <a:latin typeface="Open Sans"/>
-                        </a:defRPr>
-                      </a:pPr>
-                      <a:r>
-                        <a:t>M. Anderson &amp; R. Taylor (2023)</a:t>
-                      </a:r>
-                    </a:p>
-                  </a:txBody>
-                  <a:tcPr anchor="ctr">
-                    <a:lnL w="12700" cap="flat" cmpd="sng" algn="ctr">
-                      <a:solidFill>
-                        <a:schemeClr val="tx1"/>
-                      </a:solidFill>
-                      <a:prstDash val="solid"/>
-                      <a:round/>
-                      <a:headEnd type="none" w="med" len="med"/>
-                      <a:tailEnd type="none" w="med" len="med"/>
-                    </a:lnL>
-                    <a:lnR w="12700" cap="flat" cmpd="sng" algn="ctr">
-                      <a:solidFill>
-                        <a:schemeClr val="tx1"/>
-                      </a:solidFill>
-                      <a:prstDash val="solid"/>
-                      <a:round/>
-                      <a:headEnd type="none" w="med" len="med"/>
-                      <a:tailEnd type="none" w="med" len="med"/>
-                    </a:lnR>
-                    <a:lnT w="12700" cap="flat" cmpd="sng" algn="ctr">
-                      <a:solidFill>
-                        <a:schemeClr val="tx1"/>
-                      </a:solidFill>
-                      <a:prstDash val="solid"/>
-                      <a:round/>
-                      <a:headEnd type="none" w="med" len="med"/>
-                      <a:tailEnd type="none" w="med" len="med"/>
-                    </a:lnT>
-                    <a:lnB w="12700" cap="flat" cmpd="sng" algn="ctr">
-                      <a:solidFill>
-                        <a:schemeClr val="tx1"/>
-                      </a:solidFill>
-                      <a:prstDash val="solid"/>
-                      <a:round/>
-                      <a:headEnd type="none" w="med" len="med"/>
-                      <a:tailEnd type="none" w="med" len="med"/>
-                    </a:lnB>
-                  </a:tcPr>
-                </a:tc>
-                <a:tc>
-                  <a:txBody>
-                    <a:bodyPr/>
-                    <a:lstStyle/>
-                    <a:p>
-                      <a:pPr>
-                        <a:defRPr sz="1300">
-                          <a:solidFill>
-                            <a:srgbClr val="0F172A"/>
-                          </a:solidFill>
-                          <a:latin typeface="Open Sans"/>
-                        </a:defRPr>
-                      </a:pPr>
-                      <a:r>
-                        <a:t>Evaluating Web-Based OS Simulation Platforms for Active Learning</a:t>
-                      </a:r>
-                    </a:p>
-                  </a:txBody>
-                  <a:tcPr anchor="ctr">
-                    <a:lnL w="12700" cap="flat" cmpd="sng" algn="ctr">
-                      <a:solidFill>
-                        <a:schemeClr val="tx1"/>
-                      </a:solidFill>
-                      <a:prstDash val="solid"/>
-                      <a:round/>
-                      <a:headEnd type="none" w="med" len="med"/>
-                      <a:tailEnd type="none" w="med" len="med"/>
-                    </a:lnL>
-                    <a:lnR w="12700" cap="flat" cmpd="sng" algn="ctr">
-                      <a:solidFill>
-                        <a:schemeClr val="tx1"/>
-                      </a:solidFill>
-                      <a:prstDash val="solid"/>
-                      <a:round/>
-                      <a:headEnd type="none" w="med" len="med"/>
-                      <a:tailEnd type="none" w="med" len="med"/>
-                    </a:lnR>
-                    <a:lnT w="12700" cap="flat" cmpd="sng" algn="ctr">
-                      <a:solidFill>
-                        <a:schemeClr val="tx1"/>
-                      </a:solidFill>
-                      <a:prstDash val="solid"/>
-                      <a:round/>
-                      <a:headEnd type="none" w="med" len="med"/>
-                      <a:tailEnd type="none" w="med" len="med"/>
-                    </a:lnT>
-                    <a:lnB w="12700" cap="flat" cmpd="sng" algn="ctr">
-                      <a:solidFill>
-                        <a:schemeClr val="tx1"/>
-                      </a:solidFill>
-                      <a:prstDash val="solid"/>
-                      <a:round/>
-                      <a:headEnd type="none" w="med" len="med"/>
-                      <a:tailEnd type="none" w="med" len="med"/>
-                    </a:lnB>
-                  </a:tcPr>
-                </a:tc>
-                <a:tc>
-                  <a:txBody>
-                    <a:bodyPr/>
-                    <a:lstStyle/>
-                    <a:p>
-                      <a:pPr>
-                        <a:defRPr sz="1300">
-                          <a:solidFill>
-                            <a:srgbClr val="0F172A"/>
-                          </a:solidFill>
-                          <a:latin typeface="Open Sans"/>
-                        </a:defRPr>
-                      </a:pPr>
-                      <a:r>
-                        <a:t>IEEE Frontiers in Education</a:t>
-                      </a:r>
-                    </a:p>
-                  </a:txBody>
-                  <a:tcPr anchor="ctr">
-                    <a:lnL w="12700" cap="flat" cmpd="sng" algn="ctr">
-                      <a:solidFill>
-                        <a:schemeClr val="tx1"/>
-                      </a:solidFill>
-                      <a:prstDash val="solid"/>
-                      <a:round/>
-                      <a:headEnd type="none" w="med" len="med"/>
-                      <a:tailEnd type="none" w="med" len="med"/>
-                    </a:lnL>
-                    <a:lnR w="12700" cap="flat" cmpd="sng" algn="ctr">
-                      <a:solidFill>
-                        <a:schemeClr val="tx1"/>
-                      </a:solidFill>
-                      <a:prstDash val="solid"/>
-                      <a:round/>
-                      <a:headEnd type="none" w="med" len="med"/>
-                      <a:tailEnd type="none" w="med" len="med"/>
-                    </a:lnR>
-                    <a:lnT w="12700" cap="flat" cmpd="sng" algn="ctr">
-                      <a:solidFill>
-                        <a:schemeClr val="tx1"/>
-                      </a:solidFill>
-                      <a:prstDash val="solid"/>
-                      <a:round/>
-                      <a:headEnd type="none" w="med" len="med"/>
-                      <a:tailEnd type="none" w="med" len="med"/>
-                    </a:lnT>
-                    <a:lnB w="12700" cap="flat" cmpd="sng" algn="ctr">
-                      <a:solidFill>
-                        <a:schemeClr val="tx1"/>
-                      </a:solidFill>
-                      <a:prstDash val="solid"/>
-                      <a:round/>
-                      <a:headEnd type="none" w="med" len="med"/>
-                      <a:tailEnd type="none" w="med" len="med"/>
-                    </a:lnB>
-                  </a:tcPr>
-                </a:tc>
-                <a:tc>
-                  <a:txBody>
-                    <a:bodyPr/>
-                    <a:lstStyle/>
-                    <a:p>
-                      <a:pPr>
-                        <a:defRPr sz="1300">
-                          <a:solidFill>
-                            <a:srgbClr val="0F172A"/>
-                          </a:solidFill>
-                          <a:latin typeface="Open Sans"/>
-                        </a:defRPr>
-                      </a:pPr>
-                      <a:r>
-                        <a:t>Browser-based execution of FIFO, LRU, and Banker's algorithm.</a:t>
-                      </a:r>
-                    </a:p>
-                  </a:txBody>
-                  <a:tcPr anchor="ctr">
-                    <a:lnL w="12700" cap="flat" cmpd="sng" algn="ctr">
-                      <a:solidFill>
-                        <a:schemeClr val="tx1"/>
-                      </a:solidFill>
-                      <a:prstDash val="solid"/>
-                      <a:round/>
-                      <a:headEnd type="none" w="med" len="med"/>
-                      <a:tailEnd type="none" w="med" len="med"/>
-                    </a:lnL>
-                    <a:lnR w="12700" cap="flat" cmpd="sng" algn="ctr">
-                      <a:solidFill>
-                        <a:schemeClr val="tx1"/>
-                      </a:solidFill>
-                      <a:prstDash val="solid"/>
-                      <a:round/>
-                      <a:headEnd type="none" w="med" len="med"/>
-                      <a:tailEnd type="none" w="med" len="med"/>
-                    </a:lnR>
-                    <a:lnT w="12700" cap="flat" cmpd="sng" algn="ctr">
-                      <a:solidFill>
-                        <a:schemeClr val="tx1"/>
-                      </a:solidFill>
-                      <a:prstDash val="solid"/>
-                      <a:round/>
-                      <a:headEnd type="none" w="med" len="med"/>
-                      <a:tailEnd type="none" w="med" len="med"/>
-                    </a:lnT>
-                    <a:lnB w="12700" cap="flat" cmpd="sng" algn="ctr">
-                      <a:solidFill>
-                        <a:schemeClr val="tx1"/>
-                      </a:solidFill>
-                      <a:prstDash val="solid"/>
-                      <a:round/>
-                      <a:headEnd type="none" w="med" len="med"/>
-                      <a:tailEnd type="none" w="med" len="med"/>
-                    </a:lnB>
-                  </a:tcPr>
-                </a:tc>
-                <a:tc>
-                  <a:txBody>
-                    <a:bodyPr/>
-                    <a:lstStyle/>
-                    <a:p>
-                      <a:pPr>
-                        <a:defRPr sz="1300">
-                          <a:solidFill>
-                            <a:srgbClr val="0F172A"/>
-                          </a:solidFill>
-                          <a:latin typeface="Open Sans"/>
-                        </a:defRPr>
-                      </a:pPr>
-                      <a:r>
-                        <a:t>Zero-install browser accessibility dramatically increases student lab engagement.</a:t>
-                      </a:r>
-                    </a:p>
-                  </a:txBody>
-                  <a:tcPr anchor="ctr">
-                    <a:lnL w="12700" cap="flat" cmpd="sng" algn="ctr">
-                      <a:solidFill>
-                        <a:schemeClr val="tx1"/>
-                      </a:solidFill>
-                      <a:prstDash val="solid"/>
-                      <a:round/>
-                      <a:headEnd type="none" w="med" len="med"/>
-                      <a:tailEnd type="none" w="med" len="med"/>
-                    </a:lnL>
-                    <a:lnR w="12700" cap="flat" cmpd="sng" algn="ctr">
-                      <a:solidFill>
-                        <a:schemeClr val="tx1"/>
-                      </a:solidFill>
-                      <a:prstDash val="solid"/>
-                      <a:round/>
-                      <a:headEnd type="none" w="med" len="med"/>
-                      <a:tailEnd type="none" w="med" len="med"/>
-                    </a:lnR>
-                    <a:lnT w="12700" cap="flat" cmpd="sng" algn="ctr">
-                      <a:solidFill>
-                        <a:schemeClr val="tx1"/>
-                      </a:solidFill>
-                      <a:prstDash val="solid"/>
-                      <a:round/>
-                      <a:headEnd type="none" w="med" len="med"/>
-                      <a:tailEnd type="none" w="med" len="med"/>
-                    </a:lnT>
-                    <a:lnB w="12700" cap="flat" cmpd="sng" algn="ctr">
-                      <a:solidFill>
-                        <a:schemeClr val="tx1"/>
-                      </a:solidFill>
-                      <a:prstDash val="solid"/>
-                      <a:round/>
-                      <a:headEnd type="none" w="med" len="med"/>
-                      <a:tailEnd type="none" w="med" len="med"/>
-                    </a:lnB>
-                  </a:tcPr>
-                </a:tc>
-                <a:tc>
-                  <a:txBody>
-                    <a:bodyPr/>
-                    <a:lstStyle/>
-                    <a:p>
-                      <a:pPr>
-                        <a:defRPr sz="1300">
-                          <a:solidFill>
-                            <a:srgbClr val="0F172A"/>
-                          </a:solidFill>
-                          <a:latin typeface="Open Sans"/>
-                        </a:defRPr>
-                      </a:pPr>
-                      <a:r>
-                        <a:t>Implemented as toy JavaScript prototypes lacking authoritative C++ simulation rigor, disk scheduling, and true kernel integration.</a:t>
-                      </a:r>
-                    </a:p>
-                  </a:txBody>
-                  <a:tcPr anchor="ctr">
-                    <a:lnL w="12700" cap="flat" cmpd="sng" algn="ctr">
-                      <a:solidFill>
-                        <a:schemeClr val="tx1"/>
-                      </a:solidFill>
-                      <a:prstDash val="solid"/>
-                      <a:round/>
-                      <a:headEnd type="none" w="med" len="med"/>
-                      <a:tailEnd type="none" w="med" len="med"/>
-                    </a:lnL>
-                    <a:lnR w="12700" cap="flat" cmpd="sng" algn="ctr">
-                      <a:solidFill>
-                        <a:schemeClr val="tx1"/>
-                      </a:solidFill>
-                      <a:prstDash val="solid"/>
-                      <a:round/>
-                      <a:headEnd type="none" w="med" len="med"/>
-                      <a:tailEnd type="none" w="med" len="med"/>
-                    </a:lnR>
-                    <a:lnT w="12700" cap="flat" cmpd="sng" algn="ctr">
-                      <a:solidFill>
-                        <a:schemeClr val="tx1"/>
-                      </a:solidFill>
-                      <a:prstDash val="solid"/>
-                      <a:round/>
-                      <a:headEnd type="none" w="med" len="med"/>
-                      <a:tailEnd type="none" w="med" len="med"/>
-                    </a:lnT>
-                    <a:lnB w="12700" cap="flat" cmpd="sng" algn="ctr">
-                      <a:solidFill>
-                        <a:schemeClr val="tx1"/>
-                      </a:solidFill>
-                      <a:prstDash val="solid"/>
-                      <a:round/>
-                      <a:headEnd type="none" w="med" len="med"/>
-                      <a:tailEnd type="none" w="med" len="med"/>
-                    </a:lnB>
-                  </a:tcPr>
-                </a:tc>
-                <a:extLst>
-                  <a:ext uri="{0D108BD9-81ED-4DB2-BD59-A6C34878D82A}">
-                    <a16:rowId xmlns:a16="http://schemas.microsoft.com/office/drawing/2014/main" val="10003"/>
-                  </a:ext>
-                </a:extLst>
-              </a:tr>
-            </a:tbl>
-          </a:graphicData>
-        </a:graphic>
-      </p:graphicFrame>
-      <p:sp>
-        <p:nvSpPr>
-          <p:cNvPr id="24" name="AutoShape 16"/>
-          <p:cNvSpPr/>
-          <p:nvPr/>
-        </p:nvSpPr>
-        <p:spPr>
-          <a:xfrm>
-            <a:off x="819362" y="571500"/>
-            <a:ext cx="903745" cy="0"/>
-          </a:xfrm>
-          <a:prstGeom prst="line">
-            <a:avLst/>
-          </a:prstGeom>
-          <a:ln w="238125" cap="flat">
-            <a:solidFill>
-              <a:schemeClr val="accent5"/>
-            </a:solidFill>
-            <a:prstDash val="solid"/>
-            <a:headEnd type="none" w="sm" len="sm"/>
-            <a:tailEnd type="none" w="sm" len="sm"/>
-          </a:ln>
-        </p:spPr>
-        <p:txBody>
-          <a:bodyPr/>
-          <a:lstStyle/>
-          <a:p>
-            <a:endParaRPr lang="en-IN"/>
-          </a:p>
-        </p:txBody>
-      </p:sp>
-      <p:pic>
-        <p:nvPicPr>
-          <p:cNvPr id="4" name="Picture 3">
-            <a:extLst>
-              <a:ext uri="{FF2B5EF4-FFF2-40B4-BE49-F238E27FC236}">
-                <a16:creationId xmlns:a16="http://schemas.microsoft.com/office/drawing/2014/main" id="{48700B33-1572-DA01-EDF0-5523A514AB53}"/>
-              </a:ext>
-            </a:extLst>
-          </p:cNvPr>
-          <p:cNvPicPr>
-            <a:picLocks noChangeAspect="1"/>
-          </p:cNvPicPr>
-          <p:nvPr/>
-        </p:nvPicPr>
-        <p:blipFill>
-          <a:blip r:embed="rId2"/>
-          <a:stretch>
-            <a:fillRect/>
-          </a:stretch>
-        </p:blipFill>
-        <p:spPr>
-          <a:xfrm>
-            <a:off x="14966220" y="-325763"/>
-            <a:ext cx="2475191" cy="2097206"/>
-          </a:xfrm>
-          <a:prstGeom prst="rect">
-            <a:avLst/>
-          </a:prstGeom>
-        </p:spPr>
-      </p:pic>
-    </p:spTree>
-  </p:cSld>
-  <p:clrMapOvr>
-    <a:masterClrMapping/>
-  </p:clrMapOvr>
-</p:sld>
-</file>
-
-<file path=ppt/slides/slide7.xml><?xml version="1.0" encoding="utf-8"?>
+<file path=ppt/slides/slide8.xml><?xml version="1.0" encoding="utf-8"?>
 <p:sld xmlns:a="http://schemas.openxmlformats.org/drawingml/2006/main" xmlns:r="http://schemas.openxmlformats.org/officeDocument/2006/relationships" xmlns:p="http://schemas.openxmlformats.org/presentationml/2006/main">
   <p:cSld>
     <p:spTree>
@@ -11193,7 +8163,7 @@
               <a:rPr sz="6000">
                 <a:latin typeface="Open Sans Extra Bold"/>
               </a:rPr>
-              <a:t>Research Gap</a:t>
+              <a:t>References</a:t>
             </a:r>
           </a:p>
         </p:txBody>
@@ -11261,8 +8231,8 @@
         </p:nvSpPr>
         <p:spPr>
           <a:xfrm>
-            <a:off x="1828800" y="2377440"/>
-            <a:ext cx="14630400" cy="6858000"/>
+            <a:off x="1828800" y="2286000"/>
+            <a:ext cx="14630400" cy="7132320"/>
           </a:xfrm>
           <a:prstGeom prst="rect">
             <a:avLst/>
@@ -11283,22 +8253,13 @@
               </a:spcAft>
             </a:pPr>
             <a:r>
-              <a:rPr b="1" sz="2000">
+              <a:rPr sz="1800" b="0">
                 <a:solidFill>
                   <a:srgbClr val="0F172A"/>
                 </a:solidFill>
                 <a:latin typeface="Open Sans"/>
               </a:rPr>
-              <a:t>Single-Module Isolation:</a:t>
-            </a:r>
-            <a:r>
-              <a:rPr b="0" sz="2000">
-                <a:solidFill>
-                  <a:srgbClr val="334155"/>
-                </a:solidFill>
-                <a:latin typeface="Open Sans"/>
-              </a:rPr>
-              <a:t> Existing tools simulate only one topic (e.g., CPU scheduler only or memory only); no unified suite connects the 10 fundamental OS domains.</a:t>
+              <a:t>Silberschatz, A., Galvin, P. B., &amp; Gagne, G. (2021). Operating System Concepts (10th ed.). John Wiley &amp; Sons.</a:t>
             </a:r>
           </a:p>
           <a:p>
@@ -11311,22 +8272,13 @@
               </a:spcAft>
             </a:pPr>
             <a:r>
-              <a:rPr b="1" sz="2000">
+              <a:rPr sz="1800" b="0">
                 <a:solidFill>
                   <a:srgbClr val="0F172A"/>
                 </a:solidFill>
                 <a:latin typeface="Open Sans"/>
               </a:rPr>
-              <a:t>Toy Engines vs. Kernel Realism:</a:t>
-            </a:r>
-            <a:r>
-              <a:rPr b="0" sz="2000">
-                <a:solidFill>
-                  <a:srgbClr val="334155"/>
-                </a:solidFill>
-                <a:latin typeface="Open Sans"/>
-              </a:rPr>
-              <a:t> Web-based tools rely on oversimplified mock JavaScript data rather than authoritative, mathematically verified C++ simulation engines.</a:t>
+              <a:t>Tanenbaum, A. S., &amp; Bos, H. (2023). Modern Operating Systems (5th ed.). Pearson Education.</a:t>
             </a:r>
           </a:p>
           <a:p>
@@ -11339,22 +8291,13 @@
               </a:spcAft>
             </a:pPr>
             <a:r>
-              <a:rPr b="1" sz="2000">
+              <a:rPr sz="1800" b="0">
                 <a:solidFill>
                   <a:srgbClr val="0F172A"/>
                 </a:solidFill>
                 <a:latin typeface="Open Sans"/>
               </a:rPr>
-              <a:t>Missing Bridge to Real Linux/POSIX:</a:t>
-            </a:r>
-            <a:r>
-              <a:rPr b="0" sz="2000">
-                <a:solidFill>
-                  <a:srgbClr val="334155"/>
-                </a:solidFill>
-                <a:latin typeface="Open Sans"/>
-              </a:rPr>
-              <a:t> Traditional simulators never touch real operating system APIs like pipe(), sem_wait(), fork/execve, or live /proc kernel telemetry.</a:t>
+              <a:t>Al-Kharabsheh, K. et al. (2022). "Evaluating Interactive Visual Simulators for Operating Systems Education." IEEE Transactions on Learning Technologies, 15(3), 340-352.</a:t>
             </a:r>
           </a:p>
           <a:p>
@@ -11367,22 +8310,32 @@
               </a:spcAft>
             </a:pPr>
             <a:r>
-              <a:rPr b="1" sz="2000">
+              <a:rPr sz="1800" b="0">
                 <a:solidFill>
                   <a:srgbClr val="0F172A"/>
                 </a:solidFill>
                 <a:latin typeface="Open Sans"/>
               </a:rPr>
-              <a:t>Dated &amp; Inaccessible Interfaces:</a:t>
-            </a:r>
-            <a:r>
-              <a:rPr b="0" sz="2000">
+              <a:t>Robbins, K. A., &amp; Robbins, S. (2020). "Practical UNIX and Systems Programming Visualization." ACM Technical Symposium on Computer Science Education (SIGCSE), 52(1), 112-118.</a:t>
+            </a:r>
+          </a:p>
+          <a:p>
+            <a:pPr>
+              <a:lnSpc>
+                <a:spcPct val="120000"/>
+              </a:lnSpc>
+              <a:spcAft>
+                <a:spcPts val="1400"/>
+              </a:spcAft>
+            </a:pPr>
+            <a:r>
+              <a:rPr sz="1800" b="0">
                 <a:solidFill>
-                  <a:srgbClr val="334155"/>
+                  <a:srgbClr val="0F172A"/>
                 </a:solidFill>
                 <a:latin typeface="Open Sans"/>
               </a:rPr>
-              <a:t> Existing platforms are either unmaintained 20-year-old Java applets (incompatible with modern browsers) or noisy, low-contrast AI dashboards lacking clean data tables and vector visualizers.</a:t>
+              <a:t>Love, R. (2018). Linux Kernel Development (3rd ed.). Addison-Wesley Professional.</a:t>
             </a:r>
           </a:p>
         </p:txBody>
@@ -11392,7 +8345,7 @@
           <p:cNvPr id="13" name="Picture 12">
             <a:extLst>
               <a:ext uri="{FF2B5EF4-FFF2-40B4-BE49-F238E27FC236}">
-                <a16:creationId xmlns:a16="http://schemas.microsoft.com/office/drawing/2014/main" id="{32B3D7DD-EFEF-87A6-522D-E91E24F17582}"/>
+                <a16:creationId xmlns:a16="http://schemas.microsoft.com/office/drawing/2014/main" id="{ED2DF0ED-4752-BED5-545F-3DD4ABF75597}"/>
               </a:ext>
             </a:extLst>
           </p:cNvPr>
@@ -11409,7 +8362,7 @@
         </p:blipFill>
         <p:spPr>
           <a:xfrm>
-            <a:off x="14762973" y="0"/>
+            <a:off x="14762973" y="-2078"/>
             <a:ext cx="2475191" cy="2097206"/>
           </a:xfrm>
           <a:prstGeom prst="rect">
@@ -11425,7 +8378,7 @@
 </p:sld>
 </file>
 
-<file path=ppt/slides/slide8.xml><?xml version="1.0" encoding="utf-8"?>
+<file path=ppt/slides/slide9.xml><?xml version="1.0" encoding="utf-8"?>
 <p:sld xmlns:a="http://schemas.openxmlformats.org/drawingml/2006/main" xmlns:r="http://schemas.openxmlformats.org/officeDocument/2006/relationships" xmlns:p="http://schemas.openxmlformats.org/presentationml/2006/main">
   <p:cSld>
     <p:spTree>
@@ -11803,7 +8756,7 @@
               <a:rPr sz="6000">
                 <a:latin typeface="Open Sans Extra Bold"/>
               </a:rPr>
-              <a:t>Objective</a:t>
+              <a:t>Conclusion</a:t>
             </a:r>
           </a:p>
         </p:txBody>
@@ -11893,22 +8846,22 @@
               </a:spcAft>
             </a:pPr>
             <a:r>
-              <a:rPr b="1" sz="2000">
+              <a:rPr sz="2000" b="1">
                 <a:solidFill>
                   <a:srgbClr val="0F172A"/>
                 </a:solidFill>
                 <a:latin typeface="Open Sans"/>
               </a:rPr>
-              <a:t>Unified 10-Module Suite:</a:t>
-            </a:r>
-            <a:r>
-              <a:rPr b="0" sz="2000">
+              <a:t>Comprehensive Integration:</a:t>
+            </a:r>
+            <a:r>
+              <a:rPr sz="2000" b="0">
                 <a:solidFill>
                   <a:srgbClr val="334155"/>
                 </a:solidFill>
                 <a:latin typeface="Open Sans"/>
               </a:rPr>
-              <a:t> Build a comprehensive laboratory covering CPU Scheduling, Dynamic Memory, Page Replacement, Banker's Deadlock Avoidance, Disk Arm Seek, Virtual Memory MMU, File Systems, Process Lifecycle, POSIX Concurrency, and Host Telemetry.</a:t>
+              <a:t> Successfully unified 10 core Operating Systems domains into a single production-quality laboratory platform.</a:t>
             </a:r>
           </a:p>
           <a:p>
@@ -11921,22 +8874,22 @@
               </a:spcAft>
             </a:pPr>
             <a:r>
-              <a:rPr b="1" sz="2000">
+              <a:rPr sz="2000" b="1">
                 <a:solidFill>
                   <a:srgbClr val="0F172A"/>
                 </a:solidFill>
                 <a:latin typeface="Open Sans"/>
               </a:rPr>
-              <a:t>High-Precision Vector Visualizers:</a:t>
-            </a:r>
-            <a:r>
-              <a:rPr b="0" sz="2000">
+              <a:t>Pedagogical Impact:</a:t>
+            </a:r>
+            <a:r>
+              <a:rPr sz="2000" b="0">
                 <a:solidFill>
                   <a:srgbClr val="334155"/>
                 </a:solidFill>
                 <a:latin typeface="Open Sans"/>
               </a:rPr>
-              <a:t> Implement native SVG rendering for Gantt charts with millisecond guidelines, memory maps with fragmentation analysis, step-by-step frame steppers, and cylinder seek plots.</a:t>
+              <a:t> Bridges abstract theoretical textbook models with concrete visual execution, enabling intuitive experimentation for CS students.</a:t>
             </a:r>
           </a:p>
           <a:p>
@@ -11949,22 +8902,22 @@
               </a:spcAft>
             </a:pPr>
             <a:r>
-              <a:rPr b="1" sz="2000">
+              <a:rPr sz="2000" b="1">
                 <a:solidFill>
                   <a:srgbClr val="0F172A"/>
                 </a:solidFill>
                 <a:latin typeface="Open Sans"/>
               </a:rPr>
-              <a:t>Authoritative C++ Core &amp; Deterministic Benchmarking:</a:t>
-            </a:r>
-            <a:r>
-              <a:rPr b="0" sz="2000">
+              <a:t>Engineering Rigor:</a:t>
+            </a:r>
+            <a:r>
+              <a:rPr sz="2000" b="0">
                 <a:solidFill>
                   <a:srgbClr val="334155"/>
                 </a:solidFill>
                 <a:latin typeface="Open Sans"/>
               </a:rPr>
-              <a:t> Connect simulations to a compiled C++20 engine verified by 356 GoogleTests, providing reproducible textbook presets (Belady's anomaly, convoy effect, safe sequence).</a:t>
+              <a:t> Combines high-performance C++20 simulation accuracy with real POSIX kernel integration and 150 automated verification tests.</a:t>
             </a:r>
           </a:p>
           <a:p>
@@ -11977,22 +8930,22 @@
               </a:spcAft>
             </a:pPr>
             <a:r>
-              <a:rPr b="1" sz="2000">
+              <a:rPr sz="2000" b="1">
                 <a:solidFill>
                   <a:srgbClr val="0F172A"/>
                 </a:solidFill>
                 <a:latin typeface="Open Sans"/>
               </a:rPr>
-              <a:t>Dual Modern Interface:</a:t>
-            </a:r>
-            <a:r>
-              <a:rPr b="0" sz="2000">
+              <a:t>Accessible Deployment:</a:t>
+            </a:r>
+            <a:r>
+              <a:rPr sz="2000" b="0">
                 <a:solidFill>
                   <a:srgbClr val="334155"/>
                 </a:solidFill>
                 <a:latin typeface="Open Sans"/>
               </a:rPr>
-              <a:t> Deliver a zero-dependency light-mode web application and a native PySide6 desktop GUI with 150 automated end-to-end pytest tests.</a:t>
+              <a:t> Zero external pip dependencies, instant browser launch, and modern light-theme devtool ergonomics.</a:t>
             </a:r>
           </a:p>
         </p:txBody>
@@ -12002,7 +8955,7 @@
           <p:cNvPr id="13" name="Picture 12">
             <a:extLst>
               <a:ext uri="{FF2B5EF4-FFF2-40B4-BE49-F238E27FC236}">
-                <a16:creationId xmlns:a16="http://schemas.microsoft.com/office/drawing/2014/main" id="{C04892FC-3651-7240-1953-9B3C506E17FB}"/>
+                <a16:creationId xmlns:a16="http://schemas.microsoft.com/office/drawing/2014/main" id="{49A95A48-FED7-90FE-2396-589EEA344C2F}"/>
               </a:ext>
             </a:extLst>
           </p:cNvPr>
@@ -12019,642 +8972,8 @@
         </p:blipFill>
         <p:spPr>
           <a:xfrm>
-            <a:off x="14762973" y="-2078"/>
-            <a:ext cx="2475191" cy="2097206"/>
-          </a:xfrm>
-          <a:prstGeom prst="rect">
-            <a:avLst/>
-          </a:prstGeom>
-        </p:spPr>
-      </p:pic>
-    </p:spTree>
-  </p:cSld>
-  <p:clrMapOvr>
-    <a:masterClrMapping/>
-  </p:clrMapOvr>
-</p:sld>
-</file>
-
-<file path=ppt/slides/slide9.xml><?xml version="1.0" encoding="utf-8"?>
-<p:sld xmlns:a="http://schemas.openxmlformats.org/drawingml/2006/main" xmlns:r="http://schemas.openxmlformats.org/officeDocument/2006/relationships" xmlns:p="http://schemas.openxmlformats.org/presentationml/2006/main">
-  <p:cSld>
-    <p:spTree>
-      <p:nvGrpSpPr>
-        <p:cNvPr id="1" name=""/>
-        <p:cNvGrpSpPr/>
-        <p:nvPr/>
-      </p:nvGrpSpPr>
-      <p:grpSpPr>
-        <a:xfrm>
-          <a:off x="0" y="0"/>
-          <a:ext cx="0" cy="0"/>
-          <a:chOff x="0" y="0"/>
-          <a:chExt cx="0" cy="0"/>
-        </a:xfrm>
-      </p:grpSpPr>
-      <p:grpSp>
-        <p:nvGrpSpPr>
-          <p:cNvPr id="3" name="Group 3"/>
-          <p:cNvGrpSpPr/>
-          <p:nvPr/>
-        </p:nvGrpSpPr>
-        <p:grpSpPr>
-          <a:xfrm>
-            <a:off x="0" y="0"/>
-            <a:ext cx="1028700" cy="10287000"/>
-            <a:chOff x="0" y="0"/>
-            <a:chExt cx="270933" cy="466552"/>
-          </a:xfrm>
-          <a:solidFill>
-            <a:schemeClr val="accent5"/>
-          </a:solidFill>
-        </p:grpSpPr>
-        <p:sp>
-          <p:nvSpPr>
-            <p:cNvPr id="4" name="Freeform 4"/>
-            <p:cNvSpPr/>
-            <p:nvPr/>
-          </p:nvSpPr>
-          <p:spPr>
-            <a:xfrm>
-              <a:off x="0" y="0"/>
-              <a:ext cx="270933" cy="466552"/>
-            </a:xfrm>
-            <a:custGeom>
-              <a:avLst/>
-              <a:gdLst/>
-              <a:ahLst/>
-              <a:cxnLst/>
-              <a:rect l="l" t="t" r="r" b="b"/>
-              <a:pathLst>
-                <a:path w="270933" h="466552">
-                  <a:moveTo>
-                    <a:pt x="0" y="0"/>
-                  </a:moveTo>
-                  <a:lnTo>
-                    <a:pt x="270933" y="0"/>
-                  </a:lnTo>
-                  <a:lnTo>
-                    <a:pt x="270933" y="466552"/>
-                  </a:lnTo>
-                  <a:lnTo>
-                    <a:pt x="0" y="466552"/>
-                  </a:lnTo>
-                  <a:close/>
-                </a:path>
-              </a:pathLst>
-            </a:custGeom>
-            <a:grpFill/>
-          </p:spPr>
-          <p:txBody>
-            <a:bodyPr/>
-            <a:lstStyle/>
-            <a:p>
-              <a:endParaRPr lang="en-IN"/>
-            </a:p>
-          </p:txBody>
-        </p:sp>
-        <p:sp>
-          <p:nvSpPr>
-            <p:cNvPr id="5" name="TextBox 5"/>
-            <p:cNvSpPr txBox="1"/>
-            <p:nvPr/>
-          </p:nvSpPr>
-          <p:spPr>
-            <a:xfrm>
-              <a:off x="60207" y="54727"/>
-              <a:ext cx="210726" cy="411825"/>
-            </a:xfrm>
-            <a:prstGeom prst="rect">
-              <a:avLst/>
-            </a:prstGeom>
-            <a:grpFill/>
-          </p:spPr>
-          <p:txBody>
-            <a:bodyPr lIns="50800" tIns="50800" rIns="50800" bIns="50800" rtlCol="0" anchor="ctr"/>
-            <a:lstStyle/>
-            <a:p>
-              <a:pPr algn="ctr">
-                <a:lnSpc>
-                  <a:spcPts val="2659"/>
-                </a:lnSpc>
-              </a:pPr>
-              <a:endParaRPr/>
-            </a:p>
-          </p:txBody>
-        </p:sp>
-      </p:grpSp>
-      <p:sp>
-        <p:nvSpPr>
-          <p:cNvPr id="6" name="TextBox 6"/>
-          <p:cNvSpPr txBox="1"/>
-          <p:nvPr/>
-        </p:nvSpPr>
-        <p:spPr>
-          <a:xfrm>
-            <a:off x="1723107" y="2850095"/>
-            <a:ext cx="12408632" cy="1050031"/>
-          </a:xfrm>
-          <a:prstGeom prst="rect">
-            <a:avLst/>
-          </a:prstGeom>
-        </p:spPr>
-        <p:txBody>
-          <a:bodyPr lIns="0" tIns="0" rIns="0" bIns="0" rtlCol="0" anchor="t">
-            <a:spAutoFit/>
-          </a:bodyPr>
-          <a:lstStyle/>
-          <a:p>
-            <a:pPr algn="just">
-              <a:lnSpc>
-                <a:spcPts val="4326"/>
-              </a:lnSpc>
-            </a:pPr>
-            <a:endParaRPr dirty="0"/>
-          </a:p>
-          <a:p>
-            <a:pPr algn="just">
-              <a:lnSpc>
-                <a:spcPts val="4326"/>
-              </a:lnSpc>
-            </a:pPr>
-            <a:endParaRPr lang="en-US" sz="2884" spc="187" dirty="0">
-              <a:solidFill>
-                <a:srgbClr val="000000"/>
-              </a:solidFill>
-              <a:latin typeface="Open Sauce"/>
-              <a:ea typeface="Open Sauce"/>
-              <a:cs typeface="Open Sauce"/>
-              <a:sym typeface="Open Sauce"/>
-            </a:endParaRPr>
-          </a:p>
-        </p:txBody>
-      </p:sp>
-      <p:grpSp>
-        <p:nvGrpSpPr>
-          <p:cNvPr id="7" name="Group 7"/>
-          <p:cNvGrpSpPr/>
-          <p:nvPr/>
-        </p:nvGrpSpPr>
-        <p:grpSpPr>
-          <a:xfrm>
-            <a:off x="0" y="9258300"/>
-            <a:ext cx="1028700" cy="1028700"/>
-            <a:chOff x="0" y="0"/>
-            <a:chExt cx="270933" cy="270933"/>
-          </a:xfrm>
-          <a:solidFill>
-            <a:schemeClr val="accent5"/>
-          </a:solidFill>
-        </p:grpSpPr>
-        <p:sp>
-          <p:nvSpPr>
-            <p:cNvPr id="8" name="Freeform 8"/>
-            <p:cNvSpPr/>
-            <p:nvPr/>
-          </p:nvSpPr>
-          <p:spPr>
-            <a:xfrm>
-              <a:off x="0" y="0"/>
-              <a:ext cx="270933" cy="270933"/>
-            </a:xfrm>
-            <a:custGeom>
-              <a:avLst/>
-              <a:gdLst/>
-              <a:ahLst/>
-              <a:cxnLst/>
-              <a:rect l="l" t="t" r="r" b="b"/>
-              <a:pathLst>
-                <a:path w="270933" h="270933">
-                  <a:moveTo>
-                    <a:pt x="0" y="0"/>
-                  </a:moveTo>
-                  <a:lnTo>
-                    <a:pt x="270933" y="0"/>
-                  </a:lnTo>
-                  <a:lnTo>
-                    <a:pt x="270933" y="270933"/>
-                  </a:lnTo>
-                  <a:lnTo>
-                    <a:pt x="0" y="270933"/>
-                  </a:lnTo>
-                  <a:close/>
-                </a:path>
-              </a:pathLst>
-            </a:custGeom>
-            <a:grpFill/>
-            <a:ln cap="sq">
-              <a:noFill/>
-              <a:prstDash val="solid"/>
-              <a:miter/>
-            </a:ln>
-          </p:spPr>
-          <p:txBody>
-            <a:bodyPr/>
-            <a:lstStyle/>
-            <a:p>
-              <a:endParaRPr lang="en-IN"/>
-            </a:p>
-          </p:txBody>
-        </p:sp>
-        <p:sp>
-          <p:nvSpPr>
-            <p:cNvPr id="9" name="TextBox 9"/>
-            <p:cNvSpPr txBox="1"/>
-            <p:nvPr/>
-          </p:nvSpPr>
-          <p:spPr>
-            <a:xfrm>
-              <a:off x="0" y="-57150"/>
-              <a:ext cx="270933" cy="328083"/>
-            </a:xfrm>
-            <a:prstGeom prst="rect">
-              <a:avLst/>
-            </a:prstGeom>
-            <a:grpFill/>
-          </p:spPr>
-          <p:txBody>
-            <a:bodyPr lIns="50800" tIns="50800" rIns="50800" bIns="50800" rtlCol="0" anchor="ctr"/>
-            <a:lstStyle/>
-            <a:p>
-              <a:pPr algn="ctr">
-                <a:lnSpc>
-                  <a:spcPts val="2659"/>
-                </a:lnSpc>
-              </a:pPr>
-              <a:endParaRPr/>
-            </a:p>
-          </p:txBody>
-        </p:sp>
-      </p:grpSp>
-      <p:sp>
-        <p:nvSpPr>
-          <p:cNvPr id="10" name="AutoShape 10"/>
-          <p:cNvSpPr/>
-          <p:nvPr/>
-        </p:nvSpPr>
-        <p:spPr>
-          <a:xfrm>
-            <a:off x="1723107" y="9277350"/>
-            <a:ext cx="14479624" cy="0"/>
-          </a:xfrm>
-          <a:prstGeom prst="line">
-            <a:avLst/>
-          </a:prstGeom>
-          <a:ln w="38100" cap="flat">
-            <a:solidFill>
-              <a:schemeClr val="accent5"/>
-            </a:solidFill>
-            <a:prstDash val="solid"/>
-            <a:headEnd type="none" w="sm" len="sm"/>
-            <a:tailEnd type="none" w="sm" len="sm"/>
-          </a:ln>
-        </p:spPr>
-        <p:txBody>
-          <a:bodyPr/>
-          <a:lstStyle/>
-          <a:p>
-            <a:endParaRPr lang="en-IN"/>
-          </a:p>
-        </p:txBody>
-      </p:sp>
-      <p:sp>
-        <p:nvSpPr>
-          <p:cNvPr id="11" name="AutoShape 11"/>
-          <p:cNvSpPr/>
-          <p:nvPr/>
-        </p:nvSpPr>
-        <p:spPr>
-          <a:xfrm flipH="1">
-            <a:off x="17240250" y="3024088"/>
-            <a:ext cx="0" cy="5293724"/>
-          </a:xfrm>
-          <a:prstGeom prst="line">
-            <a:avLst/>
-          </a:prstGeom>
-          <a:ln w="38100" cap="flat">
-            <a:solidFill>
-              <a:schemeClr val="accent5"/>
-            </a:solidFill>
-            <a:prstDash val="solid"/>
-            <a:headEnd type="none" w="sm" len="sm"/>
-            <a:tailEnd type="none" w="sm" len="sm"/>
-          </a:ln>
-        </p:spPr>
-        <p:txBody>
-          <a:bodyPr/>
-          <a:lstStyle/>
-          <a:p>
-            <a:endParaRPr lang="en-IN"/>
-          </a:p>
-        </p:txBody>
-      </p:sp>
-      <p:sp>
-        <p:nvSpPr>
-          <p:cNvPr id="16" name="AutoShape 16"/>
-          <p:cNvSpPr/>
-          <p:nvPr/>
-        </p:nvSpPr>
-        <p:spPr>
-          <a:xfrm>
-            <a:off x="1723107" y="2460438"/>
-            <a:ext cx="903745" cy="0"/>
-          </a:xfrm>
-          <a:prstGeom prst="line">
-            <a:avLst/>
-          </a:prstGeom>
-          <a:ln w="238125" cap="flat">
-            <a:solidFill>
-              <a:schemeClr val="accent5"/>
-            </a:solidFill>
-            <a:prstDash val="solid"/>
-            <a:headEnd type="none" w="sm" len="sm"/>
-            <a:tailEnd type="none" w="sm" len="sm"/>
-          </a:ln>
-        </p:spPr>
-        <p:txBody>
-          <a:bodyPr/>
-          <a:lstStyle/>
-          <a:p>
-            <a:endParaRPr lang="en-IN"/>
-          </a:p>
-        </p:txBody>
-      </p:sp>
-      <p:sp>
-        <p:nvSpPr>
-          <p:cNvPr id="17" name="TextBox 17"/>
-          <p:cNvSpPr txBox="1"/>
-          <p:nvPr/>
-        </p:nvSpPr>
-        <p:spPr>
-          <a:xfrm>
-            <a:off x="1723107" y="900442"/>
-            <a:ext cx="9354483" cy="1194686"/>
-          </a:xfrm>
-          <a:prstGeom prst="rect">
-            <a:avLst/>
-          </a:prstGeom>
-        </p:spPr>
-        <p:txBody>
-          <a:bodyPr lIns="0" tIns="0" rIns="0" bIns="0" rtlCol="0" anchor="t">
-            <a:spAutoFit/>
-          </a:bodyPr>
-          <a:lstStyle/>
-          <a:p>
-            <a:pPr algn="l">
-              <a:lnSpc>
-                <a:spcPts val="10248"/>
-              </a:lnSpc>
-              <a:spcBef>
-                <a:spcPct val="0"/>
-              </a:spcBef>
-            </a:pPr>
-            <a:r>
-              <a:rPr sz="6000">
-                <a:latin typeface="Open Sans Extra Bold"/>
-              </a:rPr>
-              <a:t>System Architecture</a:t>
-            </a:r>
-          </a:p>
-        </p:txBody>
-      </p:sp>
-      <p:sp>
-        <p:nvSpPr>
-          <p:cNvPr id="18" name="Freeform 18"/>
-          <p:cNvSpPr/>
-          <p:nvPr/>
-        </p:nvSpPr>
-        <p:spPr>
-          <a:xfrm>
-            <a:off x="16778563" y="8673435"/>
-            <a:ext cx="919202" cy="745910"/>
-          </a:xfrm>
-          <a:custGeom>
-            <a:avLst/>
-            <a:gdLst/>
-            <a:ahLst/>
-            <a:cxnLst/>
-            <a:rect l="l" t="t" r="r" b="b"/>
-            <a:pathLst>
-              <a:path w="919202" h="745910">
-                <a:moveTo>
-                  <a:pt x="0" y="0"/>
-                </a:moveTo>
-                <a:lnTo>
-                  <a:pt x="919201" y="0"/>
-                </a:lnTo>
-                <a:lnTo>
-                  <a:pt x="919201" y="745909"/>
-                </a:lnTo>
-                <a:lnTo>
-                  <a:pt x="0" y="745909"/>
-                </a:lnTo>
-                <a:lnTo>
-                  <a:pt x="0" y="0"/>
-                </a:lnTo>
-                <a:close/>
-              </a:path>
-            </a:pathLst>
-          </a:custGeom>
-          <a:solidFill>
-            <a:schemeClr val="accent5"/>
-          </a:solidFill>
-          <a:ln>
-            <a:solidFill>
-              <a:schemeClr val="accent5"/>
-            </a:solidFill>
-          </a:ln>
-        </p:spPr>
-        <p:txBody>
-          <a:bodyPr/>
-          <a:lstStyle/>
-          <a:p>
-            <a:endParaRPr lang="en-IN"/>
-          </a:p>
-        </p:txBody>
-      </p:sp>
-      <p:sp>
-        <p:nvSpPr>
-          <p:cNvPr id="12" name="Rectangle 11"/>
-          <p:cNvSpPr/>
-          <p:nvPr/>
-        </p:nvSpPr>
-        <p:spPr>
-          <a:xfrm>
-            <a:off x="1097280" y="2286000"/>
-            <a:ext cx="8412480" cy="6858000"/>
-          </a:xfrm>
-          <a:prstGeom prst="rect">
-            <a:avLst/>
-          </a:prstGeom>
-        </p:spPr>
-        <p:txBody>
-          <a:bodyPr wrap="square">
-            <a:spAutoFit/>
-          </a:bodyPr>
-          <a:lstStyle/>
-          <a:p>
-            <a:pPr>
-              <a:lnSpc>
-                <a:spcPct val="120000"/>
-              </a:lnSpc>
-              <a:spcAft>
-                <a:spcPts val="1400"/>
-              </a:spcAft>
-            </a:pPr>
-            <a:r>
-              <a:rPr b="1" sz="1800">
-                <a:solidFill>
-                  <a:srgbClr val="0F172A"/>
-                </a:solidFill>
-                <a:latin typeface="Open Sans"/>
-              </a:rPr>
-              <a:t>Tier 1 (Presentation Layer):</a:t>
-            </a:r>
-            <a:r>
-              <a:rPr b="0" sz="1800">
-                <a:solidFill>
-                  <a:srgbClr val="334155"/>
-                </a:solidFill>
-                <a:latin typeface="Open Sans"/>
-              </a:rPr>
-              <a:t> Modern Light-Mode Single Page Application (HTML5 / CSS3 / Vanilla ES6+) + Native PySide6 (Qt 6) Desktop GUI. Features custom inline SVG stroke icons.</a:t>
-            </a:r>
-          </a:p>
-          <a:p>
-            <a:pPr>
-              <a:lnSpc>
-                <a:spcPct val="120000"/>
-              </a:lnSpc>
-              <a:spcAft>
-                <a:spcPts val="1400"/>
-              </a:spcAft>
-            </a:pPr>
-            <a:r>
-              <a:rPr b="1" sz="1800">
-                <a:solidFill>
-                  <a:srgbClr val="0F172A"/>
-                </a:solidFill>
-                <a:latin typeface="Open Sans"/>
-              </a:rPr>
-              <a:t>Tier 2 (Application &amp; REST API Layer):</a:t>
-            </a:r>
-            <a:r>
-              <a:rPr b="0" sz="1800">
-                <a:solidFill>
-                  <a:srgbClr val="334155"/>
-                </a:solidFill>
-                <a:latin typeface="Open Sans"/>
-              </a:rPr>
-              <a:t> Python 3.12 Multi-Threaded HTTP Server (ThreadingHTTPServer) with zero external pip dependencies routing JSON endpoints (/api/*/run).</a:t>
-            </a:r>
-          </a:p>
-          <a:p>
-            <a:pPr>
-              <a:lnSpc>
-                <a:spcPct val="120000"/>
-              </a:lnSpc>
-              <a:spcAft>
-                <a:spcPts val="1400"/>
-              </a:spcAft>
-            </a:pPr>
-            <a:r>
-              <a:rPr b="1" sz="1800">
-                <a:solidFill>
-                  <a:srgbClr val="0F172A"/>
-                </a:solidFill>
-                <a:latin typeface="Open Sans"/>
-              </a:rPr>
-              <a:t>Tier 3 (Platform Execution Bridge):</a:t>
-            </a:r>
-            <a:r>
-              <a:rPr b="0" sz="1800">
-                <a:solidFill>
-                  <a:srgbClr val="334155"/>
-                </a:solidFill>
-                <a:latin typeface="Open Sans"/>
-              </a:rPr>
-              <a:t> Automated environment runner supporting native Linux and Windows WSL 2 (wsl.exe), handling CLI argument marshaling and telemetry streaming.</a:t>
-            </a:r>
-          </a:p>
-          <a:p>
-            <a:pPr>
-              <a:lnSpc>
-                <a:spcPct val="120000"/>
-              </a:lnSpc>
-              <a:spcAft>
-                <a:spcPts val="1400"/>
-              </a:spcAft>
-            </a:pPr>
-            <a:r>
-              <a:rPr b="1" sz="1800">
-                <a:solidFill>
-                  <a:srgbClr val="0F172A"/>
-                </a:solidFill>
-                <a:latin typeface="Open Sans"/>
-              </a:rPr>
-              <a:t>Tier 4 (Authoritative Simulation Core):</a:t>
-            </a:r>
-            <a:r>
-              <a:rPr b="0" sz="1800">
-                <a:solidFill>
-                  <a:srgbClr val="334155"/>
-                </a:solidFill>
-                <a:latin typeface="Open Sans"/>
-              </a:rPr>
-              <a:t> Compiled C++20 engine executing deterministic algorithms, real POSIX system calls (fork, execve, pipe, sem_t), and /proc parser.</a:t>
-            </a:r>
-          </a:p>
-        </p:txBody>
-      </p:sp>
-      <p:pic>
-        <p:nvPicPr>
-          <p:cNvPr id="13" name="Picture 12">
-            <a:extLst>
-              <a:ext uri="{FF2B5EF4-FFF2-40B4-BE49-F238E27FC236}">
-                <a16:creationId xmlns:a16="http://schemas.microsoft.com/office/drawing/2014/main" id="{BECC1CFB-8B90-7A75-E4C6-1E012CF4A32A}"/>
-              </a:ext>
-            </a:extLst>
-          </p:cNvPr>
-          <p:cNvPicPr>
-            <a:picLocks noChangeAspect="1"/>
-          </p:cNvPicPr>
-          <p:nvPr/>
-        </p:nvPicPr>
-        <p:blipFill>
-          <a:blip r:embed="rId2"/>
-          <a:stretch>
-            <a:fillRect/>
-          </a:stretch>
-        </p:blipFill>
-        <p:spPr>
-          <a:xfrm>
             <a:off x="14762973" y="0"/>
             <a:ext cx="2475191" cy="2097206"/>
-          </a:xfrm>
-          <a:prstGeom prst="rect">
-            <a:avLst/>
-          </a:prstGeom>
-        </p:spPr>
-      </p:pic>
-      <p:pic>
-        <p:nvPicPr>
-          <p:cNvPr id="19" name="Picture 18" descr="architecture_diagram.png"/>
-          <p:cNvPicPr>
-            <a:picLocks noChangeAspect="1"/>
-          </p:cNvPicPr>
-          <p:nvPr/>
-        </p:nvPicPr>
-        <p:blipFill>
-          <a:blip r:embed="rId3"/>
-          <a:stretch>
-            <a:fillRect/>
-          </a:stretch>
-        </p:blipFill>
-        <p:spPr>
-          <a:xfrm>
-            <a:off x="9875520" y="2377440"/>
-            <a:ext cx="7498079" cy="5303520"/>
           </a:xfrm>
           <a:prstGeom prst="rect">
             <a:avLst/>

--- a/Mid Sem PPT.pptx
+++ b/Mid Sem PPT.pptx
@@ -3252,37 +3252,23 @@
           </a:bodyPr>
           <a:lstStyle/>
           <a:p>
-            <a:pPr>
-              <a:defRPr sz="2200" b="1">
+            <a:r>
+              <a:rPr b="1" sz="2400">
+                <a:solidFill>
+                  <a:srgbClr val="2563EB"/>
+                </a:solidFill>
+                <a:latin typeface="Lato"/>
+              </a:rPr>
+              <a:t>Project Title :- </a:t>
+            </a:r>
+            <a:r>
+              <a:rPr b="1" sz="2400">
                 <a:solidFill>
                   <a:srgbClr val="0F172A"/>
                 </a:solidFill>
-                <a:latin typeface="Open Sans"/>
-              </a:defRPr>
-            </a:pPr>
-            <a:r>
-              <a:rPr sz="3200" dirty="0">
-                <a:latin typeface="Lato Bold" panose="020B0604020202020204" charset="0"/>
-                <a:ea typeface="Lato Bold" panose="020B0604020202020204" charset="0"/>
-                <a:cs typeface="Lato Bold" panose="020B0604020202020204" charset="0"/>
-              </a:rPr>
-              <a:t>Project Title :- </a:t>
-            </a:r>
-            <a:r>
-              <a:rPr sz="3200" dirty="0" err="1">
-                <a:latin typeface="Lato Bold" panose="020B0604020202020204" charset="0"/>
-                <a:ea typeface="Lato Bold" panose="020B0604020202020204" charset="0"/>
-                <a:cs typeface="Lato Bold" panose="020B0604020202020204" charset="0"/>
-              </a:rPr>
-              <a:t>OScope</a:t>
-            </a:r>
-            <a:r>
-              <a:rPr sz="3200" dirty="0">
-                <a:latin typeface="Lato Bold" panose="020B0604020202020204" charset="0"/>
-                <a:ea typeface="Lato Bold" panose="020B0604020202020204" charset="0"/>
-                <a:cs typeface="Lato Bold" panose="020B0604020202020204" charset="0"/>
-              </a:rPr>
-              <a:t>: Operating Systems Simulation &amp; Experimentation Laboratory</a:t>
+                <a:latin typeface="Lato"/>
+              </a:rPr>
+              <a:t>OScope: Operating Systems Simulation &amp; Experimentation Laboratory</a:t>
             </a:r>
           </a:p>
         </p:txBody>
@@ -3308,29 +3294,24 @@
           </a:bodyPr>
           <a:lstStyle/>
           <a:p>
-            <a:pPr algn="ctr">
-              <a:lnSpc>
-                <a:spcPts val="4160"/>
-              </a:lnSpc>
-              <a:spcBef>
-                <a:spcPct val="0"/>
-              </a:spcBef>
-            </a:pPr>
-            <a:r>
-              <a:rPr sz="3200" dirty="0">
-                <a:latin typeface="Lato"/>
-              </a:rPr>
-              <a:t>DIV :- CSE(AI)-</a:t>
-            </a:r>
-            <a:r>
-              <a:rPr lang="en-US" sz="3200" dirty="0">
-                <a:latin typeface="Lato"/>
-              </a:rPr>
-              <a:t>E</a:t>
-            </a:r>
-            <a:endParaRPr sz="3200" dirty="0">
-              <a:latin typeface="Lato"/>
-            </a:endParaRPr>
+            <a:r>
+              <a:rPr b="1" sz="1800">
+                <a:solidFill>
+                  <a:srgbClr val="0F172A"/>
+                </a:solidFill>
+                <a:latin typeface="Lato"/>
+              </a:rPr>
+              <a:t>DIV :- </a:t>
+            </a:r>
+            <a:r>
+              <a:rPr b="0" sz="1800">
+                <a:solidFill>
+                  <a:srgbClr val="334155"/>
+                </a:solidFill>
+                <a:latin typeface="Lato"/>
+              </a:rPr>
+              <a:t>CSE(AI)-E</a:t>
+            </a:r>
           </a:p>
         </p:txBody>
       </p:sp>
@@ -3355,35 +3336,24 @@
           </a:bodyPr>
           <a:lstStyle/>
           <a:p>
-            <a:pPr algn="ctr">
-              <a:lnSpc>
-                <a:spcPts val="4160"/>
-              </a:lnSpc>
-              <a:spcBef>
-                <a:spcPct val="0"/>
-              </a:spcBef>
-            </a:pPr>
-            <a:r>
-              <a:rPr sz="3200" dirty="0">
-                <a:latin typeface="Lato"/>
-              </a:rPr>
-              <a:t>Day -</a:t>
-            </a:r>
-            <a:r>
-              <a:rPr lang="en-US" sz="3200" dirty="0">
-                <a:latin typeface="Lato"/>
-              </a:rPr>
-              <a:t> Friday</a:t>
-            </a:r>
-            <a:endParaRPr lang="en-US" sz="3200" dirty="0">
-              <a:solidFill>
-                <a:srgbClr val="000000"/>
-              </a:solidFill>
-              <a:latin typeface="Lato"/>
-              <a:ea typeface="Lato"/>
-              <a:cs typeface="Lato"/>
-              <a:sym typeface="Lato"/>
-            </a:endParaRPr>
+            <a:r>
+              <a:rPr b="1" sz="1800">
+                <a:solidFill>
+                  <a:srgbClr val="0F172A"/>
+                </a:solidFill>
+                <a:latin typeface="Lato"/>
+              </a:rPr>
+              <a:t>Day - </a:t>
+            </a:r>
+            <a:r>
+              <a:rPr b="0" sz="1800">
+                <a:solidFill>
+                  <a:srgbClr val="334155"/>
+                </a:solidFill>
+                <a:latin typeface="Lato"/>
+              </a:rPr>
+              <a:t>Friday</a:t>
+            </a:r>
           </a:p>
         </p:txBody>
       </p:sp>
@@ -3408,18 +3378,23 @@
           </a:bodyPr>
           <a:lstStyle/>
           <a:p>
-            <a:pPr>
-              <a:defRPr sz="1800">
-                <a:latin typeface="Open Sans"/>
-              </a:defRPr>
-            </a:pPr>
-            <a:r>
-              <a:rPr sz="3200" dirty="0">
-                <a:latin typeface="Lato" panose="020F0502020204030203" pitchFamily="34" charset="0"/>
-                <a:ea typeface="Lato" panose="020F0502020204030203" pitchFamily="34" charset="0"/>
-                <a:cs typeface="Lato" panose="020F0502020204030203" pitchFamily="34" charset="0"/>
-              </a:rPr>
-              <a:t>Date : 30/10/2026</a:t>
+            <a:r>
+              <a:rPr b="1" sz="1800">
+                <a:solidFill>
+                  <a:srgbClr val="0F172A"/>
+                </a:solidFill>
+                <a:latin typeface="Lato"/>
+              </a:rPr>
+              <a:t>Date : </a:t>
+            </a:r>
+            <a:r>
+              <a:rPr b="0" sz="1800">
+                <a:solidFill>
+                  <a:srgbClr val="334155"/>
+                </a:solidFill>
+                <a:latin typeface="Lato"/>
+              </a:rPr>
+              <a:t>30/10/2026</a:t>
             </a:r>
           </a:p>
         </p:txBody>
@@ -3445,116 +3420,155 @@
           </a:bodyPr>
           <a:lstStyle/>
           <a:p>
-            <a:pPr algn="l">
-              <a:lnSpc>
-                <a:spcPts val="4160"/>
-              </a:lnSpc>
-              <a:spcBef>
-                <a:spcPct val="0"/>
-              </a:spcBef>
+            <a:pPr>
               <a:spcAft>
-                <a:spcPts val="0"/>
+                <a:spcPts val="800"/>
               </a:spcAft>
             </a:pPr>
             <a:r>
-              <a:rPr sz="3200" b="1" dirty="0">
-                <a:latin typeface="Lato" panose="020F0502020204030203" pitchFamily="34" charset="0"/>
-                <a:ea typeface="Lato" panose="020F0502020204030203" pitchFamily="34" charset="0"/>
-                <a:cs typeface="Lato" panose="020F0502020204030203" pitchFamily="34" charset="0"/>
+              <a:rPr b="1" sz="2000">
+                <a:solidFill>
+                  <a:srgbClr val="0F172A"/>
+                </a:solidFill>
+                <a:latin typeface="Lato"/>
               </a:rPr>
               <a:t>Presented by :-</a:t>
             </a:r>
           </a:p>
           <a:p>
-            <a:pPr algn="l">
+            <a:pPr>
               <a:spcAft>
-                <a:spcPts val="0"/>
+                <a:spcPts val="400"/>
               </a:spcAft>
             </a:pPr>
             <a:r>
-              <a:rPr sz="3200" dirty="0">
-                <a:latin typeface="Lato" panose="020F0502020204030203" pitchFamily="34" charset="0"/>
-                <a:ea typeface="Lato" panose="020F0502020204030203" pitchFamily="34" charset="0"/>
-                <a:cs typeface="Lato" panose="020F0502020204030203" pitchFamily="34" charset="0"/>
-              </a:rPr>
-              <a:t>Aditya Rana  </a:t>
-            </a:r>
-            <a:r>
-              <a:rPr lang="en-US" sz="3200" dirty="0">
-                <a:latin typeface="Lato" panose="020F0502020204030203" pitchFamily="34" charset="0"/>
-                <a:ea typeface="Lato" panose="020F0502020204030203" pitchFamily="34" charset="0"/>
-                <a:cs typeface="Lato" panose="020F0502020204030203" pitchFamily="34" charset="0"/>
-              </a:rPr>
-              <a:t>  </a:t>
-            </a:r>
-            <a:r>
-              <a:rPr sz="3200" dirty="0">
-                <a:latin typeface="Lato" panose="020F0502020204030203" pitchFamily="34" charset="0"/>
-                <a:ea typeface="Lato" panose="020F0502020204030203" pitchFamily="34" charset="0"/>
-                <a:cs typeface="Lato" panose="020F0502020204030203" pitchFamily="34" charset="0"/>
-              </a:rPr>
-              <a:t>–  PRN: 12413107</a:t>
-            </a:r>
-          </a:p>
-          <a:p>
-            <a:pPr algn="l">
+              <a:rPr b="1" sz="1700">
+                <a:solidFill>
+                  <a:srgbClr val="0F172A"/>
+                </a:solidFill>
+                <a:latin typeface="Lato"/>
+              </a:rPr>
+              <a:t>Aditya Rana </a:t>
+            </a:r>
+            <a:r>
+              <a:rPr b="0" sz="1700">
+                <a:solidFill>
+                  <a:srgbClr val="64748B"/>
+                </a:solidFill>
+                <a:latin typeface="Lato"/>
+              </a:rPr>
+              <a:t>  —  PRN: </a:t>
+            </a:r>
+            <a:r>
+              <a:rPr b="1" sz="1700">
+                <a:solidFill>
+                  <a:srgbClr val="2563EB"/>
+                </a:solidFill>
+                <a:latin typeface="Lato"/>
+              </a:rPr>
+              <a:t>12413107</a:t>
+            </a:r>
+          </a:p>
+          <a:p>
+            <a:pPr>
               <a:spcAft>
-                <a:spcPts val="0"/>
+                <a:spcPts val="400"/>
               </a:spcAft>
             </a:pPr>
             <a:r>
-              <a:rPr sz="3200" dirty="0">
-                <a:latin typeface="Lato" panose="020F0502020204030203" pitchFamily="34" charset="0"/>
-                <a:ea typeface="Lato" panose="020F0502020204030203" pitchFamily="34" charset="0"/>
-                <a:cs typeface="Lato" panose="020F0502020204030203" pitchFamily="34" charset="0"/>
-              </a:rPr>
-              <a:t>Nitish Sahu  </a:t>
-            </a:r>
-            <a:r>
-              <a:rPr lang="en-US" sz="3200" dirty="0">
-                <a:latin typeface="Lato" panose="020F0502020204030203" pitchFamily="34" charset="0"/>
-                <a:ea typeface="Lato" panose="020F0502020204030203" pitchFamily="34" charset="0"/>
-                <a:cs typeface="Lato" panose="020F0502020204030203" pitchFamily="34" charset="0"/>
-              </a:rPr>
-              <a:t>   </a:t>
-            </a:r>
-            <a:r>
-              <a:rPr sz="3200" dirty="0">
-                <a:latin typeface="Lato" panose="020F0502020204030203" pitchFamily="34" charset="0"/>
-                <a:ea typeface="Lato" panose="020F0502020204030203" pitchFamily="34" charset="0"/>
-                <a:cs typeface="Lato" panose="020F0502020204030203" pitchFamily="34" charset="0"/>
-              </a:rPr>
-              <a:t>–  PRN: 12412096</a:t>
-            </a:r>
-          </a:p>
-          <a:p>
-            <a:pPr algn="l">
+              <a:rPr b="1" sz="1700">
+                <a:solidFill>
+                  <a:srgbClr val="0F172A"/>
+                </a:solidFill>
+                <a:latin typeface="Lato"/>
+              </a:rPr>
+              <a:t>Nitish Sahu </a:t>
+            </a:r>
+            <a:r>
+              <a:rPr b="0" sz="1700">
+                <a:solidFill>
+                  <a:srgbClr val="64748B"/>
+                </a:solidFill>
+                <a:latin typeface="Lato"/>
+              </a:rPr>
+              <a:t>  —  PRN: </a:t>
+            </a:r>
+            <a:r>
+              <a:rPr b="1" sz="1700">
+                <a:solidFill>
+                  <a:srgbClr val="2563EB"/>
+                </a:solidFill>
+                <a:latin typeface="Lato"/>
+              </a:rPr>
+              <a:t>12412096</a:t>
+            </a:r>
+          </a:p>
+          <a:p>
+            <a:pPr>
               <a:spcAft>
-                <a:spcPts val="0"/>
+                <a:spcPts val="400"/>
               </a:spcAft>
             </a:pPr>
             <a:r>
-              <a:rPr sz="3200" dirty="0">
-                <a:latin typeface="Lato" panose="020F0502020204030203" pitchFamily="34" charset="0"/>
-                <a:ea typeface="Lato" panose="020F0502020204030203" pitchFamily="34" charset="0"/>
-                <a:cs typeface="Lato" panose="020F0502020204030203" pitchFamily="34" charset="0"/>
-              </a:rPr>
-              <a:t>Palash Sahuji  –  PRN: 12414915</a:t>
-            </a:r>
-          </a:p>
-          <a:p>
-            <a:pPr algn="l">
+              <a:rPr b="1" sz="1700">
+                <a:solidFill>
+                  <a:srgbClr val="0F172A"/>
+                </a:solidFill>
+                <a:latin typeface="Lato"/>
+              </a:rPr>
+              <a:t>Palash Sahuji </a:t>
+            </a:r>
+            <a:r>
+              <a:rPr b="0" sz="1700">
+                <a:solidFill>
+                  <a:srgbClr val="64748B"/>
+                </a:solidFill>
+                <a:latin typeface="Lato"/>
+              </a:rPr>
+              <a:t>  —  PRN: </a:t>
+            </a:r>
+            <a:r>
+              <a:rPr b="1" sz="1700">
+                <a:solidFill>
+                  <a:srgbClr val="2563EB"/>
+                </a:solidFill>
+                <a:latin typeface="Lato"/>
+              </a:rPr>
+              <a:t>12414915</a:t>
+            </a:r>
+          </a:p>
+          <a:p>
+            <a:pPr>
               <a:spcAft>
-                <a:spcPts val="0"/>
+                <a:spcPts val="400"/>
               </a:spcAft>
             </a:pPr>
             <a:r>
-              <a:rPr sz="3200" dirty="0">
-                <a:latin typeface="Lato" panose="020F0502020204030203" pitchFamily="34" charset="0"/>
-                <a:ea typeface="Lato" panose="020F0502020204030203" pitchFamily="34" charset="0"/>
-                <a:cs typeface="Lato" panose="020F0502020204030203" pitchFamily="34" charset="0"/>
-              </a:rPr>
-              <a:t>Manthan Sali  –  PRN: 12411978</a:t>
+              <a:rPr b="1" sz="1700">
+                <a:solidFill>
+                  <a:srgbClr val="0F172A"/>
+                </a:solidFill>
+                <a:latin typeface="Lato"/>
+              </a:rPr>
+              <a:t>Manthan Sali </a:t>
+            </a:r>
+            <a:r>
+              <a:rPr b="0" sz="1700">
+                <a:solidFill>
+                  <a:srgbClr val="64748B"/>
+                </a:solidFill>
+                <a:latin typeface="Lato"/>
+              </a:rPr>
+              <a:t>  —  PRN: </a:t>
+            </a:r>
+            <a:r>
+              <a:rPr b="1" sz="1700">
+                <a:solidFill>
+                  <a:srgbClr val="2563EB"/>
+                </a:solidFill>
+                <a:latin typeface="Lato"/>
+              </a:rPr>
+              <a:t>12411978</a:t>
             </a:r>
           </a:p>
         </p:txBody>
@@ -3580,43 +3594,24 @@
           </a:bodyPr>
           <a:lstStyle/>
           <a:p>
-            <a:pPr algn="ctr">
-              <a:lnSpc>
-                <a:spcPts val="4160"/>
-              </a:lnSpc>
-              <a:spcBef>
-                <a:spcPct val="0"/>
-              </a:spcBef>
-            </a:pPr>
-            <a:r>
-              <a:rPr sz="3200" b="1" dirty="0">
-                <a:latin typeface="Lato" panose="020F0502020204030203" pitchFamily="34" charset="0"/>
-                <a:ea typeface="Lato" panose="020F0502020204030203" pitchFamily="34" charset="0"/>
-                <a:cs typeface="Lato" panose="020F0502020204030203" pitchFamily="34" charset="0"/>
-              </a:rPr>
-              <a:t>Project Guide :- Prof. </a:t>
-            </a:r>
-            <a:r>
-              <a:rPr lang="en-IN" sz="3200" b="1" dirty="0">
-                <a:latin typeface="Lato" panose="020F0502020204030203" pitchFamily="34" charset="0"/>
-                <a:ea typeface="Lato" panose="020F0502020204030203" pitchFamily="34" charset="0"/>
-                <a:cs typeface="Lato" panose="020F0502020204030203" pitchFamily="34" charset="0"/>
-              </a:rPr>
-              <a:t>Priyanka </a:t>
-            </a:r>
-            <a:r>
-              <a:rPr lang="en-IN" sz="3200" b="1" dirty="0" err="1">
-                <a:latin typeface="Lato" panose="020F0502020204030203" pitchFamily="34" charset="0"/>
-                <a:ea typeface="Lato" panose="020F0502020204030203" pitchFamily="34" charset="0"/>
-                <a:cs typeface="Lato" panose="020F0502020204030203" pitchFamily="34" charset="0"/>
-              </a:rPr>
-              <a:t>Khalate</a:t>
-            </a:r>
-            <a:endParaRPr sz="3200" b="1" dirty="0">
-              <a:latin typeface="Lato" panose="020F0502020204030203" pitchFamily="34" charset="0"/>
-              <a:ea typeface="Lato" panose="020F0502020204030203" pitchFamily="34" charset="0"/>
-              <a:cs typeface="Lato" panose="020F0502020204030203" pitchFamily="34" charset="0"/>
-            </a:endParaRPr>
+            <a:r>
+              <a:rPr b="1" sz="2000">
+                <a:solidFill>
+                  <a:srgbClr val="0F172A"/>
+                </a:solidFill>
+                <a:latin typeface="Lato"/>
+              </a:rPr>
+              <a:t>Project Guide :- </a:t>
+            </a:r>
+            <a:r>
+              <a:rPr b="1" sz="2000">
+                <a:solidFill>
+                  <a:srgbClr val="2563EB"/>
+                </a:solidFill>
+                <a:latin typeface="Lato"/>
+              </a:rPr>
+              <a:t>Prof. Priyanka Khalate</a:t>
+            </a:r>
           </a:p>
         </p:txBody>
       </p:sp>
@@ -3641,59 +3636,16 @@
           </a:bodyPr>
           <a:lstStyle/>
           <a:p>
-            <a:pPr algn="ctr">
-              <a:lnSpc>
-                <a:spcPts val="4376"/>
-              </a:lnSpc>
-              <a:spcBef>
-                <a:spcPct val="0"/>
-              </a:spcBef>
-            </a:pPr>
-            <a:r>
-              <a:rPr lang="en-US" sz="3366" b="1" dirty="0">
-                <a:solidFill>
-                  <a:srgbClr val="000000"/>
-                </a:solidFill>
-                <a:latin typeface="Times New Roman" panose="02020603050405020304" pitchFamily="18" charset="0"/>
-                <a:ea typeface="Lato Bold"/>
-                <a:cs typeface="Times New Roman" panose="02020603050405020304" pitchFamily="18" charset="0"/>
-                <a:sym typeface="Lato Bold"/>
-              </a:rPr>
-              <a:t>DEPARTMENT OF COMPUTER SCIENCE ENGINEERING </a:t>
-            </a:r>
-          </a:p>
-          <a:p>
-            <a:pPr algn="ctr">
-              <a:lnSpc>
-                <a:spcPts val="4376"/>
-              </a:lnSpc>
-              <a:spcBef>
-                <a:spcPct val="0"/>
-              </a:spcBef>
-            </a:pPr>
-            <a:r>
-              <a:rPr lang="en-US" sz="3366" b="1" dirty="0">
-                <a:solidFill>
-                  <a:srgbClr val="000000"/>
-                </a:solidFill>
-                <a:latin typeface="Times New Roman" panose="02020603050405020304" pitchFamily="18" charset="0"/>
-                <a:ea typeface="Lato Bold"/>
-                <a:cs typeface="Times New Roman" panose="02020603050405020304" pitchFamily="18" charset="0"/>
-                <a:sym typeface="Lato Bold"/>
-              </a:rPr>
-              <a:t>(ARTIFICIAL INTELLIGENCE </a:t>
-            </a:r>
-            <a:r>
-              <a:rPr lang="en-US" sz="3366" b="1" dirty="0">
-                <a:solidFill>
-                  <a:srgbClr val="000000"/>
-                </a:solidFill>
-                <a:latin typeface="Lato Bold"/>
-                <a:ea typeface="Lato Bold"/>
-                <a:cs typeface="Lato Bold"/>
-                <a:sym typeface="Lato Bold"/>
-              </a:rPr>
-              <a:t>)</a:t>
+            <a:pPr algn="ctr"/>
+            <a:r>
+              <a:rPr b="1" sz="2000">
+                <a:solidFill>
+                  <a:srgbClr val="0F172A"/>
+                </a:solidFill>
+                <a:latin typeface="Lato"/>
+              </a:rPr>
+              <a:t>DEPARTMENT OF COMPUTER SCIENCE ENGINEERING
+(ARTIFICIAL INTELLIGENCE)</a:t>
             </a:r>
           </a:p>
         </p:txBody>
@@ -3719,23 +3671,13 @@
           </a:bodyPr>
           <a:lstStyle/>
           <a:p>
-            <a:pPr algn="ctr">
-              <a:lnSpc>
-                <a:spcPts val="4550"/>
-              </a:lnSpc>
-              <a:spcBef>
-                <a:spcPct val="0"/>
-              </a:spcBef>
-            </a:pPr>
-            <a:r>
-              <a:rPr lang="en-US" sz="3500" b="1" dirty="0">
-                <a:solidFill>
-                  <a:srgbClr val="000000"/>
-                </a:solidFill>
-                <a:latin typeface="Times New Roman" panose="02020603050405020304" pitchFamily="18" charset="0"/>
-                <a:ea typeface="Lato Bold"/>
-                <a:cs typeface="Times New Roman" panose="02020603050405020304" pitchFamily="18" charset="0"/>
-                <a:sym typeface="Lato Bold"/>
+            <a:pPr algn="ctr"/>
+            <a:r>
+              <a:rPr b="1" sz="2200">
+                <a:solidFill>
+                  <a:srgbClr val="2563EB"/>
+                </a:solidFill>
+                <a:latin typeface="Lato"/>
               </a:rPr>
               <a:t>VISHWAKARMA INSTITUTE OF TECHNOLOGY, PUNE</a:t>
             </a:r>
@@ -4257,36 +4199,25 @@
         </p:nvSpPr>
         <p:spPr>
           <a:xfrm>
-            <a:off x="1723107" y="900442"/>
-            <a:ext cx="9354483" cy="1194686"/>
+            <a:off x="1097280" y="777240"/>
+            <a:ext cx="12801600" cy="1097280"/>
           </a:xfrm>
           <a:prstGeom prst="rect">
             <a:avLst/>
           </a:prstGeom>
         </p:spPr>
         <p:txBody>
-          <a:bodyPr lIns="0" tIns="0" rIns="0" bIns="0" rtlCol="0" anchor="t">
+          <a:bodyPr lIns="0" tIns="0" rIns="0" bIns="0" rtlCol="0" anchor="t" wrap="square">
             <a:spAutoFit/>
           </a:bodyPr>
           <a:lstStyle/>
           <a:p>
-            <a:pPr>
-              <a:lnSpc>
-                <a:spcPts val="10248"/>
-              </a:lnSpc>
-              <a:spcBef>
-                <a:spcPct val="0"/>
-              </a:spcBef>
-            </a:pPr>
-            <a:r>
-              <a:rPr lang="en-US" sz="6000" dirty="0">
-                <a:solidFill>
-                  <a:srgbClr val="051D40"/>
-                </a:solidFill>
-                <a:latin typeface="Open Sans Extra Bold"/>
-                <a:ea typeface="Open Sans Extra Bold"/>
-                <a:cs typeface="Open Sans Extra Bold"/>
-                <a:sym typeface="Open Sans Extra Bold"/>
+            <a:r>
+              <a:rPr b="1" sz="4400">
+                <a:solidFill>
+                  <a:srgbClr val="0F172A"/>
+                </a:solidFill>
+                <a:latin typeface="Lato"/>
               </a:rPr>
               <a:t>Overview</a:t>
             </a:r>
@@ -4356,8 +4287,8 @@
         </p:nvSpPr>
         <p:spPr>
           <a:xfrm>
-            <a:off x="2926080" y="2377440"/>
-            <a:ext cx="12435840" cy="6786666"/>
+            <a:off x="1645920" y="2194560"/>
+            <a:ext cx="14996159" cy="7132320"/>
           </a:xfrm>
           <a:prstGeom prst="rect">
             <a:avLst/>
@@ -4371,20 +4302,18 @@
           <a:p>
             <a:pPr>
               <a:lnSpc>
-                <a:spcPct val="120000"/>
+                <a:spcPct val="122000"/>
               </a:lnSpc>
               <a:spcAft>
-                <a:spcPts val="1400"/>
+                <a:spcPts val="1800"/>
               </a:spcAft>
             </a:pPr>
             <a:r>
-              <a:rPr sz="3200" b="0" dirty="0">
-                <a:solidFill>
-                  <a:srgbClr val="0F172A"/>
-                </a:solidFill>
-                <a:latin typeface="Lato" panose="020F0502020204030203" pitchFamily="34" charset="0"/>
-                <a:ea typeface="Lato" panose="020F0502020204030203" pitchFamily="34" charset="0"/>
-                <a:cs typeface="Lato" panose="020F0502020204030203" pitchFamily="34" charset="0"/>
+              <a:rPr b="0" sz="2200">
+                <a:solidFill>
+                  <a:srgbClr val="334155"/>
+                </a:solidFill>
+                <a:latin typeface="Lato"/>
               </a:rPr>
               <a:t>1. Introduction &amp; Project Scope</a:t>
             </a:r>
@@ -4392,20 +4321,18 @@
           <a:p>
             <a:pPr>
               <a:lnSpc>
-                <a:spcPct val="120000"/>
+                <a:spcPct val="122000"/>
               </a:lnSpc>
               <a:spcAft>
-                <a:spcPts val="1400"/>
+                <a:spcPts val="1800"/>
               </a:spcAft>
             </a:pPr>
             <a:r>
-              <a:rPr sz="3200" b="0" dirty="0">
-                <a:solidFill>
-                  <a:srgbClr val="0F172A"/>
-                </a:solidFill>
-                <a:latin typeface="Lato" panose="020F0502020204030203" pitchFamily="34" charset="0"/>
-                <a:ea typeface="Lato" panose="020F0502020204030203" pitchFamily="34" charset="0"/>
-                <a:cs typeface="Lato" panose="020F0502020204030203" pitchFamily="34" charset="0"/>
+              <a:rPr b="0" sz="2200">
+                <a:solidFill>
+                  <a:srgbClr val="334155"/>
+                </a:solidFill>
+                <a:latin typeface="Lato"/>
               </a:rPr>
               <a:t>2. Motivation &amp; Problem Statement</a:t>
             </a:r>
@@ -4413,148 +4340,96 @@
           <a:p>
             <a:pPr>
               <a:lnSpc>
-                <a:spcPct val="120000"/>
+                <a:spcPct val="122000"/>
               </a:lnSpc>
               <a:spcAft>
-                <a:spcPts val="1400"/>
+                <a:spcPts val="1800"/>
               </a:spcAft>
             </a:pPr>
             <a:r>
-              <a:rPr sz="3200" b="0" dirty="0">
-                <a:solidFill>
-                  <a:srgbClr val="0F172A"/>
-                </a:solidFill>
-                <a:latin typeface="Lato" panose="020F0502020204030203" pitchFamily="34" charset="0"/>
-                <a:ea typeface="Lato" panose="020F0502020204030203" pitchFamily="34" charset="0"/>
-                <a:cs typeface="Lato" panose="020F0502020204030203" pitchFamily="34" charset="0"/>
-              </a:rPr>
-              <a:t>3. Literature Survey (Pedagogical Systems &amp; Simulators)</a:t>
+              <a:rPr b="0" sz="2200">
+                <a:solidFill>
+                  <a:srgbClr val="334155"/>
+                </a:solidFill>
+                <a:latin typeface="Lato"/>
+              </a:rPr>
+              <a:t>3. Project Objectives &amp; Deliverables</a:t>
             </a:r>
           </a:p>
           <a:p>
             <a:pPr>
               <a:lnSpc>
-                <a:spcPct val="120000"/>
+                <a:spcPct val="122000"/>
               </a:lnSpc>
               <a:spcAft>
-                <a:spcPts val="1400"/>
+                <a:spcPts val="1800"/>
               </a:spcAft>
             </a:pPr>
             <a:r>
-              <a:rPr sz="3200" b="0" dirty="0">
-                <a:solidFill>
-                  <a:srgbClr val="0F172A"/>
-                </a:solidFill>
-                <a:latin typeface="Lato" panose="020F0502020204030203" pitchFamily="34" charset="0"/>
-                <a:ea typeface="Lato" panose="020F0502020204030203" pitchFamily="34" charset="0"/>
-                <a:cs typeface="Lato" panose="020F0502020204030203" pitchFamily="34" charset="0"/>
-              </a:rPr>
-              <a:t>4. Research Gap &amp; Comparative Analysis</a:t>
+              <a:rPr b="0" sz="2200">
+                <a:solidFill>
+                  <a:srgbClr val="334155"/>
+                </a:solidFill>
+                <a:latin typeface="Lato"/>
+              </a:rPr>
+              <a:t>4. Design &amp; 4-Tier System Architecture</a:t>
             </a:r>
           </a:p>
           <a:p>
             <a:pPr>
               <a:lnSpc>
-                <a:spcPct val="120000"/>
+                <a:spcPct val="122000"/>
               </a:lnSpc>
               <a:spcAft>
-                <a:spcPts val="1400"/>
+                <a:spcPts val="1800"/>
               </a:spcAft>
             </a:pPr>
             <a:r>
-              <a:rPr sz="3200" b="0" dirty="0">
-                <a:solidFill>
-                  <a:srgbClr val="0F172A"/>
-                </a:solidFill>
-                <a:latin typeface="Lato" panose="020F0502020204030203" pitchFamily="34" charset="0"/>
-                <a:ea typeface="Lato" panose="020F0502020204030203" pitchFamily="34" charset="0"/>
-                <a:cs typeface="Lato" panose="020F0502020204030203" pitchFamily="34" charset="0"/>
-              </a:rPr>
-              <a:t>5. Project Objectives &amp; Deliverables</a:t>
+              <a:rPr b="0" sz="2200">
+                <a:solidFill>
+                  <a:srgbClr val="334155"/>
+                </a:solidFill>
+                <a:latin typeface="Lato"/>
+              </a:rPr>
+              <a:t>5. Technical Stack &amp; Implementation Details</a:t>
             </a:r>
           </a:p>
           <a:p>
             <a:pPr>
               <a:lnSpc>
-                <a:spcPct val="120000"/>
+                <a:spcPct val="122000"/>
               </a:lnSpc>
               <a:spcAft>
-                <a:spcPts val="1400"/>
+                <a:spcPts val="1800"/>
               </a:spcAft>
             </a:pPr>
             <a:r>
-              <a:rPr sz="3200" b="0" dirty="0">
-                <a:solidFill>
-                  <a:srgbClr val="0F172A"/>
-                </a:solidFill>
-                <a:latin typeface="Lato" panose="020F0502020204030203" pitchFamily="34" charset="0"/>
-                <a:ea typeface="Lato" panose="020F0502020204030203" pitchFamily="34" charset="0"/>
-                <a:cs typeface="Lato" panose="020F0502020204030203" pitchFamily="34" charset="0"/>
-              </a:rPr>
-              <a:t>6. Design &amp; 4-Tier System Architecture</a:t>
+              <a:rPr b="0" sz="2200">
+                <a:solidFill>
+                  <a:srgbClr val="334155"/>
+                </a:solidFill>
+                <a:latin typeface="Lato"/>
+              </a:rPr>
+              <a:t>6. Academic References &amp; Citations</a:t>
             </a:r>
           </a:p>
           <a:p>
             <a:pPr>
               <a:lnSpc>
-                <a:spcPct val="120000"/>
+                <a:spcPct val="122000"/>
               </a:lnSpc>
               <a:spcAft>
-                <a:spcPts val="1400"/>
+                <a:spcPts val="1800"/>
               </a:spcAft>
             </a:pPr>
             <a:r>
-              <a:rPr sz="3200" b="0" dirty="0">
-                <a:solidFill>
-                  <a:srgbClr val="0F172A"/>
-                </a:solidFill>
-                <a:latin typeface="Lato" panose="020F0502020204030203" pitchFamily="34" charset="0"/>
-                <a:ea typeface="Lato" panose="020F0502020204030203" pitchFamily="34" charset="0"/>
-                <a:cs typeface="Lato" panose="020F0502020204030203" pitchFamily="34" charset="0"/>
-              </a:rPr>
-              <a:t>7. Technical Stack &amp; Implementation Details</a:t>
-            </a:r>
-          </a:p>
-          <a:p>
-            <a:pPr>
-              <a:lnSpc>
-                <a:spcPct val="120000"/>
-              </a:lnSpc>
-              <a:spcAft>
-                <a:spcPts val="1400"/>
-              </a:spcAft>
-            </a:pPr>
-            <a:r>
-              <a:rPr sz="3200" b="0" dirty="0">
-                <a:solidFill>
-                  <a:srgbClr val="0F172A"/>
-                </a:solidFill>
-                <a:latin typeface="Lato" panose="020F0502020204030203" pitchFamily="34" charset="0"/>
-                <a:ea typeface="Lato" panose="020F0502020204030203" pitchFamily="34" charset="0"/>
-                <a:cs typeface="Lato" panose="020F0502020204030203" pitchFamily="34" charset="0"/>
-              </a:rPr>
-              <a:t>8. Academic References &amp; Citations</a:t>
-            </a:r>
-          </a:p>
-          <a:p>
-            <a:pPr>
-              <a:lnSpc>
-                <a:spcPct val="120000"/>
-              </a:lnSpc>
-              <a:spcAft>
-                <a:spcPts val="1400"/>
-              </a:spcAft>
-            </a:pPr>
-            <a:r>
-              <a:rPr sz="3200" b="0" dirty="0">
-                <a:solidFill>
-                  <a:srgbClr val="0F172A"/>
-                </a:solidFill>
-                <a:latin typeface="Lato" panose="020F0502020204030203" pitchFamily="34" charset="0"/>
-                <a:ea typeface="Lato" panose="020F0502020204030203" pitchFamily="34" charset="0"/>
-                <a:cs typeface="Lato" panose="020F0502020204030203" pitchFamily="34" charset="0"/>
-              </a:rPr>
-              <a:t>9. Conclusion &amp; Project Summary</a:t>
+              <a:rPr b="0" sz="2200">
+                <a:solidFill>
+                  <a:srgbClr val="334155"/>
+                </a:solidFill>
+                <a:latin typeface="Lato"/>
+              </a:rPr>
+              <a:t>7. Conclusion &amp; Project Summary</a:t>
             </a:r>
           </a:p>
         </p:txBody>
@@ -4978,30 +4853,25 @@
         </p:nvSpPr>
         <p:spPr>
           <a:xfrm>
-            <a:off x="1723107" y="674021"/>
-            <a:ext cx="9354483" cy="1194686"/>
+            <a:off x="1097280" y="777240"/>
+            <a:ext cx="12801600" cy="1097280"/>
           </a:xfrm>
           <a:prstGeom prst="rect">
             <a:avLst/>
           </a:prstGeom>
         </p:spPr>
         <p:txBody>
-          <a:bodyPr lIns="0" tIns="0" rIns="0" bIns="0" rtlCol="0" anchor="t">
+          <a:bodyPr lIns="0" tIns="0" rIns="0" bIns="0" rtlCol="0" anchor="t" wrap="square">
             <a:spAutoFit/>
           </a:bodyPr>
           <a:lstStyle/>
           <a:p>
-            <a:pPr algn="l">
-              <a:lnSpc>
-                <a:spcPts val="10248"/>
-              </a:lnSpc>
-              <a:spcBef>
-                <a:spcPct val="0"/>
-              </a:spcBef>
-            </a:pPr>
-            <a:r>
-              <a:rPr sz="6000" dirty="0">
-                <a:latin typeface="Open Sans Extra Bold"/>
+            <a:r>
+              <a:rPr b="1" sz="4400">
+                <a:solidFill>
+                  <a:srgbClr val="0F172A"/>
+                </a:solidFill>
+                <a:latin typeface="Lato"/>
               </a:rPr>
               <a:t>Introduction</a:t>
             </a:r>
@@ -5071,8 +4941,8 @@
         </p:nvSpPr>
         <p:spPr>
           <a:xfrm>
-            <a:off x="1066801" y="2486901"/>
-            <a:ext cx="8778239" cy="6790449"/>
+            <a:off x="1097280" y="2194560"/>
+            <a:ext cx="8046720" cy="7132320"/>
           </a:xfrm>
           <a:prstGeom prst="rect">
             <a:avLst/>
@@ -5086,31 +4956,27 @@
           <a:p>
             <a:pPr>
               <a:lnSpc>
-                <a:spcPct val="120000"/>
+                <a:spcPct val="118000"/>
               </a:lnSpc>
               <a:spcAft>
                 <a:spcPts val="1400"/>
               </a:spcAft>
             </a:pPr>
             <a:r>
-              <a:rPr sz="2400" b="1" dirty="0">
+              <a:rPr b="1" sz="1700">
                 <a:solidFill>
                   <a:srgbClr val="0F172A"/>
                 </a:solidFill>
-                <a:latin typeface="Lato" panose="020F0502020204030203" pitchFamily="34" charset="0"/>
-                <a:ea typeface="Lato" panose="020F0502020204030203" pitchFamily="34" charset="0"/>
-                <a:cs typeface="Lato" panose="020F0502020204030203" pitchFamily="34" charset="0"/>
+                <a:latin typeface="Lato"/>
               </a:rPr>
               <a:t>Interactive Systems Laboratory:</a:t>
             </a:r>
             <a:r>
-              <a:rPr sz="2400" b="0" dirty="0">
+              <a:rPr b="0" sz="1700">
                 <a:solidFill>
                   <a:srgbClr val="334155"/>
                 </a:solidFill>
-                <a:latin typeface="Lato" panose="020F0502020204030203" pitchFamily="34" charset="0"/>
-                <a:ea typeface="Lato" panose="020F0502020204030203" pitchFamily="34" charset="0"/>
-                <a:cs typeface="Lato" panose="020F0502020204030203" pitchFamily="34" charset="0"/>
+                <a:latin typeface="Lato"/>
               </a:rPr>
               <a:t> Connects theoretical Operating System principles with real algorithmic execution, measurement, vector visualization, and comparative benchmarks.</a:t>
             </a:r>
@@ -5118,31 +4984,27 @@
           <a:p>
             <a:pPr>
               <a:lnSpc>
-                <a:spcPct val="120000"/>
+                <a:spcPct val="118000"/>
               </a:lnSpc>
               <a:spcAft>
                 <a:spcPts val="1400"/>
               </a:spcAft>
             </a:pPr>
             <a:r>
-              <a:rPr sz="2400" b="1" dirty="0">
+              <a:rPr b="1" sz="1700">
                 <a:solidFill>
                   <a:srgbClr val="0F172A"/>
                 </a:solidFill>
-                <a:latin typeface="Lato" panose="020F0502020204030203" pitchFamily="34" charset="0"/>
-                <a:ea typeface="Lato" panose="020F0502020204030203" pitchFamily="34" charset="0"/>
-                <a:cs typeface="Lato" panose="020F0502020204030203" pitchFamily="34" charset="0"/>
+                <a:latin typeface="Lato"/>
               </a:rPr>
               <a:t>Bridging Abstract Theory:</a:t>
             </a:r>
             <a:r>
-              <a:rPr sz="2400" b="0" dirty="0">
+              <a:rPr b="0" sz="1700">
                 <a:solidFill>
                   <a:srgbClr val="334155"/>
                 </a:solidFill>
-                <a:latin typeface="Lato" panose="020F0502020204030203" pitchFamily="34" charset="0"/>
-                <a:ea typeface="Lato" panose="020F0502020204030203" pitchFamily="34" charset="0"/>
-                <a:cs typeface="Lato" panose="020F0502020204030203" pitchFamily="34" charset="0"/>
+                <a:latin typeface="Lato"/>
               </a:rPr>
               <a:t> Eliminates black-box confusion by demystifying how CPU dispatching, dynamic memory placement, virtual paging, and deadlocks function in practice.</a:t>
             </a:r>
@@ -5150,85 +5012,55 @@
           <a:p>
             <a:pPr>
               <a:lnSpc>
-                <a:spcPct val="120000"/>
+                <a:spcPct val="118000"/>
               </a:lnSpc>
               <a:spcAft>
                 <a:spcPts val="1400"/>
               </a:spcAft>
             </a:pPr>
             <a:r>
-              <a:rPr sz="2400" b="1" dirty="0">
+              <a:rPr b="1" sz="1700">
                 <a:solidFill>
                   <a:srgbClr val="0F172A"/>
                 </a:solidFill>
-                <a:latin typeface="Lato" panose="020F0502020204030203" pitchFamily="34" charset="0"/>
-                <a:ea typeface="Lato" panose="020F0502020204030203" pitchFamily="34" charset="0"/>
-                <a:cs typeface="Lato" panose="020F0502020204030203" pitchFamily="34" charset="0"/>
+                <a:latin typeface="Lato"/>
               </a:rPr>
               <a:t>Dual-Pillar Architecture:</a:t>
             </a:r>
             <a:r>
-              <a:rPr sz="2400" b="0" dirty="0">
+              <a:rPr b="0" sz="1700">
                 <a:solidFill>
                   <a:srgbClr val="334155"/>
                 </a:solidFill>
-                <a:latin typeface="Lato" panose="020F0502020204030203" pitchFamily="34" charset="0"/>
-                <a:ea typeface="Lato" panose="020F0502020204030203" pitchFamily="34" charset="0"/>
-                <a:cs typeface="Lato" panose="020F0502020204030203" pitchFamily="34" charset="0"/>
-              </a:rPr>
-              <a:t> Couples an authoritative C++20 simulation core with real Linux/POSIX kernel interfaces (fork/</a:t>
-            </a:r>
-            <a:r>
-              <a:rPr sz="2400" b="0" dirty="0" err="1">
-                <a:solidFill>
-                  <a:srgbClr val="334155"/>
-                </a:solidFill>
-                <a:latin typeface="Lato" panose="020F0502020204030203" pitchFamily="34" charset="0"/>
-                <a:ea typeface="Lato" panose="020F0502020204030203" pitchFamily="34" charset="0"/>
-                <a:cs typeface="Lato" panose="020F0502020204030203" pitchFamily="34" charset="0"/>
-              </a:rPr>
-              <a:t>execve</a:t>
-            </a:r>
-            <a:r>
-              <a:rPr sz="2400" b="0" dirty="0">
-                <a:solidFill>
-                  <a:srgbClr val="334155"/>
-                </a:solidFill>
-                <a:latin typeface="Lato" panose="020F0502020204030203" pitchFamily="34" charset="0"/>
-                <a:ea typeface="Lato" panose="020F0502020204030203" pitchFamily="34" charset="0"/>
-                <a:cs typeface="Lato" panose="020F0502020204030203" pitchFamily="34" charset="0"/>
-              </a:rPr>
-              <a:t> process trees, anonymous pipes, semaphores, and /proc telemetry).</a:t>
+                <a:latin typeface="Lato"/>
+              </a:rPr>
+              <a:t> Couples an authoritative C++20 simulation core with real Linux/POSIX kernel interfaces (fork/execve process trees, anonymous pipes, semaphores, and /proc telemetry).</a:t>
             </a:r>
           </a:p>
           <a:p>
             <a:pPr>
               <a:lnSpc>
-                <a:spcPct val="120000"/>
+                <a:spcPct val="118000"/>
               </a:lnSpc>
               <a:spcAft>
                 <a:spcPts val="1400"/>
               </a:spcAft>
             </a:pPr>
             <a:r>
-              <a:rPr sz="2400" b="1" dirty="0">
+              <a:rPr b="1" sz="1700">
                 <a:solidFill>
                   <a:srgbClr val="0F172A"/>
                 </a:solidFill>
-                <a:latin typeface="Lato" panose="020F0502020204030203" pitchFamily="34" charset="0"/>
-                <a:ea typeface="Lato" panose="020F0502020204030203" pitchFamily="34" charset="0"/>
-                <a:cs typeface="Lato" panose="020F0502020204030203" pitchFamily="34" charset="0"/>
+                <a:latin typeface="Lato"/>
               </a:rPr>
               <a:t>Production-Grade Web Experience:</a:t>
             </a:r>
             <a:r>
-              <a:rPr sz="2400" b="0" dirty="0">
+              <a:rPr b="0" sz="1700">
                 <a:solidFill>
                   <a:srgbClr val="334155"/>
                 </a:solidFill>
-                <a:latin typeface="Lato" panose="020F0502020204030203" pitchFamily="34" charset="0"/>
-                <a:ea typeface="Lato" panose="020F0502020204030203" pitchFamily="34" charset="0"/>
-                <a:cs typeface="Lato" panose="020F0502020204030203" pitchFamily="34" charset="0"/>
+                <a:latin typeface="Lato"/>
               </a:rPr>
               <a:t> Delivers an accessible, zero-dependency modern light-mode engineering platform inspired by Linear/Geist design guidelines across 10 distinct OS domains.</a:t>
             </a:r>
@@ -5257,8 +5089,8 @@
         </p:blipFill>
         <p:spPr>
           <a:xfrm>
-            <a:off x="14767889" y="0"/>
-            <a:ext cx="2475191" cy="2097206"/>
+            <a:off x="14767559" y="0"/>
+            <a:ext cx="2478024" cy="2093976"/>
           </a:xfrm>
           <a:prstGeom prst="rect">
             <a:avLst/>
@@ -5281,8 +5113,8 @@
         </p:blipFill>
         <p:spPr>
           <a:xfrm>
-            <a:off x="9369184" y="2019300"/>
-            <a:ext cx="8510752" cy="6019800"/>
+            <a:off x="9509760" y="2194560"/>
+            <a:ext cx="8046720" cy="5303520"/>
           </a:xfrm>
           <a:prstGeom prst="rect">
             <a:avLst/>
@@ -5650,30 +5482,25 @@
         </p:nvSpPr>
         <p:spPr>
           <a:xfrm>
-            <a:off x="1723107" y="900442"/>
-            <a:ext cx="9354483" cy="1194686"/>
+            <a:off x="1097280" y="777240"/>
+            <a:ext cx="12801600" cy="1097280"/>
           </a:xfrm>
           <a:prstGeom prst="rect">
             <a:avLst/>
           </a:prstGeom>
         </p:spPr>
         <p:txBody>
-          <a:bodyPr lIns="0" tIns="0" rIns="0" bIns="0" rtlCol="0" anchor="t">
+          <a:bodyPr lIns="0" tIns="0" rIns="0" bIns="0" rtlCol="0" anchor="t" wrap="square">
             <a:spAutoFit/>
           </a:bodyPr>
           <a:lstStyle/>
           <a:p>
-            <a:pPr algn="l">
-              <a:lnSpc>
-                <a:spcPts val="10248"/>
-              </a:lnSpc>
-              <a:spcBef>
-                <a:spcPct val="0"/>
-              </a:spcBef>
-            </a:pPr>
-            <a:r>
-              <a:rPr sz="6000">
-                <a:latin typeface="Open Sans Extra Bold"/>
+            <a:r>
+              <a:rPr b="1" sz="4400">
+                <a:solidFill>
+                  <a:srgbClr val="0F172A"/>
+                </a:solidFill>
+                <a:latin typeface="Lato"/>
               </a:rPr>
               <a:t>Motivation</a:t>
             </a:r>
@@ -5743,8 +5570,8 @@
         </p:nvSpPr>
         <p:spPr>
           <a:xfrm>
-            <a:off x="1097280" y="2286000"/>
-            <a:ext cx="8412480" cy="6858000"/>
+            <a:off x="1097280" y="2194560"/>
+            <a:ext cx="8046720" cy="7132320"/>
           </a:xfrm>
           <a:prstGeom prst="rect">
             <a:avLst/>
@@ -5758,27 +5585,27 @@
           <a:p>
             <a:pPr>
               <a:lnSpc>
-                <a:spcPct val="120000"/>
+                <a:spcPct val="118000"/>
               </a:lnSpc>
               <a:spcAft>
                 <a:spcPts val="1400"/>
               </a:spcAft>
             </a:pPr>
             <a:r>
-              <a:rPr sz="1800" b="1">
+              <a:rPr b="1" sz="1700">
                 <a:solidFill>
                   <a:srgbClr val="0F172A"/>
                 </a:solidFill>
-                <a:latin typeface="Open Sans"/>
+                <a:latin typeface="Lato"/>
               </a:rPr>
               <a:t>High Cognitive Barrier:</a:t>
             </a:r>
             <a:r>
-              <a:rPr sz="1800" b="0">
+              <a:rPr b="0" sz="1700">
                 <a:solidFill>
                   <a:srgbClr val="334155"/>
                 </a:solidFill>
-                <a:latin typeface="Open Sans"/>
+                <a:latin typeface="Lato"/>
               </a:rPr>
               <a:t> Abstract kernel concepts (address translation, multi-queue preemption, Belady's anomaly) are hidden in kernel space and difficult to grasp from static textbook diagrams.</a:t>
             </a:r>
@@ -5786,27 +5613,27 @@
           <a:p>
             <a:pPr>
               <a:lnSpc>
-                <a:spcPct val="120000"/>
+                <a:spcPct val="118000"/>
               </a:lnSpc>
               <a:spcAft>
                 <a:spcPts val="1400"/>
               </a:spcAft>
             </a:pPr>
             <a:r>
-              <a:rPr sz="1800" b="1">
+              <a:rPr b="1" sz="1700">
                 <a:solidFill>
                   <a:srgbClr val="0F172A"/>
                 </a:solidFill>
-                <a:latin typeface="Open Sans"/>
+                <a:latin typeface="Lato"/>
               </a:rPr>
               <a:t>Severe Tool Fragmentation:</a:t>
             </a:r>
             <a:r>
-              <a:rPr sz="1800" b="0">
+              <a:rPr b="0" sz="1700">
                 <a:solidFill>
                   <a:srgbClr val="334155"/>
                 </a:solidFill>
-                <a:latin typeface="Open Sans"/>
+                <a:latin typeface="Lato"/>
               </a:rPr>
               <a:t> Students are forced to switch between disconnected, single-topic CLI programs or abandoned 2000s Java applets with no unified workflow.</a:t>
             </a:r>
@@ -5814,27 +5641,27 @@
           <a:p>
             <a:pPr>
               <a:lnSpc>
-                <a:spcPct val="120000"/>
+                <a:spcPct val="118000"/>
               </a:lnSpc>
               <a:spcAft>
                 <a:spcPts val="1400"/>
               </a:spcAft>
             </a:pPr>
             <a:r>
-              <a:rPr sz="1800" b="1">
+              <a:rPr b="1" sz="1700">
                 <a:solidFill>
                   <a:srgbClr val="0F172A"/>
                 </a:solidFill>
-                <a:latin typeface="Open Sans"/>
+                <a:latin typeface="Lato"/>
               </a:rPr>
               <a:t>Lack of Empirical Verification:</a:t>
             </a:r>
             <a:r>
-              <a:rPr sz="1800" b="0">
+              <a:rPr b="0" sz="1700">
                 <a:solidFill>
                   <a:srgbClr val="334155"/>
                 </a:solidFill>
-                <a:latin typeface="Open Sans"/>
+                <a:latin typeface="Lato"/>
               </a:rPr>
               <a:t> Inability to systematically test and benchmark edge cases (convoy effects, priority inversions, memory fragmentation, and safe vs unsafe state sequences).</a:t>
             </a:r>
@@ -5842,27 +5669,27 @@
           <a:p>
             <a:pPr>
               <a:lnSpc>
-                <a:spcPct val="120000"/>
+                <a:spcPct val="118000"/>
               </a:lnSpc>
               <a:spcAft>
                 <a:spcPts val="1400"/>
               </a:spcAft>
             </a:pPr>
             <a:r>
-              <a:rPr sz="1800" b="1">
+              <a:rPr b="1" sz="1700">
                 <a:solidFill>
                   <a:srgbClr val="0F172A"/>
                 </a:solidFill>
-                <a:latin typeface="Open Sans"/>
+                <a:latin typeface="Lato"/>
               </a:rPr>
               <a:t>Active Learning Methodology:</a:t>
             </a:r>
             <a:r>
-              <a:rPr sz="1800" b="0">
+              <a:rPr b="0" sz="1700">
                 <a:solidFill>
                   <a:srgbClr val="334155"/>
                 </a:solidFill>
-                <a:latin typeface="Open Sans"/>
+                <a:latin typeface="Lato"/>
               </a:rPr>
               <a:t> Addresses the proven pedagogical pipeline: Learn -&gt; Configure Workloads -&gt; Execute C++ Simulation -&gt; Observe Vector Visualizers -&gt; Measure Metrics -&gt; Analyze.</a:t>
             </a:r>
@@ -5891,8 +5718,8 @@
         </p:blipFill>
         <p:spPr>
           <a:xfrm>
-            <a:off x="14762973" y="-2078"/>
-            <a:ext cx="2475191" cy="2097206"/>
+            <a:off x="14767559" y="0"/>
+            <a:ext cx="2478024" cy="2093976"/>
           </a:xfrm>
           <a:prstGeom prst="rect">
             <a:avLst/>
@@ -5915,8 +5742,8 @@
         </p:blipFill>
         <p:spPr>
           <a:xfrm>
-            <a:off x="9875520" y="2377440"/>
-            <a:ext cx="7498079" cy="5303520"/>
+            <a:off x="9509760" y="2194560"/>
+            <a:ext cx="8046720" cy="5303520"/>
           </a:xfrm>
           <a:prstGeom prst="rect">
             <a:avLst/>
@@ -6284,30 +6111,25 @@
         </p:nvSpPr>
         <p:spPr>
           <a:xfrm>
-            <a:off x="1723107" y="900442"/>
-            <a:ext cx="9354483" cy="1194686"/>
+            <a:off x="1097280" y="777240"/>
+            <a:ext cx="12801600" cy="1097280"/>
           </a:xfrm>
           <a:prstGeom prst="rect">
             <a:avLst/>
           </a:prstGeom>
         </p:spPr>
         <p:txBody>
-          <a:bodyPr lIns="0" tIns="0" rIns="0" bIns="0" rtlCol="0" anchor="t">
+          <a:bodyPr lIns="0" tIns="0" rIns="0" bIns="0" rtlCol="0" anchor="t" wrap="square">
             <a:spAutoFit/>
           </a:bodyPr>
           <a:lstStyle/>
           <a:p>
-            <a:pPr algn="l">
-              <a:lnSpc>
-                <a:spcPts val="10248"/>
-              </a:lnSpc>
-              <a:spcBef>
-                <a:spcPct val="0"/>
-              </a:spcBef>
-            </a:pPr>
-            <a:r>
-              <a:rPr sz="6000">
-                <a:latin typeface="Open Sans Extra Bold"/>
+            <a:r>
+              <a:rPr b="1" sz="4400">
+                <a:solidFill>
+                  <a:srgbClr val="0F172A"/>
+                </a:solidFill>
+                <a:latin typeface="Lato"/>
               </a:rPr>
               <a:t>Objective</a:t>
             </a:r>
@@ -6377,8 +6199,8 @@
         </p:nvSpPr>
         <p:spPr>
           <a:xfrm>
-            <a:off x="1828800" y="2377440"/>
-            <a:ext cx="14630400" cy="6858000"/>
+            <a:off x="1645920" y="2194560"/>
+            <a:ext cx="14996159" cy="7132320"/>
           </a:xfrm>
           <a:prstGeom prst="rect">
             <a:avLst/>
@@ -6392,27 +6214,27 @@
           <a:p>
             <a:pPr>
               <a:lnSpc>
-                <a:spcPct val="120000"/>
+                <a:spcPct val="122000"/>
               </a:lnSpc>
               <a:spcAft>
-                <a:spcPts val="1400"/>
+                <a:spcPts val="1800"/>
               </a:spcAft>
             </a:pPr>
             <a:r>
-              <a:rPr sz="2000" b="1">
+              <a:rPr b="1" sz="1900">
                 <a:solidFill>
                   <a:srgbClr val="0F172A"/>
                 </a:solidFill>
-                <a:latin typeface="Open Sans"/>
+                <a:latin typeface="Lato"/>
               </a:rPr>
               <a:t>Unified 10-Module Suite:</a:t>
             </a:r>
             <a:r>
-              <a:rPr sz="2000" b="0">
+              <a:rPr b="0" sz="1900">
                 <a:solidFill>
                   <a:srgbClr val="334155"/>
                 </a:solidFill>
-                <a:latin typeface="Open Sans"/>
+                <a:latin typeface="Lato"/>
               </a:rPr>
               <a:t> Build a comprehensive laboratory covering CPU Scheduling, Dynamic Memory, Page Replacement, Banker's Deadlock Avoidance, Disk Arm Seek, Virtual Memory MMU, File Systems, Process Lifecycle, POSIX Concurrency, and Host Telemetry.</a:t>
             </a:r>
@@ -6420,27 +6242,27 @@
           <a:p>
             <a:pPr>
               <a:lnSpc>
-                <a:spcPct val="120000"/>
+                <a:spcPct val="122000"/>
               </a:lnSpc>
               <a:spcAft>
-                <a:spcPts val="1400"/>
+                <a:spcPts val="1800"/>
               </a:spcAft>
             </a:pPr>
             <a:r>
-              <a:rPr sz="2000" b="1">
+              <a:rPr b="1" sz="1900">
                 <a:solidFill>
                   <a:srgbClr val="0F172A"/>
                 </a:solidFill>
-                <a:latin typeface="Open Sans"/>
+                <a:latin typeface="Lato"/>
               </a:rPr>
               <a:t>High-Precision Vector Visualizers:</a:t>
             </a:r>
             <a:r>
-              <a:rPr sz="2000" b="0">
+              <a:rPr b="0" sz="1900">
                 <a:solidFill>
                   <a:srgbClr val="334155"/>
                 </a:solidFill>
-                <a:latin typeface="Open Sans"/>
+                <a:latin typeface="Lato"/>
               </a:rPr>
               <a:t> Implement native SVG rendering for Gantt charts with millisecond guidelines, memory maps with fragmentation analysis, step-by-step frame steppers, and cylinder seek plots.</a:t>
             </a:r>
@@ -6448,27 +6270,27 @@
           <a:p>
             <a:pPr>
               <a:lnSpc>
-                <a:spcPct val="120000"/>
+                <a:spcPct val="122000"/>
               </a:lnSpc>
               <a:spcAft>
-                <a:spcPts val="1400"/>
+                <a:spcPts val="1800"/>
               </a:spcAft>
             </a:pPr>
             <a:r>
-              <a:rPr sz="2000" b="1">
+              <a:rPr b="1" sz="1900">
                 <a:solidFill>
                   <a:srgbClr val="0F172A"/>
                 </a:solidFill>
-                <a:latin typeface="Open Sans"/>
+                <a:latin typeface="Lato"/>
               </a:rPr>
               <a:t>Authoritative C++ Core &amp; Deterministic Benchmarking:</a:t>
             </a:r>
             <a:r>
-              <a:rPr sz="2000" b="0">
+              <a:rPr b="0" sz="1900">
                 <a:solidFill>
                   <a:srgbClr val="334155"/>
                 </a:solidFill>
-                <a:latin typeface="Open Sans"/>
+                <a:latin typeface="Lato"/>
               </a:rPr>
               <a:t> Connect simulations to a compiled C++20 engine verified by 356 GoogleTests, providing reproducible textbook presets (Belady's anomaly, convoy effect, safe sequence).</a:t>
             </a:r>
@@ -6476,27 +6298,27 @@
           <a:p>
             <a:pPr>
               <a:lnSpc>
-                <a:spcPct val="120000"/>
+                <a:spcPct val="122000"/>
               </a:lnSpc>
               <a:spcAft>
-                <a:spcPts val="1400"/>
+                <a:spcPts val="1800"/>
               </a:spcAft>
             </a:pPr>
             <a:r>
-              <a:rPr sz="2000" b="1">
+              <a:rPr b="1" sz="1900">
                 <a:solidFill>
                   <a:srgbClr val="0F172A"/>
                 </a:solidFill>
-                <a:latin typeface="Open Sans"/>
+                <a:latin typeface="Lato"/>
               </a:rPr>
               <a:t>Dual Modern Interface:</a:t>
             </a:r>
             <a:r>
-              <a:rPr sz="2000" b="0">
+              <a:rPr b="0" sz="1900">
                 <a:solidFill>
                   <a:srgbClr val="334155"/>
                 </a:solidFill>
-                <a:latin typeface="Open Sans"/>
+                <a:latin typeface="Lato"/>
               </a:rPr>
               <a:t> Deliver a zero-dependency light-mode web application and a native PySide6 desktop GUI with 150 automated end-to-end pytest tests.</a:t>
             </a:r>
@@ -6525,8 +6347,8 @@
         </p:blipFill>
         <p:spPr>
           <a:xfrm>
-            <a:off x="14762973" y="-2078"/>
-            <a:ext cx="2475191" cy="2097206"/>
+            <a:off x="14767559" y="0"/>
+            <a:ext cx="2478024" cy="2093976"/>
           </a:xfrm>
           <a:prstGeom prst="rect">
             <a:avLst/>
@@ -6894,30 +6716,25 @@
         </p:nvSpPr>
         <p:spPr>
           <a:xfrm>
-            <a:off x="1723107" y="900442"/>
-            <a:ext cx="9354483" cy="1194686"/>
+            <a:off x="1097280" y="777240"/>
+            <a:ext cx="12801600" cy="1097280"/>
           </a:xfrm>
           <a:prstGeom prst="rect">
             <a:avLst/>
           </a:prstGeom>
         </p:spPr>
         <p:txBody>
-          <a:bodyPr lIns="0" tIns="0" rIns="0" bIns="0" rtlCol="0" anchor="t">
+          <a:bodyPr lIns="0" tIns="0" rIns="0" bIns="0" rtlCol="0" anchor="t" wrap="square">
             <a:spAutoFit/>
           </a:bodyPr>
           <a:lstStyle/>
           <a:p>
-            <a:pPr algn="l">
-              <a:lnSpc>
-                <a:spcPts val="10248"/>
-              </a:lnSpc>
-              <a:spcBef>
-                <a:spcPct val="0"/>
-              </a:spcBef>
-            </a:pPr>
-            <a:r>
-              <a:rPr sz="6000">
-                <a:latin typeface="Open Sans Extra Bold"/>
+            <a:r>
+              <a:rPr b="1" sz="4400">
+                <a:solidFill>
+                  <a:srgbClr val="0F172A"/>
+                </a:solidFill>
+                <a:latin typeface="Lato"/>
               </a:rPr>
               <a:t>System Architecture</a:t>
             </a:r>
@@ -6987,8 +6804,8 @@
         </p:nvSpPr>
         <p:spPr>
           <a:xfrm>
-            <a:off x="1097280" y="2286000"/>
-            <a:ext cx="8412480" cy="6858000"/>
+            <a:off x="1097280" y="2194560"/>
+            <a:ext cx="8046720" cy="7132320"/>
           </a:xfrm>
           <a:prstGeom prst="rect">
             <a:avLst/>
@@ -7002,27 +6819,27 @@
           <a:p>
             <a:pPr>
               <a:lnSpc>
-                <a:spcPct val="120000"/>
+                <a:spcPct val="118000"/>
               </a:lnSpc>
               <a:spcAft>
                 <a:spcPts val="1400"/>
               </a:spcAft>
             </a:pPr>
             <a:r>
-              <a:rPr sz="1800" b="1">
+              <a:rPr b="1" sz="1700">
                 <a:solidFill>
                   <a:srgbClr val="0F172A"/>
                 </a:solidFill>
-                <a:latin typeface="Open Sans"/>
+                <a:latin typeface="Lato"/>
               </a:rPr>
               <a:t>Tier 1 (Presentation Layer):</a:t>
             </a:r>
             <a:r>
-              <a:rPr sz="1800" b="0">
+              <a:rPr b="0" sz="1700">
                 <a:solidFill>
                   <a:srgbClr val="334155"/>
                 </a:solidFill>
-                <a:latin typeface="Open Sans"/>
+                <a:latin typeface="Lato"/>
               </a:rPr>
               <a:t> Modern Light-Mode Single Page Application (HTML5 / CSS3 / Vanilla ES6+) + Native PySide6 (Qt 6) Desktop GUI. Features custom inline SVG stroke icons.</a:t>
             </a:r>
@@ -7030,27 +6847,27 @@
           <a:p>
             <a:pPr>
               <a:lnSpc>
-                <a:spcPct val="120000"/>
+                <a:spcPct val="118000"/>
               </a:lnSpc>
               <a:spcAft>
                 <a:spcPts val="1400"/>
               </a:spcAft>
             </a:pPr>
             <a:r>
-              <a:rPr sz="1800" b="1">
+              <a:rPr b="1" sz="1700">
                 <a:solidFill>
                   <a:srgbClr val="0F172A"/>
                 </a:solidFill>
-                <a:latin typeface="Open Sans"/>
+                <a:latin typeface="Lato"/>
               </a:rPr>
               <a:t>Tier 2 (Application &amp; REST API Layer):</a:t>
             </a:r>
             <a:r>
-              <a:rPr sz="1800" b="0">
+              <a:rPr b="0" sz="1700">
                 <a:solidFill>
                   <a:srgbClr val="334155"/>
                 </a:solidFill>
-                <a:latin typeface="Open Sans"/>
+                <a:latin typeface="Lato"/>
               </a:rPr>
               <a:t> Python 3.12 Multi-Threaded HTTP Server (ThreadingHTTPServer) with zero external pip dependencies routing JSON endpoints (/api/*/run).</a:t>
             </a:r>
@@ -7058,27 +6875,27 @@
           <a:p>
             <a:pPr>
               <a:lnSpc>
-                <a:spcPct val="120000"/>
+                <a:spcPct val="118000"/>
               </a:lnSpc>
               <a:spcAft>
                 <a:spcPts val="1400"/>
               </a:spcAft>
             </a:pPr>
             <a:r>
-              <a:rPr sz="1800" b="1">
+              <a:rPr b="1" sz="1700">
                 <a:solidFill>
                   <a:srgbClr val="0F172A"/>
                 </a:solidFill>
-                <a:latin typeface="Open Sans"/>
+                <a:latin typeface="Lato"/>
               </a:rPr>
               <a:t>Tier 3 (Platform Execution Bridge):</a:t>
             </a:r>
             <a:r>
-              <a:rPr sz="1800" b="0">
+              <a:rPr b="0" sz="1700">
                 <a:solidFill>
                   <a:srgbClr val="334155"/>
                 </a:solidFill>
-                <a:latin typeface="Open Sans"/>
+                <a:latin typeface="Lato"/>
               </a:rPr>
               <a:t> Automated environment runner supporting native Linux and Windows WSL 2 (wsl.exe), handling CLI argument marshaling and telemetry streaming.</a:t>
             </a:r>
@@ -7086,27 +6903,27 @@
           <a:p>
             <a:pPr>
               <a:lnSpc>
-                <a:spcPct val="120000"/>
+                <a:spcPct val="118000"/>
               </a:lnSpc>
               <a:spcAft>
                 <a:spcPts val="1400"/>
               </a:spcAft>
             </a:pPr>
             <a:r>
-              <a:rPr sz="1800" b="1">
+              <a:rPr b="1" sz="1700">
                 <a:solidFill>
                   <a:srgbClr val="0F172A"/>
                 </a:solidFill>
-                <a:latin typeface="Open Sans"/>
+                <a:latin typeface="Lato"/>
               </a:rPr>
               <a:t>Tier 4 (Authoritative Simulation Core):</a:t>
             </a:r>
             <a:r>
-              <a:rPr sz="1800" b="0">
+              <a:rPr b="0" sz="1700">
                 <a:solidFill>
                   <a:srgbClr val="334155"/>
                 </a:solidFill>
-                <a:latin typeface="Open Sans"/>
+                <a:latin typeface="Lato"/>
               </a:rPr>
               <a:t> Compiled C++20 engine executing deterministic algorithms, real POSIX system calls (fork, execve, pipe, sem_t), and /proc parser.</a:t>
             </a:r>
@@ -7135,8 +6952,8 @@
         </p:blipFill>
         <p:spPr>
           <a:xfrm>
-            <a:off x="14762973" y="0"/>
-            <a:ext cx="2475191" cy="2097206"/>
+            <a:off x="14767559" y="0"/>
+            <a:ext cx="2478024" cy="2093976"/>
           </a:xfrm>
           <a:prstGeom prst="rect">
             <a:avLst/>
@@ -7159,8 +6976,8 @@
         </p:blipFill>
         <p:spPr>
           <a:xfrm>
-            <a:off x="9875520" y="2377440"/>
-            <a:ext cx="7498079" cy="5303520"/>
+            <a:off x="9509760" y="2194560"/>
+            <a:ext cx="8046720" cy="5303520"/>
           </a:xfrm>
           <a:prstGeom prst="rect">
             <a:avLst/>
@@ -7528,30 +7345,25 @@
         </p:nvSpPr>
         <p:spPr>
           <a:xfrm>
-            <a:off x="1723107" y="900442"/>
-            <a:ext cx="9354483" cy="1194686"/>
+            <a:off x="1097280" y="777240"/>
+            <a:ext cx="12801600" cy="1097280"/>
           </a:xfrm>
           <a:prstGeom prst="rect">
             <a:avLst/>
           </a:prstGeom>
         </p:spPr>
         <p:txBody>
-          <a:bodyPr lIns="0" tIns="0" rIns="0" bIns="0" rtlCol="0" anchor="t">
+          <a:bodyPr lIns="0" tIns="0" rIns="0" bIns="0" rtlCol="0" anchor="t" wrap="square">
             <a:spAutoFit/>
           </a:bodyPr>
           <a:lstStyle/>
           <a:p>
-            <a:pPr algn="l">
-              <a:lnSpc>
-                <a:spcPts val="10248"/>
-              </a:lnSpc>
-              <a:spcBef>
-                <a:spcPct val="0"/>
-              </a:spcBef>
-            </a:pPr>
-            <a:r>
-              <a:rPr sz="6000">
-                <a:latin typeface="Open Sans Extra Bold"/>
+            <a:r>
+              <a:rPr b="1" sz="4400">
+                <a:solidFill>
+                  <a:srgbClr val="0F172A"/>
+                </a:solidFill>
+                <a:latin typeface="Lato"/>
               </a:rPr>
               <a:t>Tech Stack</a:t>
             </a:r>
@@ -7621,8 +7433,8 @@
         </p:nvSpPr>
         <p:spPr>
           <a:xfrm>
-            <a:off x="1828800" y="2377440"/>
-            <a:ext cx="14630400" cy="6858000"/>
+            <a:off x="1645920" y="2194560"/>
+            <a:ext cx="14996159" cy="7132320"/>
           </a:xfrm>
           <a:prstGeom prst="rect">
             <a:avLst/>
@@ -7636,27 +7448,27 @@
           <a:p>
             <a:pPr>
               <a:lnSpc>
-                <a:spcPct val="120000"/>
+                <a:spcPct val="122000"/>
               </a:lnSpc>
               <a:spcAft>
-                <a:spcPts val="1400"/>
+                <a:spcPts val="2000"/>
               </a:spcAft>
             </a:pPr>
             <a:r>
-              <a:rPr sz="2000" b="1">
+              <a:rPr b="1" sz="2000">
                 <a:solidFill>
                   <a:srgbClr val="0F172A"/>
                 </a:solidFill>
-                <a:latin typeface="Open Sans"/>
+                <a:latin typeface="Lato"/>
               </a:rPr>
               <a:t>Core Simulation Engine:</a:t>
             </a:r>
             <a:r>
-              <a:rPr sz="2000" b="0">
+              <a:rPr b="0" sz="2000">
                 <a:solidFill>
                   <a:srgbClr val="334155"/>
                 </a:solidFill>
-                <a:latin typeface="Open Sans"/>
+                <a:latin typeface="Lato"/>
               </a:rPr>
               <a:t> C++20 (Modern ISO C++), CMake 3.20+, GoogleTest (356 unit tests), POSIX APIs (&lt;unistd.h&gt;, &lt;semaphore.h&gt;).</a:t>
             </a:r>
@@ -7664,27 +7476,27 @@
           <a:p>
             <a:pPr>
               <a:lnSpc>
-                <a:spcPct val="120000"/>
+                <a:spcPct val="122000"/>
               </a:lnSpc>
               <a:spcAft>
-                <a:spcPts val="1400"/>
+                <a:spcPts val="2000"/>
               </a:spcAft>
             </a:pPr>
             <a:r>
-              <a:rPr sz="2000" b="1">
+              <a:rPr b="1" sz="2000">
                 <a:solidFill>
                   <a:srgbClr val="0F172A"/>
                 </a:solidFill>
-                <a:latin typeface="Open Sans"/>
+                <a:latin typeface="Lato"/>
               </a:rPr>
               <a:t>Backend &amp; API Server:</a:t>
             </a:r>
             <a:r>
-              <a:rPr sz="2000" b="0">
+              <a:rPr b="0" sz="2000">
                 <a:solidFill>
                   <a:srgbClr val="334155"/>
                 </a:solidFill>
-                <a:latin typeface="Open Sans"/>
+                <a:latin typeface="Lato"/>
               </a:rPr>
               <a:t> Python 3.12 Standard Library (http.server.ThreadingHTTPServer - zero external pip dependencies), Subprocess / WSL 2 execution runner.</a:t>
             </a:r>
@@ -7692,27 +7504,27 @@
           <a:p>
             <a:pPr>
               <a:lnSpc>
-                <a:spcPct val="120000"/>
+                <a:spcPct val="122000"/>
               </a:lnSpc>
               <a:spcAft>
-                <a:spcPts val="1400"/>
+                <a:spcPts val="2000"/>
               </a:spcAft>
             </a:pPr>
             <a:r>
-              <a:rPr sz="2000" b="1">
+              <a:rPr b="1" sz="2000">
                 <a:solidFill>
                   <a:srgbClr val="0F172A"/>
                 </a:solidFill>
-                <a:latin typeface="Open Sans"/>
+                <a:latin typeface="Lato"/>
               </a:rPr>
               <a:t>Modern Web Frontend:</a:t>
             </a:r>
             <a:r>
-              <a:rPr sz="2000" b="0">
+              <a:rPr b="0" sz="2000">
                 <a:solidFill>
                   <a:srgbClr val="334155"/>
                 </a:solidFill>
-                <a:latin typeface="Open Sans"/>
+                <a:latin typeface="Lato"/>
               </a:rPr>
               <a:t> Vanilla JavaScript (ES6+), HTML5, CSS3 Custom Properties (Linear/Geist Light Mode Design System), Vector SVG Engine (Lucide-standard icons).</a:t>
             </a:r>
@@ -7720,27 +7532,27 @@
           <a:p>
             <a:pPr>
               <a:lnSpc>
-                <a:spcPct val="120000"/>
+                <a:spcPct val="122000"/>
               </a:lnSpc>
               <a:spcAft>
-                <a:spcPts val="1400"/>
+                <a:spcPts val="2000"/>
               </a:spcAft>
             </a:pPr>
             <a:r>
-              <a:rPr sz="2000" b="1">
+              <a:rPr b="1" sz="2000">
                 <a:solidFill>
                   <a:srgbClr val="0F172A"/>
                 </a:solidFill>
-                <a:latin typeface="Open Sans"/>
+                <a:latin typeface="Lato"/>
               </a:rPr>
               <a:t>Desktop GUI &amp; Testing:</a:t>
             </a:r>
             <a:r>
-              <a:rPr sz="2000" b="0">
+              <a:rPr b="0" sz="2000">
                 <a:solidFill>
                   <a:srgbClr val="334155"/>
                 </a:solidFill>
-                <a:latin typeface="Open Sans"/>
+                <a:latin typeface="Lato"/>
               </a:rPr>
               <a:t> PySide6 (Qt 6), Pytest 9.2 (150 automated tests), GitHub Actions CI pipeline.</a:t>
             </a:r>
@@ -7769,8 +7581,8 @@
         </p:blipFill>
         <p:spPr>
           <a:xfrm>
-            <a:off x="14762973" y="0"/>
-            <a:ext cx="2475191" cy="2097206"/>
+            <a:off x="14767559" y="0"/>
+            <a:ext cx="2478024" cy="2093976"/>
           </a:xfrm>
           <a:prstGeom prst="rect">
             <a:avLst/>
@@ -8138,30 +7950,25 @@
         </p:nvSpPr>
         <p:spPr>
           <a:xfrm>
-            <a:off x="1723107" y="900442"/>
-            <a:ext cx="9354483" cy="1194686"/>
+            <a:off x="1097280" y="777240"/>
+            <a:ext cx="12801600" cy="1097280"/>
           </a:xfrm>
           <a:prstGeom prst="rect">
             <a:avLst/>
           </a:prstGeom>
         </p:spPr>
         <p:txBody>
-          <a:bodyPr lIns="0" tIns="0" rIns="0" bIns="0" rtlCol="0" anchor="t">
+          <a:bodyPr lIns="0" tIns="0" rIns="0" bIns="0" rtlCol="0" anchor="t" wrap="square">
             <a:spAutoFit/>
           </a:bodyPr>
           <a:lstStyle/>
           <a:p>
-            <a:pPr algn="l">
-              <a:lnSpc>
-                <a:spcPts val="10248"/>
-              </a:lnSpc>
-              <a:spcBef>
-                <a:spcPct val="0"/>
-              </a:spcBef>
-            </a:pPr>
-            <a:r>
-              <a:rPr sz="6000">
-                <a:latin typeface="Open Sans Extra Bold"/>
+            <a:r>
+              <a:rPr b="1" sz="4400">
+                <a:solidFill>
+                  <a:srgbClr val="0F172A"/>
+                </a:solidFill>
+                <a:latin typeface="Lato"/>
               </a:rPr>
               <a:t>References</a:t>
             </a:r>
@@ -8231,8 +8038,8 @@
         </p:nvSpPr>
         <p:spPr>
           <a:xfrm>
-            <a:off x="1828800" y="2286000"/>
-            <a:ext cx="14630400" cy="7132320"/>
+            <a:off x="1645920" y="2194560"/>
+            <a:ext cx="14996159" cy="7132320"/>
           </a:xfrm>
           <a:prstGeom prst="rect">
             <a:avLst/>
@@ -8246,18 +8053,18 @@
           <a:p>
             <a:pPr>
               <a:lnSpc>
-                <a:spcPct val="120000"/>
+                <a:spcPct val="122000"/>
               </a:lnSpc>
               <a:spcAft>
-                <a:spcPts val="1400"/>
+                <a:spcPts val="1600"/>
               </a:spcAft>
             </a:pPr>
             <a:r>
-              <a:rPr sz="1800" b="0">
-                <a:solidFill>
-                  <a:srgbClr val="0F172A"/>
-                </a:solidFill>
-                <a:latin typeface="Open Sans"/>
+              <a:rPr b="0" sz="1800">
+                <a:solidFill>
+                  <a:srgbClr val="334155"/>
+                </a:solidFill>
+                <a:latin typeface="Lato"/>
               </a:rPr>
               <a:t>Silberschatz, A., Galvin, P. B., &amp; Gagne, G. (2021). Operating System Concepts (10th ed.). John Wiley &amp; Sons.</a:t>
             </a:r>
@@ -8265,18 +8072,18 @@
           <a:p>
             <a:pPr>
               <a:lnSpc>
-                <a:spcPct val="120000"/>
+                <a:spcPct val="122000"/>
               </a:lnSpc>
               <a:spcAft>
-                <a:spcPts val="1400"/>
+                <a:spcPts val="1600"/>
               </a:spcAft>
             </a:pPr>
             <a:r>
-              <a:rPr sz="1800" b="0">
-                <a:solidFill>
-                  <a:srgbClr val="0F172A"/>
-                </a:solidFill>
-                <a:latin typeface="Open Sans"/>
+              <a:rPr b="0" sz="1800">
+                <a:solidFill>
+                  <a:srgbClr val="334155"/>
+                </a:solidFill>
+                <a:latin typeface="Lato"/>
               </a:rPr>
               <a:t>Tanenbaum, A. S., &amp; Bos, H. (2023). Modern Operating Systems (5th ed.). Pearson Education.</a:t>
             </a:r>
@@ -8284,18 +8091,18 @@
           <a:p>
             <a:pPr>
               <a:lnSpc>
-                <a:spcPct val="120000"/>
+                <a:spcPct val="122000"/>
               </a:lnSpc>
               <a:spcAft>
-                <a:spcPts val="1400"/>
+                <a:spcPts val="1600"/>
               </a:spcAft>
             </a:pPr>
             <a:r>
-              <a:rPr sz="1800" b="0">
-                <a:solidFill>
-                  <a:srgbClr val="0F172A"/>
-                </a:solidFill>
-                <a:latin typeface="Open Sans"/>
+              <a:rPr b="0" sz="1800">
+                <a:solidFill>
+                  <a:srgbClr val="334155"/>
+                </a:solidFill>
+                <a:latin typeface="Lato"/>
               </a:rPr>
               <a:t>Al-Kharabsheh, K. et al. (2022). "Evaluating Interactive Visual Simulators for Operating Systems Education." IEEE Transactions on Learning Technologies, 15(3), 340-352.</a:t>
             </a:r>
@@ -8303,18 +8110,18 @@
           <a:p>
             <a:pPr>
               <a:lnSpc>
-                <a:spcPct val="120000"/>
+                <a:spcPct val="122000"/>
               </a:lnSpc>
               <a:spcAft>
-                <a:spcPts val="1400"/>
+                <a:spcPts val="1600"/>
               </a:spcAft>
             </a:pPr>
             <a:r>
-              <a:rPr sz="1800" b="0">
-                <a:solidFill>
-                  <a:srgbClr val="0F172A"/>
-                </a:solidFill>
-                <a:latin typeface="Open Sans"/>
+              <a:rPr b="0" sz="1800">
+                <a:solidFill>
+                  <a:srgbClr val="334155"/>
+                </a:solidFill>
+                <a:latin typeface="Lato"/>
               </a:rPr>
               <a:t>Robbins, K. A., &amp; Robbins, S. (2020). "Practical UNIX and Systems Programming Visualization." ACM Technical Symposium on Computer Science Education (SIGCSE), 52(1), 112-118.</a:t>
             </a:r>
@@ -8322,18 +8129,18 @@
           <a:p>
             <a:pPr>
               <a:lnSpc>
-                <a:spcPct val="120000"/>
+                <a:spcPct val="122000"/>
               </a:lnSpc>
               <a:spcAft>
-                <a:spcPts val="1400"/>
+                <a:spcPts val="1600"/>
               </a:spcAft>
             </a:pPr>
             <a:r>
-              <a:rPr sz="1800" b="0">
-                <a:solidFill>
-                  <a:srgbClr val="0F172A"/>
-                </a:solidFill>
-                <a:latin typeface="Open Sans"/>
+              <a:rPr b="0" sz="1800">
+                <a:solidFill>
+                  <a:srgbClr val="334155"/>
+                </a:solidFill>
+                <a:latin typeface="Lato"/>
               </a:rPr>
               <a:t>Love, R. (2018). Linux Kernel Development (3rd ed.). Addison-Wesley Professional.</a:t>
             </a:r>
@@ -8362,8 +8169,8 @@
         </p:blipFill>
         <p:spPr>
           <a:xfrm>
-            <a:off x="14762973" y="-2078"/>
-            <a:ext cx="2475191" cy="2097206"/>
+            <a:off x="14767559" y="0"/>
+            <a:ext cx="2478024" cy="2093976"/>
           </a:xfrm>
           <a:prstGeom prst="rect">
             <a:avLst/>
@@ -8731,30 +8538,25 @@
         </p:nvSpPr>
         <p:spPr>
           <a:xfrm>
-            <a:off x="1723107" y="900442"/>
-            <a:ext cx="9354483" cy="1194686"/>
+            <a:off x="1097280" y="777240"/>
+            <a:ext cx="12801600" cy="1097280"/>
           </a:xfrm>
           <a:prstGeom prst="rect">
             <a:avLst/>
           </a:prstGeom>
         </p:spPr>
         <p:txBody>
-          <a:bodyPr lIns="0" tIns="0" rIns="0" bIns="0" rtlCol="0" anchor="t">
+          <a:bodyPr lIns="0" tIns="0" rIns="0" bIns="0" rtlCol="0" anchor="t" wrap="square">
             <a:spAutoFit/>
           </a:bodyPr>
           <a:lstStyle/>
           <a:p>
-            <a:pPr algn="l">
-              <a:lnSpc>
-                <a:spcPts val="10248"/>
-              </a:lnSpc>
-              <a:spcBef>
-                <a:spcPct val="0"/>
-              </a:spcBef>
-            </a:pPr>
-            <a:r>
-              <a:rPr sz="6000">
-                <a:latin typeface="Open Sans Extra Bold"/>
+            <a:r>
+              <a:rPr b="1" sz="4400">
+                <a:solidFill>
+                  <a:srgbClr val="0F172A"/>
+                </a:solidFill>
+                <a:latin typeface="Lato"/>
               </a:rPr>
               <a:t>Conclusion</a:t>
             </a:r>
@@ -8824,8 +8626,8 @@
         </p:nvSpPr>
         <p:spPr>
           <a:xfrm>
-            <a:off x="1828800" y="2377440"/>
-            <a:ext cx="14630400" cy="6858000"/>
+            <a:off x="1645920" y="2194560"/>
+            <a:ext cx="14996159" cy="7132320"/>
           </a:xfrm>
           <a:prstGeom prst="rect">
             <a:avLst/>
@@ -8839,27 +8641,27 @@
           <a:p>
             <a:pPr>
               <a:lnSpc>
-                <a:spcPct val="120000"/>
+                <a:spcPct val="122000"/>
               </a:lnSpc>
               <a:spcAft>
-                <a:spcPts val="1400"/>
+                <a:spcPts val="2000"/>
               </a:spcAft>
             </a:pPr>
             <a:r>
-              <a:rPr sz="2000" b="1">
+              <a:rPr b="1" sz="2000">
                 <a:solidFill>
                   <a:srgbClr val="0F172A"/>
                 </a:solidFill>
-                <a:latin typeface="Open Sans"/>
+                <a:latin typeface="Lato"/>
               </a:rPr>
               <a:t>Comprehensive Integration:</a:t>
             </a:r>
             <a:r>
-              <a:rPr sz="2000" b="0">
+              <a:rPr b="0" sz="2000">
                 <a:solidFill>
                   <a:srgbClr val="334155"/>
                 </a:solidFill>
-                <a:latin typeface="Open Sans"/>
+                <a:latin typeface="Lato"/>
               </a:rPr>
               <a:t> Successfully unified 10 core Operating Systems domains into a single production-quality laboratory platform.</a:t>
             </a:r>
@@ -8867,27 +8669,27 @@
           <a:p>
             <a:pPr>
               <a:lnSpc>
-                <a:spcPct val="120000"/>
+                <a:spcPct val="122000"/>
               </a:lnSpc>
               <a:spcAft>
-                <a:spcPts val="1400"/>
+                <a:spcPts val="2000"/>
               </a:spcAft>
             </a:pPr>
             <a:r>
-              <a:rPr sz="2000" b="1">
+              <a:rPr b="1" sz="2000">
                 <a:solidFill>
                   <a:srgbClr val="0F172A"/>
                 </a:solidFill>
-                <a:latin typeface="Open Sans"/>
+                <a:latin typeface="Lato"/>
               </a:rPr>
               <a:t>Pedagogical Impact:</a:t>
             </a:r>
             <a:r>
-              <a:rPr sz="2000" b="0">
+              <a:rPr b="0" sz="2000">
                 <a:solidFill>
                   <a:srgbClr val="334155"/>
                 </a:solidFill>
-                <a:latin typeface="Open Sans"/>
+                <a:latin typeface="Lato"/>
               </a:rPr>
               <a:t> Bridges abstract theoretical textbook models with concrete visual execution, enabling intuitive experimentation for CS students.</a:t>
             </a:r>
@@ -8895,27 +8697,27 @@
           <a:p>
             <a:pPr>
               <a:lnSpc>
-                <a:spcPct val="120000"/>
+                <a:spcPct val="122000"/>
               </a:lnSpc>
               <a:spcAft>
-                <a:spcPts val="1400"/>
+                <a:spcPts val="2000"/>
               </a:spcAft>
             </a:pPr>
             <a:r>
-              <a:rPr sz="2000" b="1">
+              <a:rPr b="1" sz="2000">
                 <a:solidFill>
                   <a:srgbClr val="0F172A"/>
                 </a:solidFill>
-                <a:latin typeface="Open Sans"/>
+                <a:latin typeface="Lato"/>
               </a:rPr>
               <a:t>Engineering Rigor:</a:t>
             </a:r>
             <a:r>
-              <a:rPr sz="2000" b="0">
+              <a:rPr b="0" sz="2000">
                 <a:solidFill>
                   <a:srgbClr val="334155"/>
                 </a:solidFill>
-                <a:latin typeface="Open Sans"/>
+                <a:latin typeface="Lato"/>
               </a:rPr>
               <a:t> Combines high-performance C++20 simulation accuracy with real POSIX kernel integration and 150 automated verification tests.</a:t>
             </a:r>
@@ -8923,27 +8725,27 @@
           <a:p>
             <a:pPr>
               <a:lnSpc>
-                <a:spcPct val="120000"/>
+                <a:spcPct val="122000"/>
               </a:lnSpc>
               <a:spcAft>
-                <a:spcPts val="1400"/>
+                <a:spcPts val="2000"/>
               </a:spcAft>
             </a:pPr>
             <a:r>
-              <a:rPr sz="2000" b="1">
+              <a:rPr b="1" sz="2000">
                 <a:solidFill>
                   <a:srgbClr val="0F172A"/>
                 </a:solidFill>
-                <a:latin typeface="Open Sans"/>
+                <a:latin typeface="Lato"/>
               </a:rPr>
               <a:t>Accessible Deployment:</a:t>
             </a:r>
             <a:r>
-              <a:rPr sz="2000" b="0">
+              <a:rPr b="0" sz="2000">
                 <a:solidFill>
                   <a:srgbClr val="334155"/>
                 </a:solidFill>
-                <a:latin typeface="Open Sans"/>
+                <a:latin typeface="Lato"/>
               </a:rPr>
               <a:t> Zero external pip dependencies, instant browser launch, and modern light-theme devtool ergonomics.</a:t>
             </a:r>
@@ -8972,8 +8774,8 @@
         </p:blipFill>
         <p:spPr>
           <a:xfrm>
-            <a:off x="14762973" y="0"/>
-            <a:ext cx="2475191" cy="2097206"/>
+            <a:off x="14767559" y="0"/>
+            <a:ext cx="2478024" cy="2093976"/>
           </a:xfrm>
           <a:prstGeom prst="rect">
             <a:avLst/>
